--- a/dist/초2/수학/자료와규칙/초2_수학_자료와규칙_03_무늬와수의규칙_학생용.pptx
+++ b/dist/초2/수학/자료와규칙/초2_수학_자료와규칙_03_무늬와수의규칙_학생용.pptx
@@ -121,13 +121,13 @@
   <p:extLst>
     <p:ext uri="{521415D9-36F7-43E2-AB2F-B90AF26B5E84}">
       <p14:sectionLst xmlns:p14="http://schemas.microsoft.com/office/powerpoint/2010/main">
-        <p14:section name="도입" id="{81dcd505-7a01-d0e4-e8da-dc0d9ea14c7d}">
+        <p14:section name="도입" id="{73a5e351-20d6-df21-b9c4-8559473ee09a}">
           <p14:sldIdLst>
             <p14:sldId id="256"/>
             <p14:sldId id="257"/>
           </p14:sldIdLst>
         </p14:section>
-        <p14:section name="개념" id="{efc6e018-5138-ab3e-c857-2d1952247338}">
+        <p14:section name="개념" id="{74a839cc-9140-4a3b-5825-5208fd7cba74}">
           <p14:sldIdLst>
             <p14:sldId id="258"/>
             <p14:sldId id="259"/>
@@ -137,31 +137,31 @@
             <p14:sldId id="265"/>
           </p14:sldIdLst>
         </p14:section>
-        <p14:section name="연습" id="{048212c6-8949-8504-cdc4-bdfbbb4e9e4c}">
+        <p14:section name="연습" id="{06328e48-de47-1c80-2667-31337a4c5420}">
           <p14:sldIdLst>
             <p14:sldId id="261"/>
             <p14:sldId id="262"/>
             <p14:sldId id="266"/>
           </p14:sldIdLst>
         </p14:section>
-        <p14:section name="개념" id="{33605f8d-88fb-c676-7e1f-cb38d6165576}">
+        <p14:section name="개념" id="{3480687f-28d7-807f-8e2a-d4b6b49629f4}">
           <p14:sldIdLst/>
         </p14:section>
-        <p14:section name="연습" id="{863e55f7-2f71-7fad-0f7d-9e22e650a9c9}">
+        <p14:section name="연습" id="{358b723d-9910-9b84-3f98-b0f64a15818e}">
           <p14:sldIdLst/>
         </p14:section>
-        <p14:section name="확인" id="{11397655-87de-1411-ad11-ef604aeb4a6e}">
+        <p14:section name="확인" id="{bc824d04-07ab-0169-5d37-b1bf2efe4180}">
           <p14:sldIdLst>
             <p14:sldId id="267"/>
             <p14:sldId id="268"/>
           </p14:sldIdLst>
         </p14:section>
-        <p14:section name="정리" id="{65c9144c-1c1b-4fa5-d7cd-051078c0726e}">
+        <p14:section name="정리" id="{0ea90470-823f-184e-d6ab-65827d346bb1}">
           <p14:sldIdLst>
             <p14:sldId id="269"/>
           </p14:sldIdLst>
         </p14:section>
-        <p14:section name="보충" id="{7f5d2b84-8784-ae3f-b869-0a5af50ef54a}">
+        <p14:section name="보충" id="{6b84344e-f2e9-69b5-5f4e-3a2152318995}">
           <p14:sldIdLst>
             <p14:sldId id="270"/>
           </p14:sldIdLst>
@@ -3352,7 +3352,7 @@
       </p:sp>
       <p:sp>
         <p:nvSpPr>
-          <p:cNvPr id="3" name="S10-card134"/>
+          <p:cNvPr id="3" name="S10-card109"/>
           <p:cNvSpPr/>
           <p:nvPr/>
         </p:nvSpPr>
@@ -3379,7 +3379,7 @@
       </p:sp>
       <p:sp>
         <p:nvSpPr>
-          <p:cNvPr id="4" name="S10-cardtext135"/>
+          <p:cNvPr id="4" name="S10-cardtext110"/>
           <p:cNvSpPr txBox="1"/>
           <p:nvPr/>
         </p:nvSpPr>
@@ -3421,7 +3421,7 @@
       </p:sp>
       <p:sp>
         <p:nvSpPr>
-          <p:cNvPr id="5" name="S10-card136"/>
+          <p:cNvPr id="5" name="S10-card111"/>
           <p:cNvSpPr/>
           <p:nvPr/>
         </p:nvSpPr>
@@ -3448,7 +3448,7 @@
       </p:sp>
       <p:sp>
         <p:nvSpPr>
-          <p:cNvPr id="6" name="S10-cardtext137"/>
+          <p:cNvPr id="6" name="S10-cardtext112"/>
           <p:cNvSpPr txBox="1"/>
           <p:nvPr/>
         </p:nvSpPr>
@@ -3490,7 +3490,7 @@
       </p:sp>
       <p:graphicFrame>
         <p:nvGraphicFramePr>
-          <p:cNvPr id="11" name="S10-table138"/>
+          <p:cNvPr id="11" name="S10-table113"/>
           <p:cNvGraphicFramePr>
             <a:graphicFrameLocks noGrp="1"/>
           </p:cNvGraphicFramePr>
@@ -6098,7 +6098,7 @@
       </p:sp>
       <p:sp>
         <p:nvSpPr>
-          <p:cNvPr id="3" name="S11-text139"/>
+          <p:cNvPr id="3" name="S11-text114"/>
           <p:cNvSpPr txBox="1"/>
           <p:nvPr/>
         </p:nvSpPr>
@@ -6137,7 +6137,7 @@
       </p:sp>
       <p:sp>
         <p:nvSpPr>
-          <p:cNvPr id="4" name="S11-card140"/>
+          <p:cNvPr id="4" name="S11-card115"/>
           <p:cNvSpPr/>
           <p:nvPr/>
         </p:nvSpPr>
@@ -6164,7 +6164,7 @@
       </p:sp>
       <p:sp>
         <p:nvSpPr>
-          <p:cNvPr id="5" name="S11-cardtext141"/>
+          <p:cNvPr id="5" name="S11-cardtext116"/>
           <p:cNvSpPr txBox="1"/>
           <p:nvPr/>
         </p:nvSpPr>
@@ -6206,7 +6206,7 @@
       </p:sp>
       <p:graphicFrame>
         <p:nvGraphicFramePr>
-          <p:cNvPr id="12" name="S11-table142"/>
+          <p:cNvPr id="12" name="S11-table117"/>
           <p:cNvGraphicFramePr>
             <a:graphicFrameLocks noGrp="1"/>
           </p:cNvGraphicFramePr>
@@ -7607,7 +7607,7 @@
       </p:graphicFrame>
       <p:graphicFrame>
         <p:nvGraphicFramePr>
-          <p:cNvPr id="23" name="S11-table143"/>
+          <p:cNvPr id="23" name="S11-table118"/>
           <p:cNvGraphicFramePr>
             <a:graphicFrameLocks noGrp="1"/>
           </p:cNvGraphicFramePr>
@@ -9122,7 +9122,7 @@
       </p:sp>
       <p:sp>
         <p:nvSpPr>
-          <p:cNvPr id="3" name="S12-text144"/>
+          <p:cNvPr id="3" name="S12-text119"/>
           <p:cNvSpPr txBox="1"/>
           <p:nvPr/>
         </p:nvSpPr>
@@ -9161,7 +9161,7 @@
       </p:sp>
       <p:sp>
         <p:nvSpPr>
-          <p:cNvPr id="4" name="S12-card145"/>
+          <p:cNvPr id="4" name="S12-card120"/>
           <p:cNvSpPr/>
           <p:nvPr/>
         </p:nvSpPr>
@@ -9188,7 +9188,7 @@
       </p:sp>
       <p:sp>
         <p:nvSpPr>
-          <p:cNvPr id="5" name="S12-cardtext146"/>
+          <p:cNvPr id="5" name="S12-cardtext121"/>
           <p:cNvSpPr txBox="1"/>
           <p:nvPr/>
         </p:nvSpPr>
@@ -9230,7 +9230,7 @@
       </p:sp>
       <p:sp>
         <p:nvSpPr>
-          <p:cNvPr id="6" name="S12-tile147"/>
+          <p:cNvPr id="6" name="S12-tile122"/>
           <p:cNvSpPr txBox="1"/>
           <p:nvPr/>
         </p:nvSpPr>
@@ -9277,7 +9277,7 @@
       </p:sp>
       <p:sp>
         <p:nvSpPr>
-          <p:cNvPr id="7" name="S12-tile148"/>
+          <p:cNvPr id="7" name="S12-tile123"/>
           <p:cNvSpPr txBox="1"/>
           <p:nvPr/>
         </p:nvSpPr>
@@ -9324,7 +9324,7 @@
       </p:sp>
       <p:sp>
         <p:nvSpPr>
-          <p:cNvPr id="8" name="S12-tile149"/>
+          <p:cNvPr id="8" name="S12-tile124"/>
           <p:cNvSpPr txBox="1"/>
           <p:nvPr/>
         </p:nvSpPr>
@@ -9371,7 +9371,7 @@
       </p:sp>
       <p:sp>
         <p:nvSpPr>
-          <p:cNvPr id="9" name="S12-tile150"/>
+          <p:cNvPr id="9" name="S12-tile125"/>
           <p:cNvSpPr txBox="1"/>
           <p:nvPr/>
         </p:nvSpPr>
@@ -9418,7 +9418,7 @@
       </p:sp>
       <p:sp>
         <p:nvSpPr>
-          <p:cNvPr id="10" name="S12-tile151"/>
+          <p:cNvPr id="10" name="S12-tile126"/>
           <p:cNvSpPr txBox="1"/>
           <p:nvPr/>
         </p:nvSpPr>
@@ -9465,7 +9465,7 @@
       </p:sp>
       <p:sp>
         <p:nvSpPr>
-          <p:cNvPr id="11" name="S12-tile152"/>
+          <p:cNvPr id="11" name="S12-tile127"/>
           <p:cNvSpPr txBox="1"/>
           <p:nvPr/>
         </p:nvSpPr>
@@ -9512,7 +9512,7 @@
       </p:sp>
       <p:sp>
         <p:nvSpPr>
-          <p:cNvPr id="12" name="S12-tile153"/>
+          <p:cNvPr id="12" name="S12-tile128"/>
           <p:cNvSpPr txBox="1"/>
           <p:nvPr/>
         </p:nvSpPr>
@@ -9559,7 +9559,7 @@
       </p:sp>
       <p:sp>
         <p:nvSpPr>
-          <p:cNvPr id="13" name="S12-label154"/>
+          <p:cNvPr id="13" name="S12-label129"/>
           <p:cNvSpPr txBox="1"/>
           <p:nvPr/>
         </p:nvSpPr>
@@ -9598,7 +9598,7 @@
       </p:sp>
       <p:graphicFrame>
         <p:nvGraphicFramePr>
-          <p:cNvPr id="13" name="S12-table155"/>
+          <p:cNvPr id="13" name="S12-table130"/>
           <p:cNvGraphicFramePr>
             <a:graphicFrameLocks noGrp="1"/>
           </p:cNvGraphicFramePr>
@@ -10589,7 +10589,7 @@
       </p:graphicFrame>
       <p:sp>
         <p:nvSpPr>
-          <p:cNvPr id="15" name="S12-label156"/>
+          <p:cNvPr id="15" name="S12-label131"/>
           <p:cNvSpPr txBox="1"/>
           <p:nvPr/>
         </p:nvSpPr>
@@ -10742,7 +10742,7 @@
       </p:sp>
       <p:sp>
         <p:nvSpPr>
-          <p:cNvPr id="3" name="S14-text157"/>
+          <p:cNvPr id="3" name="S14-text132"/>
           <p:cNvSpPr txBox="1"/>
           <p:nvPr/>
         </p:nvSpPr>
@@ -10781,7 +10781,7 @@
       </p:sp>
       <p:sp>
         <p:nvSpPr>
-          <p:cNvPr id="4" name="S14-card158"/>
+          <p:cNvPr id="4" name="S14-card133"/>
           <p:cNvSpPr/>
           <p:nvPr/>
         </p:nvSpPr>
@@ -10808,7 +10808,7 @@
       </p:sp>
       <p:sp>
         <p:nvSpPr>
-          <p:cNvPr id="5" name="S14-cardtext159"/>
+          <p:cNvPr id="5" name="S14-cardtext134"/>
           <p:cNvSpPr txBox="1"/>
           <p:nvPr/>
         </p:nvSpPr>
@@ -10850,7 +10850,7 @@
       </p:sp>
       <p:sp>
         <p:nvSpPr>
-          <p:cNvPr id="6" name="S14-chip160"/>
+          <p:cNvPr id="6" name="S14-chip135"/>
           <p:cNvSpPr txBox="1"/>
           <p:nvPr/>
         </p:nvSpPr>
@@ -10897,7 +10897,7 @@
       </p:sp>
       <p:sp>
         <p:nvSpPr>
-          <p:cNvPr id="7" name="S14-card161"/>
+          <p:cNvPr id="7" name="S14-card136"/>
           <p:cNvSpPr/>
           <p:nvPr/>
         </p:nvSpPr>
@@ -10924,7 +10924,7 @@
       </p:sp>
       <p:sp>
         <p:nvSpPr>
-          <p:cNvPr id="8" name="S14-cardtext162"/>
+          <p:cNvPr id="8" name="S14-cardtext137"/>
           <p:cNvSpPr txBox="1"/>
           <p:nvPr/>
         </p:nvSpPr>
@@ -10966,7 +10966,7 @@
       </p:sp>
       <p:sp>
         <p:nvSpPr>
-          <p:cNvPr id="9" name="S14-chip163"/>
+          <p:cNvPr id="9" name="S14-chip138"/>
           <p:cNvSpPr txBox="1"/>
           <p:nvPr/>
         </p:nvSpPr>
@@ -11013,7 +11013,7 @@
       </p:sp>
       <p:sp>
         <p:nvSpPr>
-          <p:cNvPr id="10" name="S14-card164"/>
+          <p:cNvPr id="10" name="S14-card139"/>
           <p:cNvSpPr/>
           <p:nvPr/>
         </p:nvSpPr>
@@ -11040,7 +11040,7 @@
       </p:sp>
       <p:sp>
         <p:nvSpPr>
-          <p:cNvPr id="11" name="S14-cardtext165"/>
+          <p:cNvPr id="11" name="S14-cardtext140"/>
           <p:cNvSpPr txBox="1"/>
           <p:nvPr/>
         </p:nvSpPr>
@@ -11082,7 +11082,7 @@
       </p:sp>
       <p:sp>
         <p:nvSpPr>
-          <p:cNvPr id="12" name="S14-chip166"/>
+          <p:cNvPr id="12" name="S14-chip141"/>
           <p:cNvSpPr txBox="1"/>
           <p:nvPr/>
         </p:nvSpPr>
@@ -11129,7 +11129,7 @@
       </p:sp>
       <p:sp>
         <p:nvSpPr>
-          <p:cNvPr id="13" name="S14-card167"/>
+          <p:cNvPr id="13" name="S14-card142"/>
           <p:cNvSpPr/>
           <p:nvPr/>
         </p:nvSpPr>
@@ -11156,7 +11156,7 @@
       </p:sp>
       <p:sp>
         <p:nvSpPr>
-          <p:cNvPr id="14" name="S14-cardtext168"/>
+          <p:cNvPr id="14" name="S14-cardtext143"/>
           <p:cNvSpPr txBox="1"/>
           <p:nvPr/>
         </p:nvSpPr>
@@ -11312,7 +11312,7 @@
       </p:sp>
       <p:sp>
         <p:nvSpPr>
-          <p:cNvPr id="3" name="S15-card169"/>
+          <p:cNvPr id="3" name="S15-card144"/>
           <p:cNvSpPr/>
           <p:nvPr/>
         </p:nvSpPr>
@@ -11339,7 +11339,7 @@
       </p:sp>
       <p:sp>
         <p:nvSpPr>
-          <p:cNvPr id="4" name="S15-cardtext170"/>
+          <p:cNvPr id="4" name="S15-cardtext145"/>
           <p:cNvSpPr txBox="1"/>
           <p:nvPr/>
         </p:nvSpPr>
@@ -11381,7 +11381,7 @@
       </p:sp>
       <p:sp>
         <p:nvSpPr>
-          <p:cNvPr id="5" name="S15-chip171"/>
+          <p:cNvPr id="5" name="S15-chip146"/>
           <p:cNvSpPr txBox="1"/>
           <p:nvPr/>
         </p:nvSpPr>
@@ -11428,7 +11428,7 @@
       </p:sp>
       <p:sp>
         <p:nvSpPr>
-          <p:cNvPr id="6" name="S15-chip172"/>
+          <p:cNvPr id="6" name="S15-chip147"/>
           <p:cNvSpPr txBox="1"/>
           <p:nvPr/>
         </p:nvSpPr>
@@ -11475,7 +11475,7 @@
       </p:sp>
       <p:sp>
         <p:nvSpPr>
-          <p:cNvPr id="7" name="S15-text173"/>
+          <p:cNvPr id="7" name="S15-text148"/>
           <p:cNvSpPr txBox="1"/>
           <p:nvPr/>
         </p:nvSpPr>
@@ -11514,7 +11514,7 @@
       </p:sp>
       <p:sp>
         <p:nvSpPr>
-          <p:cNvPr id="8" name="S15-text174"/>
+          <p:cNvPr id="8" name="S15-text149"/>
           <p:cNvSpPr txBox="1"/>
           <p:nvPr/>
         </p:nvSpPr>
@@ -11570,7 +11570,7 @@
       </p:sp>
       <p:sp>
         <p:nvSpPr>
-          <p:cNvPr id="9" name="S15-text175"/>
+          <p:cNvPr id="9" name="S15-text150"/>
           <p:cNvSpPr txBox="1"/>
           <p:nvPr/>
         </p:nvSpPr>
@@ -11609,7 +11609,7 @@
       </p:sp>
       <p:sp>
         <p:nvSpPr>
-          <p:cNvPr id="10" name="S15-text176"/>
+          <p:cNvPr id="10" name="S15-text151"/>
           <p:cNvSpPr txBox="1"/>
           <p:nvPr/>
         </p:nvSpPr>
@@ -11640,7 +11640,7 @@
                 <a:ea typeface="맑은 고딕" pitchFamily="34" charset="-122"/>
                 <a:cs typeface="맑은 고딕" pitchFamily="34" charset="-120"/>
               </a:rPr>
-              <a:t>③ 덧셈표에서 오른쪽</a:t>
+              <a:t>③ 덧셈표에서</a:t>
             </a:r>
             <a:endParaRPr lang="ko-KR" sz="2600" dirty="0"/>
           </a:p>
@@ -11657,7 +11657,7 @@
                 <a:ea typeface="맑은 고딕" pitchFamily="34" charset="-122"/>
                 <a:cs typeface="맑은 고딕" pitchFamily="34" charset="-120"/>
               </a:rPr>
-              <a:t>으로 가면?</a:t>
+              <a:t>오른쪽으로 가면?</a:t>
             </a:r>
             <a:endParaRPr lang="ko-KR" sz="2600" dirty="0"/>
           </a:p>
@@ -11665,7 +11665,7 @@
       </p:sp>
       <p:sp>
         <p:nvSpPr>
-          <p:cNvPr id="11" name="S15-text177"/>
+          <p:cNvPr id="11" name="S15-text152"/>
           <p:cNvSpPr txBox="1"/>
           <p:nvPr/>
         </p:nvSpPr>
@@ -11818,7 +11818,7 @@
       </p:sp>
       <p:sp>
         <p:nvSpPr>
-          <p:cNvPr id="3" name="S16-text178"/>
+          <p:cNvPr id="3" name="S16-text153"/>
           <p:cNvSpPr txBox="1"/>
           <p:nvPr/>
         </p:nvSpPr>
@@ -11857,7 +11857,7 @@
       </p:sp>
       <p:sp>
         <p:nvSpPr>
-          <p:cNvPr id="4" name="S16-card179"/>
+          <p:cNvPr id="4" name="S16-card154"/>
           <p:cNvSpPr/>
           <p:nvPr/>
         </p:nvSpPr>
@@ -11884,7 +11884,7 @@
       </p:sp>
       <p:sp>
         <p:nvSpPr>
-          <p:cNvPr id="5" name="S16-cardtext180"/>
+          <p:cNvPr id="5" name="S16-cardtext155"/>
           <p:cNvSpPr txBox="1"/>
           <p:nvPr/>
         </p:nvSpPr>
@@ -11926,7 +11926,7 @@
       </p:sp>
       <p:sp>
         <p:nvSpPr>
-          <p:cNvPr id="6" name="S16-card181"/>
+          <p:cNvPr id="6" name="S16-card156"/>
           <p:cNvSpPr/>
           <p:nvPr/>
         </p:nvSpPr>
@@ -11953,7 +11953,7 @@
       </p:sp>
       <p:sp>
         <p:nvSpPr>
-          <p:cNvPr id="7" name="S16-cardtext182"/>
+          <p:cNvPr id="7" name="S16-cardtext157"/>
           <p:cNvSpPr txBox="1"/>
           <p:nvPr/>
         </p:nvSpPr>
@@ -11995,7 +11995,7 @@
       </p:sp>
       <p:sp>
         <p:nvSpPr>
-          <p:cNvPr id="8" name="S16-line183"/>
+          <p:cNvPr id="8" name="S16-line158"/>
           <p:cNvSpPr/>
           <p:nvPr/>
         </p:nvSpPr>
@@ -12020,7 +12020,7 @@
       </p:sp>
       <p:sp>
         <p:nvSpPr>
-          <p:cNvPr id="9" name="S16-line184"/>
+          <p:cNvPr id="9" name="S16-line159"/>
           <p:cNvSpPr/>
           <p:nvPr/>
         </p:nvSpPr>
@@ -12043,7 +12043,7 @@
       </p:sp>
       <p:sp>
         <p:nvSpPr>
-          <p:cNvPr id="10" name="S16-label185"/>
+          <p:cNvPr id="10" name="S16-label160"/>
           <p:cNvSpPr txBox="1"/>
           <p:nvPr/>
         </p:nvSpPr>
@@ -12082,7 +12082,7 @@
       </p:sp>
       <p:sp>
         <p:nvSpPr>
-          <p:cNvPr id="11" name="S16-line186"/>
+          <p:cNvPr id="11" name="S16-line161"/>
           <p:cNvSpPr/>
           <p:nvPr/>
         </p:nvSpPr>
@@ -12105,7 +12105,7 @@
       </p:sp>
       <p:sp>
         <p:nvSpPr>
-          <p:cNvPr id="12" name="S16-label187"/>
+          <p:cNvPr id="12" name="S16-label162"/>
           <p:cNvSpPr txBox="1"/>
           <p:nvPr/>
         </p:nvSpPr>
@@ -12144,7 +12144,7 @@
       </p:sp>
       <p:sp>
         <p:nvSpPr>
-          <p:cNvPr id="13" name="S16-line188"/>
+          <p:cNvPr id="13" name="S16-line163"/>
           <p:cNvSpPr/>
           <p:nvPr/>
         </p:nvSpPr>
@@ -12167,7 +12167,7 @@
       </p:sp>
       <p:sp>
         <p:nvSpPr>
-          <p:cNvPr id="14" name="S16-label189"/>
+          <p:cNvPr id="14" name="S16-label164"/>
           <p:cNvSpPr txBox="1"/>
           <p:nvPr/>
         </p:nvSpPr>
@@ -12206,7 +12206,7 @@
       </p:sp>
       <p:sp>
         <p:nvSpPr>
-          <p:cNvPr id="15" name="S16-line190"/>
+          <p:cNvPr id="15" name="S16-line165"/>
           <p:cNvSpPr/>
           <p:nvPr/>
         </p:nvSpPr>
@@ -12229,7 +12229,7 @@
       </p:sp>
       <p:sp>
         <p:nvSpPr>
-          <p:cNvPr id="16" name="S16-label191"/>
+          <p:cNvPr id="16" name="S16-label166"/>
           <p:cNvSpPr txBox="1"/>
           <p:nvPr/>
         </p:nvSpPr>
@@ -12268,7 +12268,7 @@
       </p:sp>
       <p:sp>
         <p:nvSpPr>
-          <p:cNvPr id="17" name="S16-line192"/>
+          <p:cNvPr id="17" name="S16-line167"/>
           <p:cNvSpPr/>
           <p:nvPr/>
         </p:nvSpPr>
@@ -12291,7 +12291,7 @@
       </p:sp>
       <p:sp>
         <p:nvSpPr>
-          <p:cNvPr id="18" name="S16-label193"/>
+          <p:cNvPr id="18" name="S16-label168"/>
           <p:cNvSpPr txBox="1"/>
           <p:nvPr/>
         </p:nvSpPr>
@@ -12330,7 +12330,7 @@
       </p:sp>
       <p:sp>
         <p:nvSpPr>
-          <p:cNvPr id="19" name="S16-line194"/>
+          <p:cNvPr id="19" name="S16-line169"/>
           <p:cNvSpPr/>
           <p:nvPr/>
         </p:nvSpPr>
@@ -12353,7 +12353,7 @@
       </p:sp>
       <p:sp>
         <p:nvSpPr>
-          <p:cNvPr id="20" name="S16-label195"/>
+          <p:cNvPr id="20" name="S16-label170"/>
           <p:cNvSpPr txBox="1"/>
           <p:nvPr/>
         </p:nvSpPr>
@@ -12392,7 +12392,7 @@
       </p:sp>
       <p:sp>
         <p:nvSpPr>
-          <p:cNvPr id="21" name="S16-line196"/>
+          <p:cNvPr id="21" name="S16-line171"/>
           <p:cNvSpPr/>
           <p:nvPr/>
         </p:nvSpPr>
@@ -12415,7 +12415,7 @@
       </p:sp>
       <p:sp>
         <p:nvSpPr>
-          <p:cNvPr id="22" name="S16-label197"/>
+          <p:cNvPr id="22" name="S16-label172"/>
           <p:cNvSpPr txBox="1"/>
           <p:nvPr/>
         </p:nvSpPr>
@@ -12454,7 +12454,7 @@
       </p:sp>
       <p:sp>
         <p:nvSpPr>
-          <p:cNvPr id="23" name="S16-line198"/>
+          <p:cNvPr id="23" name="S16-line173"/>
           <p:cNvSpPr/>
           <p:nvPr/>
         </p:nvSpPr>
@@ -12477,7 +12477,7 @@
       </p:sp>
       <p:sp>
         <p:nvSpPr>
-          <p:cNvPr id="24" name="S16-label199"/>
+          <p:cNvPr id="24" name="S16-label174"/>
           <p:cNvSpPr txBox="1"/>
           <p:nvPr/>
         </p:nvSpPr>
@@ -12516,7 +12516,7 @@
       </p:sp>
       <p:sp>
         <p:nvSpPr>
-          <p:cNvPr id="25" name="S16-line200"/>
+          <p:cNvPr id="25" name="S16-line175"/>
           <p:cNvSpPr/>
           <p:nvPr/>
         </p:nvSpPr>
@@ -12539,7 +12539,7 @@
       </p:sp>
       <p:sp>
         <p:nvSpPr>
-          <p:cNvPr id="26" name="S16-label201"/>
+          <p:cNvPr id="26" name="S16-label176"/>
           <p:cNvSpPr txBox="1"/>
           <p:nvPr/>
         </p:nvSpPr>
@@ -12578,7 +12578,7 @@
       </p:sp>
       <p:sp>
         <p:nvSpPr>
-          <p:cNvPr id="27" name="S16-line202"/>
+          <p:cNvPr id="27" name="S16-line177"/>
           <p:cNvSpPr/>
           <p:nvPr/>
         </p:nvSpPr>
@@ -12601,7 +12601,7 @@
       </p:sp>
       <p:sp>
         <p:nvSpPr>
-          <p:cNvPr id="28" name="S16-label203"/>
+          <p:cNvPr id="28" name="S16-label178"/>
           <p:cNvSpPr txBox="1"/>
           <p:nvPr/>
         </p:nvSpPr>
@@ -12640,7 +12640,7 @@
       </p:sp>
       <p:sp>
         <p:nvSpPr>
-          <p:cNvPr id="29" name="S16-line204"/>
+          <p:cNvPr id="29" name="S16-line179"/>
           <p:cNvSpPr/>
           <p:nvPr/>
         </p:nvSpPr>
@@ -12663,7 +12663,7 @@
       </p:sp>
       <p:sp>
         <p:nvSpPr>
-          <p:cNvPr id="30" name="S16-label205"/>
+          <p:cNvPr id="30" name="S16-label180"/>
           <p:cNvSpPr txBox="1"/>
           <p:nvPr/>
         </p:nvSpPr>
@@ -12702,7 +12702,7 @@
       </p:sp>
       <p:sp>
         <p:nvSpPr>
-          <p:cNvPr id="31" name="S16-mark206"/>
+          <p:cNvPr id="31" name="S16-mark181"/>
           <p:cNvSpPr/>
           <p:nvPr/>
         </p:nvSpPr>
@@ -12727,7 +12727,7 @@
       </p:sp>
       <p:sp>
         <p:nvSpPr>
-          <p:cNvPr id="32" name="S16-mark207"/>
+          <p:cNvPr id="32" name="S16-mark182"/>
           <p:cNvSpPr/>
           <p:nvPr/>
         </p:nvSpPr>
@@ -12752,7 +12752,7 @@
       </p:sp>
       <p:sp>
         <p:nvSpPr>
-          <p:cNvPr id="33" name="S16-mark208"/>
+          <p:cNvPr id="33" name="S16-mark183"/>
           <p:cNvSpPr/>
           <p:nvPr/>
         </p:nvSpPr>
@@ -12777,7 +12777,7 @@
       </p:sp>
       <p:sp>
         <p:nvSpPr>
-          <p:cNvPr id="34" name="S16-mark209"/>
+          <p:cNvPr id="34" name="S16-mark184"/>
           <p:cNvSpPr/>
           <p:nvPr/>
         </p:nvSpPr>
@@ -12802,7 +12802,7 @@
       </p:sp>
       <p:sp>
         <p:nvSpPr>
-          <p:cNvPr id="35" name="S16-mark210"/>
+          <p:cNvPr id="35" name="S16-mark185"/>
           <p:cNvSpPr/>
           <p:nvPr/>
         </p:nvSpPr>
@@ -12827,7 +12827,7 @@
       </p:sp>
       <p:sp>
         <p:nvSpPr>
-          <p:cNvPr id="36" name="S16-mark211"/>
+          <p:cNvPr id="36" name="S16-mark186"/>
           <p:cNvSpPr/>
           <p:nvPr/>
         </p:nvSpPr>
@@ -12852,7 +12852,7 @@
       </p:sp>
       <p:sp>
         <p:nvSpPr>
-          <p:cNvPr id="37" name="S16-line212"/>
+          <p:cNvPr id="37" name="S16-line187"/>
           <p:cNvSpPr/>
           <p:nvPr/>
         </p:nvSpPr>
@@ -12875,7 +12875,7 @@
       </p:sp>
       <p:sp>
         <p:nvSpPr>
-          <p:cNvPr id="38" name="S16-line213"/>
+          <p:cNvPr id="38" name="S16-line188"/>
           <p:cNvSpPr/>
           <p:nvPr/>
         </p:nvSpPr>
@@ -12899,7 +12899,7 @@
       </p:sp>
       <p:sp>
         <p:nvSpPr>
-          <p:cNvPr id="39" name="S16-label214"/>
+          <p:cNvPr id="39" name="S16-label189"/>
           <p:cNvSpPr txBox="1"/>
           <p:nvPr/>
         </p:nvSpPr>
@@ -12938,7 +12938,7 @@
       </p:sp>
       <p:sp>
         <p:nvSpPr>
-          <p:cNvPr id="40" name="S16-line215"/>
+          <p:cNvPr id="40" name="S16-line190"/>
           <p:cNvSpPr/>
           <p:nvPr/>
         </p:nvSpPr>
@@ -12961,7 +12961,7 @@
       </p:sp>
       <p:sp>
         <p:nvSpPr>
-          <p:cNvPr id="41" name="S16-line216"/>
+          <p:cNvPr id="41" name="S16-line191"/>
           <p:cNvSpPr/>
           <p:nvPr/>
         </p:nvSpPr>
@@ -12985,7 +12985,7 @@
       </p:sp>
       <p:sp>
         <p:nvSpPr>
-          <p:cNvPr id="42" name="S16-label217"/>
+          <p:cNvPr id="42" name="S16-label192"/>
           <p:cNvSpPr txBox="1"/>
           <p:nvPr/>
         </p:nvSpPr>
@@ -13024,7 +13024,7 @@
       </p:sp>
       <p:sp>
         <p:nvSpPr>
-          <p:cNvPr id="43" name="S16-line218"/>
+          <p:cNvPr id="43" name="S16-line193"/>
           <p:cNvSpPr/>
           <p:nvPr/>
         </p:nvSpPr>
@@ -13047,7 +13047,7 @@
       </p:sp>
       <p:sp>
         <p:nvSpPr>
-          <p:cNvPr id="44" name="S16-line219"/>
+          <p:cNvPr id="44" name="S16-line194"/>
           <p:cNvSpPr/>
           <p:nvPr/>
         </p:nvSpPr>
@@ -13071,7 +13071,7 @@
       </p:sp>
       <p:sp>
         <p:nvSpPr>
-          <p:cNvPr id="45" name="S16-label220"/>
+          <p:cNvPr id="45" name="S16-label195"/>
           <p:cNvSpPr txBox="1"/>
           <p:nvPr/>
         </p:nvSpPr>
@@ -13110,7 +13110,7 @@
       </p:sp>
       <p:sp>
         <p:nvSpPr>
-          <p:cNvPr id="46" name="S16-line221"/>
+          <p:cNvPr id="46" name="S16-line196"/>
           <p:cNvSpPr/>
           <p:nvPr/>
         </p:nvSpPr>
@@ -13133,7 +13133,7 @@
       </p:sp>
       <p:sp>
         <p:nvSpPr>
-          <p:cNvPr id="47" name="S16-line222"/>
+          <p:cNvPr id="47" name="S16-line197"/>
           <p:cNvSpPr/>
           <p:nvPr/>
         </p:nvSpPr>
@@ -13157,7 +13157,7 @@
       </p:sp>
       <p:sp>
         <p:nvSpPr>
-          <p:cNvPr id="48" name="S16-label223"/>
+          <p:cNvPr id="48" name="S16-label198"/>
           <p:cNvSpPr txBox="1"/>
           <p:nvPr/>
         </p:nvSpPr>
@@ -13196,7 +13196,7 @@
       </p:sp>
       <p:sp>
         <p:nvSpPr>
-          <p:cNvPr id="49" name="S16-line224"/>
+          <p:cNvPr id="49" name="S16-line199"/>
           <p:cNvSpPr/>
           <p:nvPr/>
         </p:nvSpPr>
@@ -13219,7 +13219,7 @@
       </p:sp>
       <p:sp>
         <p:nvSpPr>
-          <p:cNvPr id="50" name="S16-line225"/>
+          <p:cNvPr id="50" name="S16-line200"/>
           <p:cNvSpPr/>
           <p:nvPr/>
         </p:nvSpPr>
@@ -13243,7 +13243,7 @@
       </p:sp>
       <p:sp>
         <p:nvSpPr>
-          <p:cNvPr id="51" name="S16-label226"/>
+          <p:cNvPr id="51" name="S16-label201"/>
           <p:cNvSpPr txBox="1"/>
           <p:nvPr/>
         </p:nvSpPr>
@@ -13282,7 +13282,7 @@
       </p:sp>
       <p:sp>
         <p:nvSpPr>
-          <p:cNvPr id="52" name="S16-figure227" descr="0부터 10까지 2씩 뛰어 세는 수직선"/>
+          <p:cNvPr id="52" name="S16-figure202" descr="0부터 10까지 2씩 뛰어 세는 수직선"/>
           <p:cNvSpPr/>
           <p:nvPr/>
         </p:nvSpPr>
@@ -16413,7 +16413,46 @@
       </p:sp>
       <p:sp>
         <p:nvSpPr>
-          <p:cNvPr id="3" name="S06-card88"/>
+          <p:cNvPr id="3" name="S06-text88"/>
+          <p:cNvSpPr txBox="1"/>
+          <p:nvPr/>
+        </p:nvSpPr>
+        <p:spPr>
+          <a:xfrm>
+            <a:off x="548640" y="1325880"/>
+            <a:ext cx="11091672" cy="502920"/>
+          </a:xfrm>
+          <a:prstGeom prst="rect">
+            <a:avLst/>
+          </a:prstGeom>
+          <a:noFill/>
+          <a:ln/>
+        </p:spPr>
+        <p:txBody>
+          <a:bodyPr wrap="square" lIns="0" tIns="0" rIns="0" bIns="0" rtlCol="0" anchor="ctr"/>
+          <a:lstStyle/>
+          <a:p>
+            <a:pPr eaLnBrk="0" algn="l" indent="0" marL="0">
+              <a:buNone/>
+            </a:pPr>
+            <a:r>
+              <a:rPr lang="ko-KR" altLang="en-US" sz="3200" dirty="0">
+                <a:solidFill>
+                  <a:srgbClr val="1F2937"/>
+                </a:solidFill>
+                <a:latin typeface="맑은 고딕" pitchFamily="34" charset="0"/>
+                <a:ea typeface="맑은 고딕" pitchFamily="34" charset="-122"/>
+                <a:cs typeface="맑은 고딕" pitchFamily="34" charset="-120"/>
+              </a:rPr>
+              <a:t>되풀이되는 묶음을 찾아 ?를 알아내요.</a:t>
+            </a:r>
+            <a:endParaRPr lang="ko-KR" sz="3200" dirty="0"/>
+          </a:p>
+        </p:txBody>
+      </p:sp>
+      <p:sp>
+        <p:nvSpPr>
+          <p:cNvPr id="4" name="S06-card89"/>
           <p:cNvSpPr/>
           <p:nvPr/>
         </p:nvSpPr>
@@ -16428,11 +16467,11 @@
             </a:avLst>
           </a:prstGeom>
           <a:solidFill>
-            <a:srgbClr val="E6ECF4"/>
+            <a:srgbClr val="FDEBDD"/>
           </a:solidFill>
           <a:ln w="12700">
             <a:solidFill>
-              <a:srgbClr val="E6ECF4"/>
+              <a:srgbClr val="FDEBDD"/>
             </a:solidFill>
             <a:prstDash val="solid"/>
           </a:ln>
@@ -16440,7 +16479,7 @@
       </p:sp>
       <p:sp>
         <p:nvSpPr>
-          <p:cNvPr id="4" name="S06-cardtext89"/>
+          <p:cNvPr id="5" name="S06-cardtext90"/>
           <p:cNvSpPr txBox="1"/>
           <p:nvPr/>
         </p:nvSpPr>
@@ -16474,7 +16513,7 @@
                 <a:ea typeface="맑은 고딕" pitchFamily="34" charset="-122"/>
                 <a:cs typeface="맑은 고딕" pitchFamily="34" charset="-120"/>
               </a:rPr>
-              <a:t>되풀이되는 묶음을 먼저 찾아요.</a:t>
+              <a:t>④ S05의 넷째 모양은 쌓기나무 몇 개일까요?</a:t>
             </a:r>
             <a:endParaRPr lang="ko-KR" sz="3200" dirty="0"/>
           </a:p>
@@ -16482,1236 +16521,14 @@
       </p:sp>
       <p:sp>
         <p:nvSpPr>
-          <p:cNvPr id="5" name="S06-chip90"/>
+          <p:cNvPr id="6" name="S06-eqtext91"/>
           <p:cNvSpPr txBox="1"/>
           <p:nvPr/>
         </p:nvSpPr>
         <p:spPr>
           <a:xfrm>
-            <a:off x="548640" y="1773936"/>
-            <a:ext cx="566928" cy="566928"/>
-          </a:xfrm>
-          <a:prstGeom prst="roundRect">
-            <a:avLst>
-              <a:gd name="adj" fmla="val 25806"/>
-            </a:avLst>
-          </a:prstGeom>
-          <a:solidFill>
-            <a:srgbClr val="264653"/>
-          </a:solidFill>
-          <a:ln>
-            <a:solidFill>
-              <a:srgbClr val="264653"/>
-            </a:solidFill>
-          </a:ln>
-        </p:spPr>
-        <p:txBody>
-          <a:bodyPr wrap="square" lIns="0" tIns="0" rIns="0" bIns="0" rtlCol="0" anchor="ctr"/>
-          <a:lstStyle/>
-          <a:p>
-            <a:pPr eaLnBrk="0" algn="ctr" indent="0" marL="0">
-              <a:buNone/>
-            </a:pPr>
-            <a:r>
-              <a:rPr lang="ko-KR" altLang="en-US" sz="2600" b="1" dirty="0">
-                <a:solidFill>
-                  <a:srgbClr val="FFFFFF"/>
-                </a:solidFill>
-                <a:latin typeface="맑은 고딕" pitchFamily="34" charset="0"/>
-                <a:ea typeface="맑은 고딕" pitchFamily="34" charset="-122"/>
-                <a:cs typeface="맑은 고딕" pitchFamily="34" charset="-120"/>
-              </a:rPr>
-              <a:t>①</a:t>
-            </a:r>
-            <a:endParaRPr lang="ko-KR" sz="2600" dirty="0"/>
-          </a:p>
-        </p:txBody>
-      </p:sp>
-      <p:sp>
-        <p:nvSpPr>
-          <p:cNvPr id="6" name="S06-tile91"/>
-          <p:cNvSpPr txBox="1"/>
-          <p:nvPr/>
-        </p:nvSpPr>
-        <p:spPr>
-          <a:xfrm>
-            <a:off x="1344168" y="1882521"/>
-            <a:ext cx="349758" cy="349758"/>
-          </a:xfrm>
-          <a:prstGeom prst="roundRect">
-            <a:avLst>
-              <a:gd name="adj" fmla="val 36601"/>
-            </a:avLst>
-          </a:prstGeom>
-          <a:solidFill>
-            <a:srgbClr val="FFFFFF"/>
-          </a:solidFill>
-          <a:ln w="19050">
-            <a:solidFill>
-              <a:srgbClr val="264653"/>
-            </a:solidFill>
-          </a:ln>
-        </p:spPr>
-        <p:txBody>
-          <a:bodyPr wrap="square" lIns="0" tIns="0" rIns="0" bIns="0" rtlCol="0" anchor="ctr"/>
-          <a:lstStyle/>
-          <a:p>
-            <a:pPr eaLnBrk="0" algn="ctr" indent="0" marL="0">
-              <a:buNone/>
-            </a:pPr>
-            <a:r>
-              <a:rPr lang="ko-KR" altLang="en-US" sz="1500" b="1" dirty="0">
-                <a:solidFill>
-                  <a:srgbClr val="1F2937"/>
-                </a:solidFill>
-                <a:latin typeface="맑은 고딕" pitchFamily="34" charset="0"/>
-                <a:ea typeface="맑은 고딕" pitchFamily="34" charset="-122"/>
-                <a:cs typeface="맑은 고딕" pitchFamily="34" charset="-120"/>
-              </a:rPr>
-              <a:t>■</a:t>
-            </a:r>
-            <a:endParaRPr lang="ko-KR" sz="1500" dirty="0"/>
-          </a:p>
-        </p:txBody>
-      </p:sp>
-      <p:sp>
-        <p:nvSpPr>
-          <p:cNvPr id="7" name="S06-tile92"/>
-          <p:cNvSpPr txBox="1"/>
-          <p:nvPr/>
-        </p:nvSpPr>
-        <p:spPr>
-          <a:xfrm>
-            <a:off x="1895094" y="1882521"/>
-            <a:ext cx="349758" cy="349758"/>
-          </a:xfrm>
-          <a:prstGeom prst="roundRect">
-            <a:avLst>
-              <a:gd name="adj" fmla="val 36601"/>
-            </a:avLst>
-          </a:prstGeom>
-          <a:solidFill>
-            <a:srgbClr val="FFFFFF"/>
-          </a:solidFill>
-          <a:ln w="19050">
-            <a:solidFill>
-              <a:srgbClr val="264653"/>
-            </a:solidFill>
-          </a:ln>
-        </p:spPr>
-        <p:txBody>
-          <a:bodyPr wrap="square" lIns="0" tIns="0" rIns="0" bIns="0" rtlCol="0" anchor="ctr"/>
-          <a:lstStyle/>
-          <a:p>
-            <a:pPr eaLnBrk="0" algn="ctr" indent="0" marL="0">
-              <a:buNone/>
-            </a:pPr>
-            <a:r>
-              <a:rPr lang="ko-KR" altLang="en-US" sz="1500" b="1" dirty="0">
-                <a:solidFill>
-                  <a:srgbClr val="1F2937"/>
-                </a:solidFill>
-                <a:latin typeface="맑은 고딕" pitchFamily="34" charset="0"/>
-                <a:ea typeface="맑은 고딕" pitchFamily="34" charset="-122"/>
-                <a:cs typeface="맑은 고딕" pitchFamily="34" charset="-120"/>
-              </a:rPr>
-              <a:t>●</a:t>
-            </a:r>
-            <a:endParaRPr lang="ko-KR" sz="1500" dirty="0"/>
-          </a:p>
-        </p:txBody>
-      </p:sp>
-      <p:sp>
-        <p:nvSpPr>
-          <p:cNvPr id="8" name="S06-tile93"/>
-          <p:cNvSpPr txBox="1"/>
-          <p:nvPr/>
-        </p:nvSpPr>
-        <p:spPr>
-          <a:xfrm>
-            <a:off x="2446020" y="1882521"/>
-            <a:ext cx="349758" cy="349758"/>
-          </a:xfrm>
-          <a:prstGeom prst="roundRect">
-            <a:avLst>
-              <a:gd name="adj" fmla="val 36601"/>
-            </a:avLst>
-          </a:prstGeom>
-          <a:solidFill>
-            <a:srgbClr val="FFFFFF"/>
-          </a:solidFill>
-          <a:ln w="19050">
-            <a:solidFill>
-              <a:srgbClr val="264653"/>
-            </a:solidFill>
-          </a:ln>
-        </p:spPr>
-        <p:txBody>
-          <a:bodyPr wrap="square" lIns="0" tIns="0" rIns="0" bIns="0" rtlCol="0" anchor="ctr"/>
-          <a:lstStyle/>
-          <a:p>
-            <a:pPr eaLnBrk="0" algn="ctr" indent="0" marL="0">
-              <a:buNone/>
-            </a:pPr>
-            <a:r>
-              <a:rPr lang="ko-KR" altLang="en-US" sz="1500" b="1" dirty="0">
-                <a:solidFill>
-                  <a:srgbClr val="1F2937"/>
-                </a:solidFill>
-                <a:latin typeface="맑은 고딕" pitchFamily="34" charset="0"/>
-                <a:ea typeface="맑은 고딕" pitchFamily="34" charset="-122"/>
-                <a:cs typeface="맑은 고딕" pitchFamily="34" charset="-120"/>
-              </a:rPr>
-              <a:t>●</a:t>
-            </a:r>
-            <a:endParaRPr lang="ko-KR" sz="1500" dirty="0"/>
-          </a:p>
-        </p:txBody>
-      </p:sp>
-      <p:sp>
-        <p:nvSpPr>
-          <p:cNvPr id="9" name="S06-tile94"/>
-          <p:cNvSpPr txBox="1"/>
-          <p:nvPr/>
-        </p:nvSpPr>
-        <p:spPr>
-          <a:xfrm>
-            <a:off x="2996946" y="1882521"/>
-            <a:ext cx="349758" cy="349758"/>
-          </a:xfrm>
-          <a:prstGeom prst="roundRect">
-            <a:avLst>
-              <a:gd name="adj" fmla="val 36601"/>
-            </a:avLst>
-          </a:prstGeom>
-          <a:solidFill>
-            <a:srgbClr val="FFFFFF"/>
-          </a:solidFill>
-          <a:ln w="19050">
-            <a:solidFill>
-              <a:srgbClr val="264653"/>
-            </a:solidFill>
-          </a:ln>
-        </p:spPr>
-        <p:txBody>
-          <a:bodyPr wrap="square" lIns="0" tIns="0" rIns="0" bIns="0" rtlCol="0" anchor="ctr"/>
-          <a:lstStyle/>
-          <a:p>
-            <a:pPr eaLnBrk="0" algn="ctr" indent="0" marL="0">
-              <a:buNone/>
-            </a:pPr>
-            <a:r>
-              <a:rPr lang="ko-KR" altLang="en-US" sz="1500" b="1" dirty="0">
-                <a:solidFill>
-                  <a:srgbClr val="1F2937"/>
-                </a:solidFill>
-                <a:latin typeface="맑은 고딕" pitchFamily="34" charset="0"/>
-                <a:ea typeface="맑은 고딕" pitchFamily="34" charset="-122"/>
-                <a:cs typeface="맑은 고딕" pitchFamily="34" charset="-120"/>
-              </a:rPr>
-              <a:t>■</a:t>
-            </a:r>
-            <a:endParaRPr lang="ko-KR" sz="1500" dirty="0"/>
-          </a:p>
-        </p:txBody>
-      </p:sp>
-      <p:sp>
-        <p:nvSpPr>
-          <p:cNvPr id="10" name="S06-tile95"/>
-          <p:cNvSpPr txBox="1"/>
-          <p:nvPr/>
-        </p:nvSpPr>
-        <p:spPr>
-          <a:xfrm>
-            <a:off x="3547872" y="1882521"/>
-            <a:ext cx="349758" cy="349758"/>
-          </a:xfrm>
-          <a:prstGeom prst="roundRect">
-            <a:avLst>
-              <a:gd name="adj" fmla="val 36601"/>
-            </a:avLst>
-          </a:prstGeom>
-          <a:solidFill>
-            <a:srgbClr val="FFFFFF"/>
-          </a:solidFill>
-          <a:ln w="19050">
-            <a:solidFill>
-              <a:srgbClr val="264653"/>
-            </a:solidFill>
-          </a:ln>
-        </p:spPr>
-        <p:txBody>
-          <a:bodyPr wrap="square" lIns="0" tIns="0" rIns="0" bIns="0" rtlCol="0" anchor="ctr"/>
-          <a:lstStyle/>
-          <a:p>
-            <a:pPr eaLnBrk="0" algn="ctr" indent="0" marL="0">
-              <a:buNone/>
-            </a:pPr>
-            <a:r>
-              <a:rPr lang="ko-KR" altLang="en-US" sz="1500" b="1" dirty="0">
-                <a:solidFill>
-                  <a:srgbClr val="1F2937"/>
-                </a:solidFill>
-                <a:latin typeface="맑은 고딕" pitchFamily="34" charset="0"/>
-                <a:ea typeface="맑은 고딕" pitchFamily="34" charset="-122"/>
-                <a:cs typeface="맑은 고딕" pitchFamily="34" charset="-120"/>
-              </a:rPr>
-              <a:t>●</a:t>
-            </a:r>
-            <a:endParaRPr lang="ko-KR" sz="1500" dirty="0"/>
-          </a:p>
-        </p:txBody>
-      </p:sp>
-      <p:sp>
-        <p:nvSpPr>
-          <p:cNvPr id="11" name="S06-tile96"/>
-          <p:cNvSpPr txBox="1"/>
-          <p:nvPr/>
-        </p:nvSpPr>
-        <p:spPr>
-          <a:xfrm>
-            <a:off x="4098798" y="1882521"/>
-            <a:ext cx="349758" cy="349758"/>
-          </a:xfrm>
-          <a:prstGeom prst="roundRect">
-            <a:avLst>
-              <a:gd name="adj" fmla="val 36601"/>
-            </a:avLst>
-          </a:prstGeom>
-          <a:solidFill>
-            <a:srgbClr val="FFFFFF"/>
-          </a:solidFill>
-          <a:ln w="19050">
-            <a:solidFill>
-              <a:srgbClr val="264653"/>
-            </a:solidFill>
-          </a:ln>
-        </p:spPr>
-        <p:txBody>
-          <a:bodyPr wrap="square" lIns="0" tIns="0" rIns="0" bIns="0" rtlCol="0" anchor="ctr"/>
-          <a:lstStyle/>
-          <a:p>
-            <a:pPr eaLnBrk="0" algn="ctr" indent="0" marL="0">
-              <a:buNone/>
-            </a:pPr>
-            <a:r>
-              <a:rPr lang="ko-KR" altLang="en-US" sz="1500" b="1" dirty="0">
-                <a:solidFill>
-                  <a:srgbClr val="1F2937"/>
-                </a:solidFill>
-                <a:latin typeface="맑은 고딕" pitchFamily="34" charset="0"/>
-                <a:ea typeface="맑은 고딕" pitchFamily="34" charset="-122"/>
-                <a:cs typeface="맑은 고딕" pitchFamily="34" charset="-120"/>
-              </a:rPr>
-              <a:t>●</a:t>
-            </a:r>
-            <a:endParaRPr lang="ko-KR" sz="1500" dirty="0"/>
-          </a:p>
-        </p:txBody>
-      </p:sp>
-      <p:sp>
-        <p:nvSpPr>
-          <p:cNvPr id="12" name="S06-tile97"/>
-          <p:cNvSpPr txBox="1"/>
-          <p:nvPr/>
-        </p:nvSpPr>
-        <p:spPr>
-          <a:xfrm>
-            <a:off x="4649724" y="1882521"/>
-            <a:ext cx="349758" cy="349758"/>
-          </a:xfrm>
-          <a:prstGeom prst="roundRect">
-            <a:avLst>
-              <a:gd name="adj" fmla="val 36601"/>
-            </a:avLst>
-          </a:prstGeom>
-          <a:solidFill>
-            <a:srgbClr val="FFFFFF"/>
-          </a:solidFill>
-          <a:ln w="19050">
-            <a:solidFill>
-              <a:srgbClr val="264653"/>
-            </a:solidFill>
-          </a:ln>
-        </p:spPr>
-        <p:txBody>
-          <a:bodyPr wrap="square" lIns="0" tIns="0" rIns="0" bIns="0" rtlCol="0" anchor="ctr"/>
-          <a:lstStyle/>
-          <a:p>
-            <a:pPr eaLnBrk="0" algn="ctr" indent="0" marL="0">
-              <a:buNone/>
-            </a:pPr>
-            <a:r>
-              <a:rPr lang="ko-KR" altLang="en-US" sz="1500" b="1" dirty="0">
-                <a:solidFill>
-                  <a:srgbClr val="1F2937"/>
-                </a:solidFill>
-                <a:latin typeface="맑은 고딕" pitchFamily="34" charset="0"/>
-                <a:ea typeface="맑은 고딕" pitchFamily="34" charset="-122"/>
-                <a:cs typeface="맑은 고딕" pitchFamily="34" charset="-120"/>
-              </a:rPr>
-              <a:t>■</a:t>
-            </a:r>
-            <a:endParaRPr lang="ko-KR" sz="1500" dirty="0"/>
-          </a:p>
-        </p:txBody>
-      </p:sp>
-      <p:sp>
-        <p:nvSpPr>
-          <p:cNvPr id="13" name="S06-tile98"/>
-          <p:cNvSpPr txBox="1"/>
-          <p:nvPr/>
-        </p:nvSpPr>
-        <p:spPr>
-          <a:xfrm>
-            <a:off x="5200650" y="1882521"/>
-            <a:ext cx="349758" cy="349758"/>
-          </a:xfrm>
-          <a:prstGeom prst="roundRect">
-            <a:avLst>
-              <a:gd name="adj" fmla="val 36601"/>
-            </a:avLst>
-          </a:prstGeom>
-          <a:solidFill>
-            <a:srgbClr val="FFFFFF"/>
-          </a:solidFill>
-          <a:ln w="19050">
-            <a:solidFill>
-              <a:srgbClr val="264653"/>
-            </a:solidFill>
-          </a:ln>
-        </p:spPr>
-        <p:txBody>
-          <a:bodyPr wrap="square" lIns="0" tIns="0" rIns="0" bIns="0" rtlCol="0" anchor="ctr"/>
-          <a:lstStyle/>
-          <a:p>
-            <a:pPr eaLnBrk="0" algn="ctr" indent="0" marL="0">
-              <a:buNone/>
-            </a:pPr>
-            <a:r>
-              <a:rPr lang="ko-KR" altLang="en-US" sz="1500" b="1" dirty="0">
-                <a:solidFill>
-                  <a:srgbClr val="1F2937"/>
-                </a:solidFill>
-                <a:latin typeface="맑은 고딕" pitchFamily="34" charset="0"/>
-                <a:ea typeface="맑은 고딕" pitchFamily="34" charset="-122"/>
-                <a:cs typeface="맑은 고딕" pitchFamily="34" charset="-120"/>
-              </a:rPr>
-              <a:t>?</a:t>
-            </a:r>
-            <a:endParaRPr lang="ko-KR" sz="1500" dirty="0"/>
-          </a:p>
-        </p:txBody>
-      </p:sp>
-      <p:sp>
-        <p:nvSpPr>
-          <p:cNvPr id="14" name="S06-chip99"/>
-          <p:cNvSpPr txBox="1"/>
-          <p:nvPr/>
-        </p:nvSpPr>
-        <p:spPr>
-          <a:xfrm>
-            <a:off x="6277356" y="1773936"/>
-            <a:ext cx="566928" cy="566928"/>
-          </a:xfrm>
-          <a:prstGeom prst="roundRect">
-            <a:avLst>
-              <a:gd name="adj" fmla="val 25806"/>
-            </a:avLst>
-          </a:prstGeom>
-          <a:solidFill>
-            <a:srgbClr val="264653"/>
-          </a:solidFill>
-          <a:ln>
-            <a:solidFill>
-              <a:srgbClr val="264653"/>
-            </a:solidFill>
-          </a:ln>
-        </p:spPr>
-        <p:txBody>
-          <a:bodyPr wrap="square" lIns="0" tIns="0" rIns="0" bIns="0" rtlCol="0" anchor="ctr"/>
-          <a:lstStyle/>
-          <a:p>
-            <a:pPr eaLnBrk="0" algn="ctr" indent="0" marL="0">
-              <a:buNone/>
-            </a:pPr>
-            <a:r>
-              <a:rPr lang="ko-KR" altLang="en-US" sz="2600" b="1" dirty="0">
-                <a:solidFill>
-                  <a:srgbClr val="FFFFFF"/>
-                </a:solidFill>
-                <a:latin typeface="맑은 고딕" pitchFamily="34" charset="0"/>
-                <a:ea typeface="맑은 고딕" pitchFamily="34" charset="-122"/>
-                <a:cs typeface="맑은 고딕" pitchFamily="34" charset="-120"/>
-              </a:rPr>
-              <a:t>②</a:t>
-            </a:r>
-            <a:endParaRPr lang="ko-KR" sz="2600" dirty="0"/>
-          </a:p>
-        </p:txBody>
-      </p:sp>
-      <p:sp>
-        <p:nvSpPr>
-          <p:cNvPr id="15" name="S06-tile100"/>
-          <p:cNvSpPr txBox="1"/>
-          <p:nvPr/>
-        </p:nvSpPr>
-        <p:spPr>
-          <a:xfrm>
-            <a:off x="7072884" y="1882521"/>
-            <a:ext cx="349758" cy="349758"/>
-          </a:xfrm>
-          <a:prstGeom prst="roundRect">
-            <a:avLst>
-              <a:gd name="adj" fmla="val 36601"/>
-            </a:avLst>
-          </a:prstGeom>
-          <a:solidFill>
-            <a:srgbClr val="FFFFFF"/>
-          </a:solidFill>
-          <a:ln w="19050">
-            <a:solidFill>
-              <a:srgbClr val="264653"/>
-            </a:solidFill>
-          </a:ln>
-        </p:spPr>
-        <p:txBody>
-          <a:bodyPr wrap="square" lIns="0" tIns="0" rIns="0" bIns="0" rtlCol="0" anchor="ctr"/>
-          <a:lstStyle/>
-          <a:p>
-            <a:pPr eaLnBrk="0" algn="ctr" indent="0" marL="0">
-              <a:buNone/>
-            </a:pPr>
-            <a:r>
-              <a:rPr lang="ko-KR" altLang="en-US" sz="1500" b="1" dirty="0">
-                <a:solidFill>
-                  <a:srgbClr val="1F2937"/>
-                </a:solidFill>
-                <a:latin typeface="맑은 고딕" pitchFamily="34" charset="0"/>
-                <a:ea typeface="맑은 고딕" pitchFamily="34" charset="-122"/>
-                <a:cs typeface="맑은 고딕" pitchFamily="34" charset="-120"/>
-              </a:rPr>
-              <a:t>○</a:t>
-            </a:r>
-            <a:endParaRPr lang="ko-KR" sz="1500" dirty="0"/>
-          </a:p>
-        </p:txBody>
-      </p:sp>
-      <p:sp>
-        <p:nvSpPr>
-          <p:cNvPr id="16" name="S06-tile101"/>
-          <p:cNvSpPr txBox="1"/>
-          <p:nvPr/>
-        </p:nvSpPr>
-        <p:spPr>
-          <a:xfrm>
-            <a:off x="7623810" y="1882521"/>
-            <a:ext cx="349758" cy="349758"/>
-          </a:xfrm>
-          <a:prstGeom prst="roundRect">
-            <a:avLst>
-              <a:gd name="adj" fmla="val 36601"/>
-            </a:avLst>
-          </a:prstGeom>
-          <a:solidFill>
-            <a:srgbClr val="FFFFFF"/>
-          </a:solidFill>
-          <a:ln w="19050">
-            <a:solidFill>
-              <a:srgbClr val="264653"/>
-            </a:solidFill>
-          </a:ln>
-        </p:spPr>
-        <p:txBody>
-          <a:bodyPr wrap="square" lIns="0" tIns="0" rIns="0" bIns="0" rtlCol="0" anchor="ctr"/>
-          <a:lstStyle/>
-          <a:p>
-            <a:pPr eaLnBrk="0" algn="ctr" indent="0" marL="0">
-              <a:buNone/>
-            </a:pPr>
-            <a:r>
-              <a:rPr lang="ko-KR" altLang="en-US" sz="1500" b="1" dirty="0">
-                <a:solidFill>
-                  <a:srgbClr val="1F2937"/>
-                </a:solidFill>
-                <a:latin typeface="맑은 고딕" pitchFamily="34" charset="0"/>
-                <a:ea typeface="맑은 고딕" pitchFamily="34" charset="-122"/>
-                <a:cs typeface="맑은 고딕" pitchFamily="34" charset="-120"/>
-              </a:rPr>
-              <a:t>○</a:t>
-            </a:r>
-            <a:endParaRPr lang="ko-KR" sz="1500" dirty="0"/>
-          </a:p>
-        </p:txBody>
-      </p:sp>
-      <p:sp>
-        <p:nvSpPr>
-          <p:cNvPr id="17" name="S06-tile102"/>
-          <p:cNvSpPr txBox="1"/>
-          <p:nvPr/>
-        </p:nvSpPr>
-        <p:spPr>
-          <a:xfrm>
-            <a:off x="8174736" y="1882521"/>
-            <a:ext cx="349758" cy="349758"/>
-          </a:xfrm>
-          <a:prstGeom prst="roundRect">
-            <a:avLst>
-              <a:gd name="adj" fmla="val 36601"/>
-            </a:avLst>
-          </a:prstGeom>
-          <a:solidFill>
-            <a:srgbClr val="FFFFFF"/>
-          </a:solidFill>
-          <a:ln w="19050">
-            <a:solidFill>
-              <a:srgbClr val="264653"/>
-            </a:solidFill>
-          </a:ln>
-        </p:spPr>
-        <p:txBody>
-          <a:bodyPr wrap="square" lIns="0" tIns="0" rIns="0" bIns="0" rtlCol="0" anchor="ctr"/>
-          <a:lstStyle/>
-          <a:p>
-            <a:pPr eaLnBrk="0" algn="ctr" indent="0" marL="0">
-              <a:buNone/>
-            </a:pPr>
-            <a:r>
-              <a:rPr lang="ko-KR" altLang="en-US" sz="1500" b="1" dirty="0">
-                <a:solidFill>
-                  <a:srgbClr val="1F2937"/>
-                </a:solidFill>
-                <a:latin typeface="맑은 고딕" pitchFamily="34" charset="0"/>
-                <a:ea typeface="맑은 고딕" pitchFamily="34" charset="-122"/>
-                <a:cs typeface="맑은 고딕" pitchFamily="34" charset="-120"/>
-              </a:rPr>
-              <a:t>●</a:t>
-            </a:r>
-            <a:endParaRPr lang="ko-KR" sz="1500" dirty="0"/>
-          </a:p>
-        </p:txBody>
-      </p:sp>
-      <p:sp>
-        <p:nvSpPr>
-          <p:cNvPr id="18" name="S06-tile103"/>
-          <p:cNvSpPr txBox="1"/>
-          <p:nvPr/>
-        </p:nvSpPr>
-        <p:spPr>
-          <a:xfrm>
-            <a:off x="8725662" y="1882521"/>
-            <a:ext cx="349758" cy="349758"/>
-          </a:xfrm>
-          <a:prstGeom prst="roundRect">
-            <a:avLst>
-              <a:gd name="adj" fmla="val 36601"/>
-            </a:avLst>
-          </a:prstGeom>
-          <a:solidFill>
-            <a:srgbClr val="FFFFFF"/>
-          </a:solidFill>
-          <a:ln w="19050">
-            <a:solidFill>
-              <a:srgbClr val="264653"/>
-            </a:solidFill>
-          </a:ln>
-        </p:spPr>
-        <p:txBody>
-          <a:bodyPr wrap="square" lIns="0" tIns="0" rIns="0" bIns="0" rtlCol="0" anchor="ctr"/>
-          <a:lstStyle/>
-          <a:p>
-            <a:pPr eaLnBrk="0" algn="ctr" indent="0" marL="0">
-              <a:buNone/>
-            </a:pPr>
-            <a:r>
-              <a:rPr lang="ko-KR" altLang="en-US" sz="1500" b="1" dirty="0">
-                <a:solidFill>
-                  <a:srgbClr val="1F2937"/>
-                </a:solidFill>
-                <a:latin typeface="맑은 고딕" pitchFamily="34" charset="0"/>
-                <a:ea typeface="맑은 고딕" pitchFamily="34" charset="-122"/>
-                <a:cs typeface="맑은 고딕" pitchFamily="34" charset="-120"/>
-              </a:rPr>
-              <a:t>○</a:t>
-            </a:r>
-            <a:endParaRPr lang="ko-KR" sz="1500" dirty="0"/>
-          </a:p>
-        </p:txBody>
-      </p:sp>
-      <p:sp>
-        <p:nvSpPr>
-          <p:cNvPr id="19" name="S06-tile104"/>
-          <p:cNvSpPr txBox="1"/>
-          <p:nvPr/>
-        </p:nvSpPr>
-        <p:spPr>
-          <a:xfrm>
-            <a:off x="9276588" y="1882521"/>
-            <a:ext cx="349758" cy="349758"/>
-          </a:xfrm>
-          <a:prstGeom prst="roundRect">
-            <a:avLst>
-              <a:gd name="adj" fmla="val 36601"/>
-            </a:avLst>
-          </a:prstGeom>
-          <a:solidFill>
-            <a:srgbClr val="FFFFFF"/>
-          </a:solidFill>
-          <a:ln w="19050">
-            <a:solidFill>
-              <a:srgbClr val="264653"/>
-            </a:solidFill>
-          </a:ln>
-        </p:spPr>
-        <p:txBody>
-          <a:bodyPr wrap="square" lIns="0" tIns="0" rIns="0" bIns="0" rtlCol="0" anchor="ctr"/>
-          <a:lstStyle/>
-          <a:p>
-            <a:pPr eaLnBrk="0" algn="ctr" indent="0" marL="0">
-              <a:buNone/>
-            </a:pPr>
-            <a:r>
-              <a:rPr lang="ko-KR" altLang="en-US" sz="1500" b="1" dirty="0">
-                <a:solidFill>
-                  <a:srgbClr val="1F2937"/>
-                </a:solidFill>
-                <a:latin typeface="맑은 고딕" pitchFamily="34" charset="0"/>
-                <a:ea typeface="맑은 고딕" pitchFamily="34" charset="-122"/>
-                <a:cs typeface="맑은 고딕" pitchFamily="34" charset="-120"/>
-              </a:rPr>
-              <a:t>○</a:t>
-            </a:r>
-            <a:endParaRPr lang="ko-KR" sz="1500" dirty="0"/>
-          </a:p>
-        </p:txBody>
-      </p:sp>
-      <p:sp>
-        <p:nvSpPr>
-          <p:cNvPr id="20" name="S06-tile105"/>
-          <p:cNvSpPr txBox="1"/>
-          <p:nvPr/>
-        </p:nvSpPr>
-        <p:spPr>
-          <a:xfrm>
-            <a:off x="9827514" y="1882521"/>
-            <a:ext cx="349758" cy="349758"/>
-          </a:xfrm>
-          <a:prstGeom prst="roundRect">
-            <a:avLst>
-              <a:gd name="adj" fmla="val 36601"/>
-            </a:avLst>
-          </a:prstGeom>
-          <a:solidFill>
-            <a:srgbClr val="FFFFFF"/>
-          </a:solidFill>
-          <a:ln w="19050">
-            <a:solidFill>
-              <a:srgbClr val="264653"/>
-            </a:solidFill>
-          </a:ln>
-        </p:spPr>
-        <p:txBody>
-          <a:bodyPr wrap="square" lIns="0" tIns="0" rIns="0" bIns="0" rtlCol="0" anchor="ctr"/>
-          <a:lstStyle/>
-          <a:p>
-            <a:pPr eaLnBrk="0" algn="ctr" indent="0" marL="0">
-              <a:buNone/>
-            </a:pPr>
-            <a:r>
-              <a:rPr lang="ko-KR" altLang="en-US" sz="1500" b="1" dirty="0">
-                <a:solidFill>
-                  <a:srgbClr val="1F2937"/>
-                </a:solidFill>
-                <a:latin typeface="맑은 고딕" pitchFamily="34" charset="0"/>
-                <a:ea typeface="맑은 고딕" pitchFamily="34" charset="-122"/>
-                <a:cs typeface="맑은 고딕" pitchFamily="34" charset="-120"/>
-              </a:rPr>
-              <a:t>●</a:t>
-            </a:r>
-            <a:endParaRPr lang="ko-KR" sz="1500" dirty="0"/>
-          </a:p>
-        </p:txBody>
-      </p:sp>
-      <p:sp>
-        <p:nvSpPr>
-          <p:cNvPr id="21" name="S06-tile106"/>
-          <p:cNvSpPr txBox="1"/>
-          <p:nvPr/>
-        </p:nvSpPr>
-        <p:spPr>
-          <a:xfrm>
-            <a:off x="10378440" y="1882521"/>
-            <a:ext cx="349758" cy="349758"/>
-          </a:xfrm>
-          <a:prstGeom prst="roundRect">
-            <a:avLst>
-              <a:gd name="adj" fmla="val 36601"/>
-            </a:avLst>
-          </a:prstGeom>
-          <a:solidFill>
-            <a:srgbClr val="FFFFFF"/>
-          </a:solidFill>
-          <a:ln w="19050">
-            <a:solidFill>
-              <a:srgbClr val="264653"/>
-            </a:solidFill>
-          </a:ln>
-        </p:spPr>
-        <p:txBody>
-          <a:bodyPr wrap="square" lIns="0" tIns="0" rIns="0" bIns="0" rtlCol="0" anchor="ctr"/>
-          <a:lstStyle/>
-          <a:p>
-            <a:pPr eaLnBrk="0" algn="ctr" indent="0" marL="0">
-              <a:buNone/>
-            </a:pPr>
-            <a:r>
-              <a:rPr lang="ko-KR" altLang="en-US" sz="1500" b="1" dirty="0">
-                <a:solidFill>
-                  <a:srgbClr val="1F2937"/>
-                </a:solidFill>
-                <a:latin typeface="맑은 고딕" pitchFamily="34" charset="0"/>
-                <a:ea typeface="맑은 고딕" pitchFamily="34" charset="-122"/>
-                <a:cs typeface="맑은 고딕" pitchFamily="34" charset="-120"/>
-              </a:rPr>
-              <a:t>○</a:t>
-            </a:r>
-            <a:endParaRPr lang="ko-KR" sz="1500" dirty="0"/>
-          </a:p>
-        </p:txBody>
-      </p:sp>
-      <p:sp>
-        <p:nvSpPr>
-          <p:cNvPr id="22" name="S06-tile107"/>
-          <p:cNvSpPr txBox="1"/>
-          <p:nvPr/>
-        </p:nvSpPr>
-        <p:spPr>
-          <a:xfrm>
-            <a:off x="10929366" y="1882521"/>
-            <a:ext cx="349758" cy="349758"/>
-          </a:xfrm>
-          <a:prstGeom prst="roundRect">
-            <a:avLst>
-              <a:gd name="adj" fmla="val 36601"/>
-            </a:avLst>
-          </a:prstGeom>
-          <a:solidFill>
-            <a:srgbClr val="FFFFFF"/>
-          </a:solidFill>
-          <a:ln w="19050">
-            <a:solidFill>
-              <a:srgbClr val="264653"/>
-            </a:solidFill>
-          </a:ln>
-        </p:spPr>
-        <p:txBody>
-          <a:bodyPr wrap="square" lIns="0" tIns="0" rIns="0" bIns="0" rtlCol="0" anchor="ctr"/>
-          <a:lstStyle/>
-          <a:p>
-            <a:pPr eaLnBrk="0" algn="ctr" indent="0" marL="0">
-              <a:buNone/>
-            </a:pPr>
-            <a:r>
-              <a:rPr lang="ko-KR" altLang="en-US" sz="1500" b="1" dirty="0">
-                <a:solidFill>
-                  <a:srgbClr val="1F2937"/>
-                </a:solidFill>
-                <a:latin typeface="맑은 고딕" pitchFamily="34" charset="0"/>
-                <a:ea typeface="맑은 고딕" pitchFamily="34" charset="-122"/>
-                <a:cs typeface="맑은 고딕" pitchFamily="34" charset="-120"/>
-              </a:rPr>
-              <a:t>?</a:t>
-            </a:r>
-            <a:endParaRPr lang="ko-KR" sz="1500" dirty="0"/>
-          </a:p>
-        </p:txBody>
-      </p:sp>
-      <p:sp>
-        <p:nvSpPr>
-          <p:cNvPr id="23" name="S06-chip108"/>
-          <p:cNvSpPr txBox="1"/>
-          <p:nvPr/>
-        </p:nvSpPr>
-        <p:spPr>
-          <a:xfrm>
-            <a:off x="548640" y="3762756"/>
-            <a:ext cx="566928" cy="566928"/>
-          </a:xfrm>
-          <a:prstGeom prst="roundRect">
-            <a:avLst>
-              <a:gd name="adj" fmla="val 25806"/>
-            </a:avLst>
-          </a:prstGeom>
-          <a:solidFill>
-            <a:srgbClr val="264653"/>
-          </a:solidFill>
-          <a:ln>
-            <a:solidFill>
-              <a:srgbClr val="264653"/>
-            </a:solidFill>
-          </a:ln>
-        </p:spPr>
-        <p:txBody>
-          <a:bodyPr wrap="square" lIns="0" tIns="0" rIns="0" bIns="0" rtlCol="0" anchor="ctr"/>
-          <a:lstStyle/>
-          <a:p>
-            <a:pPr eaLnBrk="0" algn="ctr" indent="0" marL="0">
-              <a:buNone/>
-            </a:pPr>
-            <a:r>
-              <a:rPr lang="ko-KR" altLang="en-US" sz="2600" b="1" dirty="0">
-                <a:solidFill>
-                  <a:srgbClr val="FFFFFF"/>
-                </a:solidFill>
-                <a:latin typeface="맑은 고딕" pitchFamily="34" charset="0"/>
-                <a:ea typeface="맑은 고딕" pitchFamily="34" charset="-122"/>
-                <a:cs typeface="맑은 고딕" pitchFamily="34" charset="-120"/>
-              </a:rPr>
-              <a:t>③</a:t>
-            </a:r>
-            <a:endParaRPr lang="ko-KR" sz="2600" dirty="0"/>
-          </a:p>
-        </p:txBody>
-      </p:sp>
-      <p:sp>
-        <p:nvSpPr>
-          <p:cNvPr id="24" name="S06-tile109"/>
-          <p:cNvSpPr txBox="1"/>
-          <p:nvPr/>
-        </p:nvSpPr>
-        <p:spPr>
-          <a:xfrm>
-            <a:off x="1344168" y="3779520"/>
-            <a:ext cx="533400" cy="533400"/>
-          </a:xfrm>
-          <a:prstGeom prst="roundRect">
-            <a:avLst>
-              <a:gd name="adj" fmla="val 24000"/>
-            </a:avLst>
-          </a:prstGeom>
-          <a:solidFill>
-            <a:srgbClr val="FFFFFF"/>
-          </a:solidFill>
-          <a:ln w="19050">
-            <a:solidFill>
-              <a:srgbClr val="264653"/>
-            </a:solidFill>
-          </a:ln>
-        </p:spPr>
-        <p:txBody>
-          <a:bodyPr wrap="square" lIns="0" tIns="0" rIns="0" bIns="0" rtlCol="0" anchor="ctr"/>
-          <a:lstStyle/>
-          <a:p>
-            <a:pPr eaLnBrk="0" algn="ctr" indent="0" marL="0">
-              <a:buNone/>
-            </a:pPr>
-            <a:r>
-              <a:rPr lang="ko-KR" altLang="en-US" sz="2300" b="1" dirty="0">
-                <a:solidFill>
-                  <a:srgbClr val="1F2937"/>
-                </a:solidFill>
-                <a:latin typeface="맑은 고딕" pitchFamily="34" charset="0"/>
-                <a:ea typeface="맑은 고딕" pitchFamily="34" charset="-122"/>
-                <a:cs typeface="맑은 고딕" pitchFamily="34" charset="-120"/>
-              </a:rPr>
-              <a:t>▲</a:t>
-            </a:r>
-            <a:endParaRPr lang="ko-KR" sz="2300" dirty="0"/>
-          </a:p>
-        </p:txBody>
-      </p:sp>
-      <p:sp>
-        <p:nvSpPr>
-          <p:cNvPr id="25" name="S06-tile110"/>
-          <p:cNvSpPr txBox="1"/>
-          <p:nvPr/>
-        </p:nvSpPr>
-        <p:spPr>
-          <a:xfrm>
-            <a:off x="2078736" y="3779520"/>
-            <a:ext cx="533400" cy="533400"/>
-          </a:xfrm>
-          <a:prstGeom prst="roundRect">
-            <a:avLst>
-              <a:gd name="adj" fmla="val 24000"/>
-            </a:avLst>
-          </a:prstGeom>
-          <a:solidFill>
-            <a:srgbClr val="FFFFFF"/>
-          </a:solidFill>
-          <a:ln w="19050">
-            <a:solidFill>
-              <a:srgbClr val="264653"/>
-            </a:solidFill>
-          </a:ln>
-        </p:spPr>
-        <p:txBody>
-          <a:bodyPr wrap="square" lIns="0" tIns="0" rIns="0" bIns="0" rtlCol="0" anchor="ctr"/>
-          <a:lstStyle/>
-          <a:p>
-            <a:pPr eaLnBrk="0" algn="ctr" indent="0" marL="0">
-              <a:buNone/>
-            </a:pPr>
-            <a:r>
-              <a:rPr lang="ko-KR" altLang="en-US" sz="2300" b="1" dirty="0">
-                <a:solidFill>
-                  <a:srgbClr val="1F2937"/>
-                </a:solidFill>
-                <a:latin typeface="맑은 고딕" pitchFamily="34" charset="0"/>
-                <a:ea typeface="맑은 고딕" pitchFamily="34" charset="-122"/>
-                <a:cs typeface="맑은 고딕" pitchFamily="34" charset="-120"/>
-              </a:rPr>
-              <a:t>△</a:t>
-            </a:r>
-            <a:endParaRPr lang="ko-KR" sz="2300" dirty="0"/>
-          </a:p>
-        </p:txBody>
-      </p:sp>
-      <p:sp>
-        <p:nvSpPr>
-          <p:cNvPr id="26" name="S06-tile111"/>
-          <p:cNvSpPr txBox="1"/>
-          <p:nvPr/>
-        </p:nvSpPr>
-        <p:spPr>
-          <a:xfrm>
-            <a:off x="2813304" y="3779520"/>
-            <a:ext cx="533400" cy="533400"/>
-          </a:xfrm>
-          <a:prstGeom prst="roundRect">
-            <a:avLst>
-              <a:gd name="adj" fmla="val 24000"/>
-            </a:avLst>
-          </a:prstGeom>
-          <a:solidFill>
-            <a:srgbClr val="FFFFFF"/>
-          </a:solidFill>
-          <a:ln w="19050">
-            <a:solidFill>
-              <a:srgbClr val="264653"/>
-            </a:solidFill>
-          </a:ln>
-        </p:spPr>
-        <p:txBody>
-          <a:bodyPr wrap="square" lIns="0" tIns="0" rIns="0" bIns="0" rtlCol="0" anchor="ctr"/>
-          <a:lstStyle/>
-          <a:p>
-            <a:pPr eaLnBrk="0" algn="ctr" indent="0" marL="0">
-              <a:buNone/>
-            </a:pPr>
-            <a:r>
-              <a:rPr lang="ko-KR" altLang="en-US" sz="2300" b="1" dirty="0">
-                <a:solidFill>
-                  <a:srgbClr val="1F2937"/>
-                </a:solidFill>
-                <a:latin typeface="맑은 고딕" pitchFamily="34" charset="0"/>
-                <a:ea typeface="맑은 고딕" pitchFamily="34" charset="-122"/>
-                <a:cs typeface="맑은 고딕" pitchFamily="34" charset="-120"/>
-              </a:rPr>
-              <a:t>▲</a:t>
-            </a:r>
-            <a:endParaRPr lang="ko-KR" sz="2300" dirty="0"/>
-          </a:p>
-        </p:txBody>
-      </p:sp>
-      <p:sp>
-        <p:nvSpPr>
-          <p:cNvPr id="27" name="S06-tile112"/>
-          <p:cNvSpPr txBox="1"/>
-          <p:nvPr/>
-        </p:nvSpPr>
-        <p:spPr>
-          <a:xfrm>
-            <a:off x="3547872" y="3779520"/>
-            <a:ext cx="533400" cy="533400"/>
-          </a:xfrm>
-          <a:prstGeom prst="roundRect">
-            <a:avLst>
-              <a:gd name="adj" fmla="val 24000"/>
-            </a:avLst>
-          </a:prstGeom>
-          <a:solidFill>
-            <a:srgbClr val="FFFFFF"/>
-          </a:solidFill>
-          <a:ln w="19050">
-            <a:solidFill>
-              <a:srgbClr val="264653"/>
-            </a:solidFill>
-          </a:ln>
-        </p:spPr>
-        <p:txBody>
-          <a:bodyPr wrap="square" lIns="0" tIns="0" rIns="0" bIns="0" rtlCol="0" anchor="ctr"/>
-          <a:lstStyle/>
-          <a:p>
-            <a:pPr eaLnBrk="0" algn="ctr" indent="0" marL="0">
-              <a:buNone/>
-            </a:pPr>
-            <a:r>
-              <a:rPr lang="ko-KR" altLang="en-US" sz="2300" b="1" dirty="0">
-                <a:solidFill>
-                  <a:srgbClr val="1F2937"/>
-                </a:solidFill>
-                <a:latin typeface="맑은 고딕" pitchFamily="34" charset="0"/>
-                <a:ea typeface="맑은 고딕" pitchFamily="34" charset="-122"/>
-                <a:cs typeface="맑은 고딕" pitchFamily="34" charset="-120"/>
-              </a:rPr>
-              <a:t>△</a:t>
-            </a:r>
-            <a:endParaRPr lang="ko-KR" sz="2300" dirty="0"/>
-          </a:p>
-        </p:txBody>
-      </p:sp>
-      <p:sp>
-        <p:nvSpPr>
-          <p:cNvPr id="28" name="S06-tile113"/>
-          <p:cNvSpPr txBox="1"/>
-          <p:nvPr/>
-        </p:nvSpPr>
-        <p:spPr>
-          <a:xfrm>
-            <a:off x="4282440" y="3779520"/>
-            <a:ext cx="533400" cy="533400"/>
-          </a:xfrm>
-          <a:prstGeom prst="roundRect">
-            <a:avLst>
-              <a:gd name="adj" fmla="val 24000"/>
-            </a:avLst>
-          </a:prstGeom>
-          <a:solidFill>
-            <a:srgbClr val="FFFFFF"/>
-          </a:solidFill>
-          <a:ln w="19050">
-            <a:solidFill>
-              <a:srgbClr val="264653"/>
-            </a:solidFill>
-          </a:ln>
-        </p:spPr>
-        <p:txBody>
-          <a:bodyPr wrap="square" lIns="0" tIns="0" rIns="0" bIns="0" rtlCol="0" anchor="ctr"/>
-          <a:lstStyle/>
-          <a:p>
-            <a:pPr eaLnBrk="0" algn="ctr" indent="0" marL="0">
-              <a:buNone/>
-            </a:pPr>
-            <a:r>
-              <a:rPr lang="ko-KR" altLang="en-US" sz="2300" b="1" dirty="0">
-                <a:solidFill>
-                  <a:srgbClr val="1F2937"/>
-                </a:solidFill>
-                <a:latin typeface="맑은 고딕" pitchFamily="34" charset="0"/>
-                <a:ea typeface="맑은 고딕" pitchFamily="34" charset="-122"/>
-                <a:cs typeface="맑은 고딕" pitchFamily="34" charset="-120"/>
-              </a:rPr>
-              <a:t>▲</a:t>
-            </a:r>
-            <a:endParaRPr lang="ko-KR" sz="2300" dirty="0"/>
-          </a:p>
-        </p:txBody>
-      </p:sp>
-      <p:sp>
-        <p:nvSpPr>
-          <p:cNvPr id="29" name="S06-tile114"/>
-          <p:cNvSpPr txBox="1"/>
-          <p:nvPr/>
-        </p:nvSpPr>
-        <p:spPr>
-          <a:xfrm>
-            <a:off x="5017008" y="3779520"/>
-            <a:ext cx="533400" cy="533400"/>
-          </a:xfrm>
-          <a:prstGeom prst="roundRect">
-            <a:avLst>
-              <a:gd name="adj" fmla="val 24000"/>
-            </a:avLst>
-          </a:prstGeom>
-          <a:solidFill>
-            <a:srgbClr val="FFFFFF"/>
-          </a:solidFill>
-          <a:ln w="19050">
-            <a:solidFill>
-              <a:srgbClr val="264653"/>
-            </a:solidFill>
-          </a:ln>
-        </p:spPr>
-        <p:txBody>
-          <a:bodyPr wrap="square" lIns="0" tIns="0" rIns="0" bIns="0" rtlCol="0" anchor="ctr"/>
-          <a:lstStyle/>
-          <a:p>
-            <a:pPr eaLnBrk="0" algn="ctr" indent="0" marL="0">
-              <a:buNone/>
-            </a:pPr>
-            <a:r>
-              <a:rPr lang="ko-KR" altLang="en-US" sz="2300" b="1" dirty="0">
-                <a:solidFill>
-                  <a:srgbClr val="1F2937"/>
-                </a:solidFill>
-                <a:latin typeface="맑은 고딕" pitchFamily="34" charset="0"/>
-                <a:ea typeface="맑은 고딕" pitchFamily="34" charset="-122"/>
-                <a:cs typeface="맑은 고딕" pitchFamily="34" charset="-120"/>
-              </a:rPr>
-              <a:t>?</a:t>
-            </a:r>
-            <a:endParaRPr lang="ko-KR" sz="2300" dirty="0"/>
-          </a:p>
-        </p:txBody>
-      </p:sp>
-      <p:sp>
-        <p:nvSpPr>
-          <p:cNvPr id="30" name="S06-chip115"/>
-          <p:cNvSpPr txBox="1"/>
-          <p:nvPr/>
-        </p:nvSpPr>
-        <p:spPr>
-          <a:xfrm>
-            <a:off x="6277356" y="3762756"/>
-            <a:ext cx="566928" cy="566928"/>
-          </a:xfrm>
-          <a:prstGeom prst="roundRect">
-            <a:avLst>
-              <a:gd name="adj" fmla="val 25806"/>
-            </a:avLst>
-          </a:prstGeom>
-          <a:solidFill>
-            <a:srgbClr val="264653"/>
-          </a:solidFill>
-          <a:ln>
-            <a:solidFill>
-              <a:srgbClr val="264653"/>
-            </a:solidFill>
-          </a:ln>
-        </p:spPr>
-        <p:txBody>
-          <a:bodyPr wrap="square" lIns="0" tIns="0" rIns="0" bIns="0" rtlCol="0" anchor="ctr"/>
-          <a:lstStyle/>
-          <a:p>
-            <a:pPr eaLnBrk="0" algn="ctr" indent="0" marL="0">
-              <a:buNone/>
-            </a:pPr>
-            <a:r>
-              <a:rPr lang="ko-KR" altLang="en-US" sz="2600" b="1" dirty="0">
-                <a:solidFill>
-                  <a:srgbClr val="FFFFFF"/>
-                </a:solidFill>
-                <a:latin typeface="맑은 고딕" pitchFamily="34" charset="0"/>
-                <a:ea typeface="맑은 고딕" pitchFamily="34" charset="-122"/>
-                <a:cs typeface="맑은 고딕" pitchFamily="34" charset="-120"/>
-              </a:rPr>
-              <a:t>④</a:t>
-            </a:r>
-            <a:endParaRPr lang="ko-KR" sz="2600" dirty="0"/>
-          </a:p>
-        </p:txBody>
-      </p:sp>
-      <p:sp>
-        <p:nvSpPr>
-          <p:cNvPr id="31" name="S06-text116"/>
-          <p:cNvSpPr txBox="1"/>
-          <p:nvPr/>
-        </p:nvSpPr>
-        <p:spPr>
-          <a:xfrm>
-            <a:off x="7072884" y="3314700"/>
-            <a:ext cx="4567428" cy="1463040"/>
+            <a:off x="548640" y="2011680"/>
+            <a:ext cx="11091672" cy="3108960"/>
           </a:xfrm>
           <a:prstGeom prst="rect">
             <a:avLst/>
@@ -17727,7 +16544,7 @@
               <a:buNone/>
             </a:pPr>
             <a:r>
-              <a:rPr lang="ko-KR" altLang="en-US" sz="3200" dirty="0">
+              <a:rPr lang="ko-KR" altLang="en-US" sz="4800" b="1" dirty="0">
                 <a:solidFill>
                   <a:srgbClr val="1F2937"/>
                 </a:solidFill>
@@ -17735,9 +16552,43 @@
                 <a:ea typeface="맑은 고딕" pitchFamily="34" charset="-122"/>
                 <a:cs typeface="맑은 고딕" pitchFamily="34" charset="-120"/>
               </a:rPr>
-              <a:t>S05의 넷째 모양은 몇 개?</a:t>
+              <a:t>① ■ ● ● ■ ● ● ■ ?</a:t>
             </a:r>
-            <a:endParaRPr lang="ko-KR" sz="3200" dirty="0"/>
+            <a:endParaRPr lang="ko-KR" sz="4800" dirty="0"/>
+          </a:p>
+          <a:p>
+            <a:pPr eaLnBrk="0" algn="l" indent="0" marL="0">
+              <a:buNone/>
+            </a:pPr>
+            <a:r>
+              <a:rPr lang="ko-KR" altLang="en-US" sz="4800" b="1" dirty="0">
+                <a:solidFill>
+                  <a:srgbClr val="1F2937"/>
+                </a:solidFill>
+                <a:latin typeface="맑은 고딕" pitchFamily="34" charset="0"/>
+                <a:ea typeface="맑은 고딕" pitchFamily="34" charset="-122"/>
+                <a:cs typeface="맑은 고딕" pitchFamily="34" charset="-120"/>
+              </a:rPr>
+              <a:t>② ○ ○ ● ○ ○ ● ○ ?</a:t>
+            </a:r>
+            <a:endParaRPr lang="ko-KR" sz="4800" dirty="0"/>
+          </a:p>
+          <a:p>
+            <a:pPr eaLnBrk="0" algn="l" indent="0" marL="0">
+              <a:buNone/>
+            </a:pPr>
+            <a:r>
+              <a:rPr lang="ko-KR" altLang="en-US" sz="4800" b="1" dirty="0">
+                <a:solidFill>
+                  <a:srgbClr val="1F2937"/>
+                </a:solidFill>
+                <a:latin typeface="맑은 고딕" pitchFamily="34" charset="0"/>
+                <a:ea typeface="맑은 고딕" pitchFamily="34" charset="-122"/>
+                <a:cs typeface="맑은 고딕" pitchFamily="34" charset="-120"/>
+              </a:rPr>
+              <a:t>③ ▲ △ ▲ △ ▲ ?</a:t>
+            </a:r>
+            <a:endParaRPr lang="ko-KR" sz="4800" dirty="0"/>
           </a:p>
         </p:txBody>
       </p:sp>
@@ -17857,7 +16708,7 @@
       </p:sp>
       <p:sp>
         <p:nvSpPr>
-          <p:cNvPr id="3" name="S07-card117"/>
+          <p:cNvPr id="3" name="S07-card92"/>
           <p:cNvSpPr/>
           <p:nvPr/>
         </p:nvSpPr>
@@ -17884,7 +16735,7 @@
       </p:sp>
       <p:sp>
         <p:nvSpPr>
-          <p:cNvPr id="4" name="S07-cardtext118"/>
+          <p:cNvPr id="4" name="S07-cardtext93"/>
           <p:cNvSpPr txBox="1"/>
           <p:nvPr/>
         </p:nvSpPr>
@@ -17926,7 +16777,7 @@
       </p:sp>
       <p:sp>
         <p:nvSpPr>
-          <p:cNvPr id="5" name="S07-card119"/>
+          <p:cNvPr id="5" name="S07-card94"/>
           <p:cNvSpPr/>
           <p:nvPr/>
         </p:nvSpPr>
@@ -17953,7 +16804,7 @@
       </p:sp>
       <p:sp>
         <p:nvSpPr>
-          <p:cNvPr id="6" name="S07-cardtext120"/>
+          <p:cNvPr id="6" name="S07-cardtext95"/>
           <p:cNvSpPr txBox="1"/>
           <p:nvPr/>
         </p:nvSpPr>
@@ -17995,7 +16846,7 @@
       </p:sp>
       <p:sp>
         <p:nvSpPr>
-          <p:cNvPr id="7" name="S07-chip121"/>
+          <p:cNvPr id="7" name="S07-chip96"/>
           <p:cNvSpPr txBox="1"/>
           <p:nvPr/>
         </p:nvSpPr>
@@ -18042,7 +16893,7 @@
       </p:sp>
       <p:sp>
         <p:nvSpPr>
-          <p:cNvPr id="8" name="S07-text122"/>
+          <p:cNvPr id="8" name="S07-text97"/>
           <p:cNvSpPr txBox="1"/>
           <p:nvPr/>
         </p:nvSpPr>
@@ -18081,7 +16932,7 @@
       </p:sp>
       <p:sp>
         <p:nvSpPr>
-          <p:cNvPr id="9" name="S07-chip123"/>
+          <p:cNvPr id="9" name="S07-chip98"/>
           <p:cNvSpPr txBox="1"/>
           <p:nvPr/>
         </p:nvSpPr>
@@ -18128,7 +16979,7 @@
       </p:sp>
       <p:sp>
         <p:nvSpPr>
-          <p:cNvPr id="10" name="S07-text124"/>
+          <p:cNvPr id="10" name="S07-text99"/>
           <p:cNvSpPr txBox="1"/>
           <p:nvPr/>
         </p:nvSpPr>
@@ -18281,7 +17132,7 @@
       </p:sp>
       <p:sp>
         <p:nvSpPr>
-          <p:cNvPr id="3" name="S08-text125"/>
+          <p:cNvPr id="3" name="S08-text100"/>
           <p:cNvSpPr txBox="1"/>
           <p:nvPr/>
         </p:nvSpPr>
@@ -18320,7 +17171,7 @@
       </p:sp>
       <p:sp>
         <p:nvSpPr>
-          <p:cNvPr id="4" name="S08-card126"/>
+          <p:cNvPr id="4" name="S08-card101"/>
           <p:cNvSpPr/>
           <p:nvPr/>
         </p:nvSpPr>
@@ -18347,7 +17198,7 @@
       </p:sp>
       <p:sp>
         <p:nvSpPr>
-          <p:cNvPr id="5" name="S08-cardtext127"/>
+          <p:cNvPr id="5" name="S08-cardtext102"/>
           <p:cNvSpPr txBox="1"/>
           <p:nvPr/>
         </p:nvSpPr>
@@ -18389,7 +17240,7 @@
       </p:sp>
       <p:graphicFrame>
         <p:nvGraphicFramePr>
-          <p:cNvPr id="9" name="S08-table128"/>
+          <p:cNvPr id="9" name="S08-table103"/>
           <p:cNvGraphicFramePr>
             <a:graphicFrameLocks noGrp="1"/>
           </p:cNvGraphicFramePr>
@@ -20997,7 +19848,7 @@
       </p:sp>
       <p:sp>
         <p:nvSpPr>
-          <p:cNvPr id="3" name="S09-card129"/>
+          <p:cNvPr id="3" name="S09-card104"/>
           <p:cNvSpPr/>
           <p:nvPr/>
         </p:nvSpPr>
@@ -21024,7 +19875,7 @@
       </p:sp>
       <p:sp>
         <p:nvSpPr>
-          <p:cNvPr id="4" name="S09-cardtext130"/>
+          <p:cNvPr id="4" name="S09-cardtext105"/>
           <p:cNvSpPr txBox="1"/>
           <p:nvPr/>
         </p:nvSpPr>
@@ -21066,7 +19917,7 @@
       </p:sp>
       <p:sp>
         <p:nvSpPr>
-          <p:cNvPr id="5" name="S09-card131"/>
+          <p:cNvPr id="5" name="S09-card106"/>
           <p:cNvSpPr/>
           <p:nvPr/>
         </p:nvSpPr>
@@ -21093,7 +19944,7 @@
       </p:sp>
       <p:sp>
         <p:nvSpPr>
-          <p:cNvPr id="6" name="S09-cardtext132"/>
+          <p:cNvPr id="6" name="S09-cardtext107"/>
           <p:cNvSpPr txBox="1"/>
           <p:nvPr/>
         </p:nvSpPr>
@@ -21135,7 +19986,7 @@
       </p:sp>
       <p:graphicFrame>
         <p:nvGraphicFramePr>
-          <p:cNvPr id="10" name="S09-table133"/>
+          <p:cNvPr id="10" name="S09-table108"/>
           <p:cNvGraphicFramePr>
             <a:graphicFrameLocks noGrp="1"/>
           </p:cNvGraphicFramePr>

--- a/dist/초2/수학/자료와규칙/초2_수학_자료와규칙_03_무늬와수의규칙_학생용.pptx
+++ b/dist/초2/수학/자료와규칙/초2_수학_자료와규칙_03_무늬와수의규칙_학생용.pptx
@@ -121,13 +121,13 @@
   <p:extLst>
     <p:ext uri="{521415D9-36F7-43E2-AB2F-B90AF26B5E84}">
       <p14:sectionLst xmlns:p14="http://schemas.microsoft.com/office/powerpoint/2010/main">
-        <p14:section name="도입" id="{73a5e351-20d6-df21-b9c4-8559473ee09a}">
+        <p14:section name="도입" id="{2fc1a790-6318-a026-5741-c664d8cb2157}">
           <p14:sldIdLst>
             <p14:sldId id="256"/>
             <p14:sldId id="257"/>
           </p14:sldIdLst>
         </p14:section>
-        <p14:section name="개념" id="{74a839cc-9140-4a3b-5825-5208fd7cba74}">
+        <p14:section name="개념" id="{2424fb44-8021-70b2-13ae-397cf2f00098}">
           <p14:sldIdLst>
             <p14:sldId id="258"/>
             <p14:sldId id="259"/>
@@ -137,31 +137,31 @@
             <p14:sldId id="265"/>
           </p14:sldIdLst>
         </p14:section>
-        <p14:section name="연습" id="{06328e48-de47-1c80-2667-31337a4c5420}">
+        <p14:section name="연습" id="{6179a7b6-f09e-16b8-9e3f-97fd1e219116}">
           <p14:sldIdLst>
             <p14:sldId id="261"/>
             <p14:sldId id="262"/>
             <p14:sldId id="266"/>
           </p14:sldIdLst>
         </p14:section>
-        <p14:section name="개념" id="{3480687f-28d7-807f-8e2a-d4b6b49629f4}">
+        <p14:section name="개념" id="{4ae667df-06fd-b3f3-019e-7bc0fcd0d454}">
           <p14:sldIdLst/>
         </p14:section>
-        <p14:section name="연습" id="{358b723d-9910-9b84-3f98-b0f64a15818e}">
+        <p14:section name="연습" id="{6044cda3-f41a-ebc3-2e91-ac60302b1f8e}">
           <p14:sldIdLst/>
         </p14:section>
-        <p14:section name="확인" id="{bc824d04-07ab-0169-5d37-b1bf2efe4180}">
+        <p14:section name="확인" id="{b7ff8962-3b53-e3cf-4f12-321489e9f0b7}">
           <p14:sldIdLst>
             <p14:sldId id="267"/>
             <p14:sldId id="268"/>
           </p14:sldIdLst>
         </p14:section>
-        <p14:section name="정리" id="{0ea90470-823f-184e-d6ab-65827d346bb1}">
+        <p14:section name="정리" id="{d62654fc-86fd-4ea3-f3e3-eb334bbde332}">
           <p14:sldIdLst>
             <p14:sldId id="269"/>
           </p14:sldIdLst>
         </p14:section>
-        <p14:section name="보충" id="{6b84344e-f2e9-69b5-5f4e-3a2152318995}">
+        <p14:section name="보충" id="{619dffb0-3a6c-aed2-e3f7-95c2c27fd85c}">
           <p14:sldIdLst>
             <p14:sldId id="270"/>
           </p14:sldIdLst>
@@ -3503,7 +3503,7 @@
           </p:nvPr>
         </p:nvGraphicFramePr>
         <p:xfrm>
-          <a:off x="1156716" y="1638300"/>
+          <a:off x="1156716" y="1687830"/>
           <a:ext cx="9875520" cy="914400"/>
         </p:xfrm>
         <a:graphic>
@@ -3518,7 +3518,7 @@
                 <a:gridCol w="1645920"/>
                 <a:gridCol w="1645920"/>
               </a:tblGrid>
-              <a:tr h="528320">
+              <a:tr h="511810">
                 <a:tc>
                   <a:txBody>
                     <a:bodyPr/>
@@ -3928,7 +3928,7 @@
                   </a:tcPr>
                 </a:tc>
               </a:tr>
-              <a:tr h="528320">
+              <a:tr h="511810">
                 <a:tc>
                   <a:txBody>
                     <a:bodyPr/>
@@ -4338,7 +4338,7 @@
                   </a:tcPr>
                 </a:tc>
               </a:tr>
-              <a:tr h="528320">
+              <a:tr h="511810">
                 <a:tc>
                   <a:txBody>
                     <a:bodyPr/>
@@ -4748,7 +4748,7 @@
                   </a:tcPr>
                 </a:tc>
               </a:tr>
-              <a:tr h="528320">
+              <a:tr h="511810">
                 <a:tc>
                   <a:txBody>
                     <a:bodyPr/>
@@ -5158,7 +5158,7 @@
                   </a:tcPr>
                 </a:tc>
               </a:tr>
-              <a:tr h="528320">
+              <a:tr h="511810">
                 <a:tc>
                   <a:txBody>
                     <a:bodyPr/>
@@ -5568,7 +5568,7 @@
                   </a:tcPr>
                 </a:tc>
               </a:tr>
-              <a:tr h="528320">
+              <a:tr h="511810">
                 <a:tc>
                   <a:txBody>
                     <a:bodyPr/>
@@ -6219,7 +6219,7 @@
           </p:nvPr>
         </p:nvGraphicFramePr>
         <p:xfrm>
-          <a:off x="548640" y="2509520"/>
+          <a:off x="548640" y="2542540"/>
           <a:ext cx="5385816" cy="914400"/>
         </p:xfrm>
         <a:graphic>
@@ -6233,7 +6233,7 @@
                 <a:gridCol w="1077163"/>
                 <a:gridCol w="1077163"/>
               </a:tblGrid>
-              <a:tr h="528320">
+              <a:tr h="511810">
                 <a:tc>
                   <a:txBody>
                     <a:bodyPr/>
@@ -6575,7 +6575,7 @@
                   </a:tcPr>
                 </a:tc>
               </a:tr>
-              <a:tr h="528320">
+              <a:tr h="511810">
                 <a:tc>
                   <a:txBody>
                     <a:bodyPr/>
@@ -6917,7 +6917,7 @@
                   </a:tcPr>
                 </a:tc>
               </a:tr>
-              <a:tr h="528320">
+              <a:tr h="511810">
                 <a:tc>
                   <a:txBody>
                     <a:bodyPr/>
@@ -7259,7 +7259,7 @@
                   </a:tcPr>
                 </a:tc>
               </a:tr>
-              <a:tr h="528320">
+              <a:tr h="511810">
                 <a:tc>
                   <a:txBody>
                     <a:bodyPr/>
@@ -7620,7 +7620,7 @@
           </p:nvPr>
         </p:nvGraphicFramePr>
         <p:xfrm>
-          <a:off x="6254496" y="2509520"/>
+          <a:off x="6254496" y="2542540"/>
           <a:ext cx="5385816" cy="914400"/>
         </p:xfrm>
         <a:graphic>
@@ -7634,7 +7634,7 @@
                 <a:gridCol w="1077163"/>
                 <a:gridCol w="1077163"/>
               </a:tblGrid>
-              <a:tr h="528320">
+              <a:tr h="511810">
                 <a:tc>
                   <a:txBody>
                     <a:bodyPr/>
@@ -7976,7 +7976,7 @@
                   </a:tcPr>
                 </a:tc>
               </a:tr>
-              <a:tr h="528320">
+              <a:tr h="511810">
                 <a:tc>
                   <a:txBody>
                     <a:bodyPr/>
@@ -8318,7 +8318,7 @@
                   </a:tcPr>
                 </a:tc>
               </a:tr>
-              <a:tr h="528320">
+              <a:tr h="511810">
                 <a:tc>
                   <a:txBody>
                     <a:bodyPr/>
@@ -8660,7 +8660,7 @@
                   </a:tcPr>
                 </a:tc>
               </a:tr>
-              <a:tr h="528320">
+              <a:tr h="511810">
                 <a:tc>
                   <a:txBody>
                     <a:bodyPr/>
@@ -9611,7 +9611,7 @@
           </p:nvPr>
         </p:nvGraphicFramePr>
         <p:xfrm>
-          <a:off x="6254496" y="2778379"/>
+          <a:off x="6254496" y="2794889"/>
           <a:ext cx="5385816" cy="914400"/>
         </p:xfrm>
         <a:graphic>
@@ -9627,7 +9627,7 @@
                 <a:gridCol w="769402"/>
                 <a:gridCol w="769402"/>
               </a:tblGrid>
-              <a:tr h="528320">
+              <a:tr h="511810">
                 <a:tc>
                   <a:txBody>
                     <a:bodyPr/>
@@ -10105,7 +10105,7 @@
                   </a:tcPr>
                 </a:tc>
               </a:tr>
-              <a:tr h="528320">
+              <a:tr h="511810">
                 <a:tc>
                   <a:txBody>
                     <a:bodyPr/>
@@ -17253,7 +17253,7 @@
           </p:nvPr>
         </p:nvGraphicFramePr>
         <p:xfrm>
-          <a:off x="1156716" y="2103120"/>
+          <a:off x="1156716" y="2030730"/>
           <a:ext cx="9875520" cy="914400"/>
         </p:xfrm>
         <a:graphic>
@@ -17268,2753 +17268,7 @@
                 <a:gridCol w="1645920"/>
                 <a:gridCol w="1645920"/>
               </a:tblGrid>
-              <a:tr h="487680">
-                <a:tc>
-                  <a:txBody>
-                    <a:bodyPr/>
-                    <a:lstStyle/>
-                    <a:p>
-                      <a:pPr eaLnBrk="0" algn="ctr" indent="0" marL="0">
-                        <a:buNone/>
-                      </a:pPr>
-                      <a:r>
-                        <a:rPr lang="en-US" sz="2400" b="1" dirty="0">
-                          <a:solidFill>
-                            <a:srgbClr val="1F2937"/>
-                          </a:solidFill>
-                          <a:latin typeface="맑은 고딕" pitchFamily="34" charset="0"/>
-                          <a:ea typeface="맑은 고딕" pitchFamily="34" charset="-122"/>
-                          <a:cs typeface="맑은 고딕" pitchFamily="34" charset="-120"/>
-                        </a:rPr>
-                        <a:t>+</a:t>
-                      </a:r>
-                      <a:endParaRPr lang="en-US" sz="2400" dirty="0">
-                        <a:latin typeface="맑은 고딕" charset="0"/>
-                        <a:ea typeface="맑은 고딕" charset="0"/>
-                        <a:cs typeface="맑은 고딕" charset="0"/>
-                      </a:endParaRPr>
-                    </a:p>
-                  </a:txBody>
-                  <a:tcPr marL="38100" marR="38100" marT="38100" marB="38100" anchor="ctr">
-                    <a:lnL w="12700" cap="flat" cmpd="sng" algn="ctr">
-                      <a:solidFill>
-                        <a:srgbClr val="94A3B8"/>
-                      </a:solidFill>
-                      <a:prstDash val="solid"/>
-                      <a:round/>
-                      <a:headEnd type="none" w="med" len="med"/>
-                      <a:tailEnd type="none" w="med" len="med"/>
-                    </a:lnL>
-                    <a:lnR w="12700" cap="flat" cmpd="sng" algn="ctr">
-                      <a:solidFill>
-                        <a:srgbClr val="94A3B8"/>
-                      </a:solidFill>
-                      <a:prstDash val="solid"/>
-                      <a:round/>
-                      <a:headEnd type="none" w="med" len="med"/>
-                      <a:tailEnd type="none" w="med" len="med"/>
-                    </a:lnR>
-                    <a:lnT w="12700" cap="flat" cmpd="sng" algn="ctr">
-                      <a:solidFill>
-                        <a:srgbClr val="94A3B8"/>
-                      </a:solidFill>
-                      <a:prstDash val="solid"/>
-                      <a:round/>
-                      <a:headEnd type="none" w="med" len="med"/>
-                      <a:tailEnd type="none" w="med" len="med"/>
-                    </a:lnT>
-                    <a:lnB w="12700" cap="flat" cmpd="sng" algn="ctr">
-                      <a:solidFill>
-                        <a:srgbClr val="94A3B8"/>
-                      </a:solidFill>
-                      <a:prstDash val="solid"/>
-                      <a:round/>
-                      <a:headEnd type="none" w="med" len="med"/>
-                      <a:tailEnd type="none" w="med" len="med"/>
-                    </a:lnB>
-                    <a:solidFill>
-                      <a:srgbClr val="EAF3F1"/>
-                    </a:solidFill>
-                  </a:tcPr>
-                </a:tc>
-                <a:tc>
-                  <a:txBody>
-                    <a:bodyPr/>
-                    <a:lstStyle/>
-                    <a:p>
-                      <a:pPr eaLnBrk="0" algn="ctr" indent="0" marL="0">
-                        <a:buNone/>
-                      </a:pPr>
-                      <a:r>
-                        <a:rPr lang="en-US" sz="2400" b="1" dirty="0">
-                          <a:solidFill>
-                            <a:srgbClr val="1F2937"/>
-                          </a:solidFill>
-                          <a:latin typeface="맑은 고딕" pitchFamily="34" charset="0"/>
-                          <a:ea typeface="맑은 고딕" pitchFamily="34" charset="-122"/>
-                          <a:cs typeface="맑은 고딕" pitchFamily="34" charset="-120"/>
-                        </a:rPr>
-                        <a:t>1</a:t>
-                      </a:r>
-                      <a:endParaRPr lang="en-US" sz="2400" dirty="0">
-                        <a:latin typeface="맑은 고딕" charset="0"/>
-                        <a:ea typeface="맑은 고딕" charset="0"/>
-                        <a:cs typeface="맑은 고딕" charset="0"/>
-                      </a:endParaRPr>
-                    </a:p>
-                  </a:txBody>
-                  <a:tcPr marL="38100" marR="38100" marT="38100" marB="38100" anchor="ctr">
-                    <a:lnL w="12700" cap="flat" cmpd="sng" algn="ctr">
-                      <a:solidFill>
-                        <a:srgbClr val="94A3B8"/>
-                      </a:solidFill>
-                      <a:prstDash val="solid"/>
-                      <a:round/>
-                      <a:headEnd type="none" w="med" len="med"/>
-                      <a:tailEnd type="none" w="med" len="med"/>
-                    </a:lnL>
-                    <a:lnR w="12700" cap="flat" cmpd="sng" algn="ctr">
-                      <a:solidFill>
-                        <a:srgbClr val="94A3B8"/>
-                      </a:solidFill>
-                      <a:prstDash val="solid"/>
-                      <a:round/>
-                      <a:headEnd type="none" w="med" len="med"/>
-                      <a:tailEnd type="none" w="med" len="med"/>
-                    </a:lnR>
-                    <a:lnT w="12700" cap="flat" cmpd="sng" algn="ctr">
-                      <a:solidFill>
-                        <a:srgbClr val="94A3B8"/>
-                      </a:solidFill>
-                      <a:prstDash val="solid"/>
-                      <a:round/>
-                      <a:headEnd type="none" w="med" len="med"/>
-                      <a:tailEnd type="none" w="med" len="med"/>
-                    </a:lnT>
-                    <a:lnB w="12700" cap="flat" cmpd="sng" algn="ctr">
-                      <a:solidFill>
-                        <a:srgbClr val="94A3B8"/>
-                      </a:solidFill>
-                      <a:prstDash val="solid"/>
-                      <a:round/>
-                      <a:headEnd type="none" w="med" len="med"/>
-                      <a:tailEnd type="none" w="med" len="med"/>
-                    </a:lnB>
-                    <a:solidFill>
-                      <a:srgbClr val="EAF3F1"/>
-                    </a:solidFill>
-                  </a:tcPr>
-                </a:tc>
-                <a:tc>
-                  <a:txBody>
-                    <a:bodyPr/>
-                    <a:lstStyle/>
-                    <a:p>
-                      <a:pPr eaLnBrk="0" algn="ctr" indent="0" marL="0">
-                        <a:buNone/>
-                      </a:pPr>
-                      <a:r>
-                        <a:rPr lang="en-US" sz="2400" b="1" dirty="0">
-                          <a:solidFill>
-                            <a:srgbClr val="1F2937"/>
-                          </a:solidFill>
-                          <a:latin typeface="맑은 고딕" pitchFamily="34" charset="0"/>
-                          <a:ea typeface="맑은 고딕" pitchFamily="34" charset="-122"/>
-                          <a:cs typeface="맑은 고딕" pitchFamily="34" charset="-120"/>
-                        </a:rPr>
-                        <a:t>2</a:t>
-                      </a:r>
-                      <a:endParaRPr lang="en-US" sz="2400" dirty="0">
-                        <a:latin typeface="맑은 고딕" charset="0"/>
-                        <a:ea typeface="맑은 고딕" charset="0"/>
-                        <a:cs typeface="맑은 고딕" charset="0"/>
-                      </a:endParaRPr>
-                    </a:p>
-                  </a:txBody>
-                  <a:tcPr marL="38100" marR="38100" marT="38100" marB="38100" anchor="ctr">
-                    <a:lnL w="12700" cap="flat" cmpd="sng" algn="ctr">
-                      <a:solidFill>
-                        <a:srgbClr val="94A3B8"/>
-                      </a:solidFill>
-                      <a:prstDash val="solid"/>
-                      <a:round/>
-                      <a:headEnd type="none" w="med" len="med"/>
-                      <a:tailEnd type="none" w="med" len="med"/>
-                    </a:lnL>
-                    <a:lnR w="12700" cap="flat" cmpd="sng" algn="ctr">
-                      <a:solidFill>
-                        <a:srgbClr val="94A3B8"/>
-                      </a:solidFill>
-                      <a:prstDash val="solid"/>
-                      <a:round/>
-                      <a:headEnd type="none" w="med" len="med"/>
-                      <a:tailEnd type="none" w="med" len="med"/>
-                    </a:lnR>
-                    <a:lnT w="12700" cap="flat" cmpd="sng" algn="ctr">
-                      <a:solidFill>
-                        <a:srgbClr val="94A3B8"/>
-                      </a:solidFill>
-                      <a:prstDash val="solid"/>
-                      <a:round/>
-                      <a:headEnd type="none" w="med" len="med"/>
-                      <a:tailEnd type="none" w="med" len="med"/>
-                    </a:lnT>
-                    <a:lnB w="12700" cap="flat" cmpd="sng" algn="ctr">
-                      <a:solidFill>
-                        <a:srgbClr val="94A3B8"/>
-                      </a:solidFill>
-                      <a:prstDash val="solid"/>
-                      <a:round/>
-                      <a:headEnd type="none" w="med" len="med"/>
-                      <a:tailEnd type="none" w="med" len="med"/>
-                    </a:lnB>
-                    <a:solidFill>
-                      <a:srgbClr val="EAF3F1"/>
-                    </a:solidFill>
-                  </a:tcPr>
-                </a:tc>
-                <a:tc>
-                  <a:txBody>
-                    <a:bodyPr/>
-                    <a:lstStyle/>
-                    <a:p>
-                      <a:pPr eaLnBrk="0" algn="ctr" indent="0" marL="0">
-                        <a:buNone/>
-                      </a:pPr>
-                      <a:r>
-                        <a:rPr lang="en-US" sz="2400" b="1" dirty="0">
-                          <a:solidFill>
-                            <a:srgbClr val="1F2937"/>
-                          </a:solidFill>
-                          <a:latin typeface="맑은 고딕" pitchFamily="34" charset="0"/>
-                          <a:ea typeface="맑은 고딕" pitchFamily="34" charset="-122"/>
-                          <a:cs typeface="맑은 고딕" pitchFamily="34" charset="-120"/>
-                        </a:rPr>
-                        <a:t>3</a:t>
-                      </a:r>
-                      <a:endParaRPr lang="en-US" sz="2400" dirty="0">
-                        <a:latin typeface="맑은 고딕" charset="0"/>
-                        <a:ea typeface="맑은 고딕" charset="0"/>
-                        <a:cs typeface="맑은 고딕" charset="0"/>
-                      </a:endParaRPr>
-                    </a:p>
-                  </a:txBody>
-                  <a:tcPr marL="38100" marR="38100" marT="38100" marB="38100" anchor="ctr">
-                    <a:lnL w="12700" cap="flat" cmpd="sng" algn="ctr">
-                      <a:solidFill>
-                        <a:srgbClr val="94A3B8"/>
-                      </a:solidFill>
-                      <a:prstDash val="solid"/>
-                      <a:round/>
-                      <a:headEnd type="none" w="med" len="med"/>
-                      <a:tailEnd type="none" w="med" len="med"/>
-                    </a:lnL>
-                    <a:lnR w="12700" cap="flat" cmpd="sng" algn="ctr">
-                      <a:solidFill>
-                        <a:srgbClr val="94A3B8"/>
-                      </a:solidFill>
-                      <a:prstDash val="solid"/>
-                      <a:round/>
-                      <a:headEnd type="none" w="med" len="med"/>
-                      <a:tailEnd type="none" w="med" len="med"/>
-                    </a:lnR>
-                    <a:lnT w="12700" cap="flat" cmpd="sng" algn="ctr">
-                      <a:solidFill>
-                        <a:srgbClr val="94A3B8"/>
-                      </a:solidFill>
-                      <a:prstDash val="solid"/>
-                      <a:round/>
-                      <a:headEnd type="none" w="med" len="med"/>
-                      <a:tailEnd type="none" w="med" len="med"/>
-                    </a:lnT>
-                    <a:lnB w="12700" cap="flat" cmpd="sng" algn="ctr">
-                      <a:solidFill>
-                        <a:srgbClr val="94A3B8"/>
-                      </a:solidFill>
-                      <a:prstDash val="solid"/>
-                      <a:round/>
-                      <a:headEnd type="none" w="med" len="med"/>
-                      <a:tailEnd type="none" w="med" len="med"/>
-                    </a:lnB>
-                    <a:solidFill>
-                      <a:srgbClr val="EAF3F1"/>
-                    </a:solidFill>
-                  </a:tcPr>
-                </a:tc>
-                <a:tc>
-                  <a:txBody>
-                    <a:bodyPr/>
-                    <a:lstStyle/>
-                    <a:p>
-                      <a:pPr eaLnBrk="0" algn="ctr" indent="0" marL="0">
-                        <a:buNone/>
-                      </a:pPr>
-                      <a:r>
-                        <a:rPr lang="en-US" sz="2400" b="1" dirty="0">
-                          <a:solidFill>
-                            <a:srgbClr val="1F2937"/>
-                          </a:solidFill>
-                          <a:latin typeface="맑은 고딕" pitchFamily="34" charset="0"/>
-                          <a:ea typeface="맑은 고딕" pitchFamily="34" charset="-122"/>
-                          <a:cs typeface="맑은 고딕" pitchFamily="34" charset="-120"/>
-                        </a:rPr>
-                        <a:t>4</a:t>
-                      </a:r>
-                      <a:endParaRPr lang="en-US" sz="2400" dirty="0">
-                        <a:latin typeface="맑은 고딕" charset="0"/>
-                        <a:ea typeface="맑은 고딕" charset="0"/>
-                        <a:cs typeface="맑은 고딕" charset="0"/>
-                      </a:endParaRPr>
-                    </a:p>
-                  </a:txBody>
-                  <a:tcPr marL="38100" marR="38100" marT="38100" marB="38100" anchor="ctr">
-                    <a:lnL w="12700" cap="flat" cmpd="sng" algn="ctr">
-                      <a:solidFill>
-                        <a:srgbClr val="94A3B8"/>
-                      </a:solidFill>
-                      <a:prstDash val="solid"/>
-                      <a:round/>
-                      <a:headEnd type="none" w="med" len="med"/>
-                      <a:tailEnd type="none" w="med" len="med"/>
-                    </a:lnL>
-                    <a:lnR w="12700" cap="flat" cmpd="sng" algn="ctr">
-                      <a:solidFill>
-                        <a:srgbClr val="94A3B8"/>
-                      </a:solidFill>
-                      <a:prstDash val="solid"/>
-                      <a:round/>
-                      <a:headEnd type="none" w="med" len="med"/>
-                      <a:tailEnd type="none" w="med" len="med"/>
-                    </a:lnR>
-                    <a:lnT w="12700" cap="flat" cmpd="sng" algn="ctr">
-                      <a:solidFill>
-                        <a:srgbClr val="94A3B8"/>
-                      </a:solidFill>
-                      <a:prstDash val="solid"/>
-                      <a:round/>
-                      <a:headEnd type="none" w="med" len="med"/>
-                      <a:tailEnd type="none" w="med" len="med"/>
-                    </a:lnT>
-                    <a:lnB w="12700" cap="flat" cmpd="sng" algn="ctr">
-                      <a:solidFill>
-                        <a:srgbClr val="94A3B8"/>
-                      </a:solidFill>
-                      <a:prstDash val="solid"/>
-                      <a:round/>
-                      <a:headEnd type="none" w="med" len="med"/>
-                      <a:tailEnd type="none" w="med" len="med"/>
-                    </a:lnB>
-                    <a:solidFill>
-                      <a:srgbClr val="EAF3F1"/>
-                    </a:solidFill>
-                  </a:tcPr>
-                </a:tc>
-                <a:tc>
-                  <a:txBody>
-                    <a:bodyPr/>
-                    <a:lstStyle/>
-                    <a:p>
-                      <a:pPr eaLnBrk="0" algn="ctr" indent="0" marL="0">
-                        <a:buNone/>
-                      </a:pPr>
-                      <a:r>
-                        <a:rPr lang="en-US" sz="2400" b="1" dirty="0">
-                          <a:solidFill>
-                            <a:srgbClr val="1F2937"/>
-                          </a:solidFill>
-                          <a:latin typeface="맑은 고딕" pitchFamily="34" charset="0"/>
-                          <a:ea typeface="맑은 고딕" pitchFamily="34" charset="-122"/>
-                          <a:cs typeface="맑은 고딕" pitchFamily="34" charset="-120"/>
-                        </a:rPr>
-                        <a:t>5</a:t>
-                      </a:r>
-                      <a:endParaRPr lang="en-US" sz="2400" dirty="0">
-                        <a:latin typeface="맑은 고딕" charset="0"/>
-                        <a:ea typeface="맑은 고딕" charset="0"/>
-                        <a:cs typeface="맑은 고딕" charset="0"/>
-                      </a:endParaRPr>
-                    </a:p>
-                  </a:txBody>
-                  <a:tcPr marL="38100" marR="38100" marT="38100" marB="38100" anchor="ctr">
-                    <a:lnL w="12700" cap="flat" cmpd="sng" algn="ctr">
-                      <a:solidFill>
-                        <a:srgbClr val="94A3B8"/>
-                      </a:solidFill>
-                      <a:prstDash val="solid"/>
-                      <a:round/>
-                      <a:headEnd type="none" w="med" len="med"/>
-                      <a:tailEnd type="none" w="med" len="med"/>
-                    </a:lnL>
-                    <a:lnR w="12700" cap="flat" cmpd="sng" algn="ctr">
-                      <a:solidFill>
-                        <a:srgbClr val="94A3B8"/>
-                      </a:solidFill>
-                      <a:prstDash val="solid"/>
-                      <a:round/>
-                      <a:headEnd type="none" w="med" len="med"/>
-                      <a:tailEnd type="none" w="med" len="med"/>
-                    </a:lnR>
-                    <a:lnT w="12700" cap="flat" cmpd="sng" algn="ctr">
-                      <a:solidFill>
-                        <a:srgbClr val="94A3B8"/>
-                      </a:solidFill>
-                      <a:prstDash val="solid"/>
-                      <a:round/>
-                      <a:headEnd type="none" w="med" len="med"/>
-                      <a:tailEnd type="none" w="med" len="med"/>
-                    </a:lnT>
-                    <a:lnB w="12700" cap="flat" cmpd="sng" algn="ctr">
-                      <a:solidFill>
-                        <a:srgbClr val="94A3B8"/>
-                      </a:solidFill>
-                      <a:prstDash val="solid"/>
-                      <a:round/>
-                      <a:headEnd type="none" w="med" len="med"/>
-                      <a:tailEnd type="none" w="med" len="med"/>
-                    </a:lnB>
-                    <a:solidFill>
-                      <a:srgbClr val="EAF3F1"/>
-                    </a:solidFill>
-                  </a:tcPr>
-                </a:tc>
-              </a:tr>
-              <a:tr h="487680">
-                <a:tc>
-                  <a:txBody>
-                    <a:bodyPr/>
-                    <a:lstStyle/>
-                    <a:p>
-                      <a:pPr eaLnBrk="0" algn="ctr" indent="0" marL="0">
-                        <a:buNone/>
-                      </a:pPr>
-                      <a:r>
-                        <a:rPr lang="en-US" sz="2400" b="1" dirty="0">
-                          <a:solidFill>
-                            <a:srgbClr val="1F2937"/>
-                          </a:solidFill>
-                          <a:latin typeface="맑은 고딕" pitchFamily="34" charset="0"/>
-                          <a:ea typeface="맑은 고딕" pitchFamily="34" charset="-122"/>
-                          <a:cs typeface="맑은 고딕" pitchFamily="34" charset="-120"/>
-                        </a:rPr>
-                        <a:t>1</a:t>
-                      </a:r>
-                      <a:endParaRPr lang="en-US" sz="2400" dirty="0">
-                        <a:latin typeface="맑은 고딕" charset="0"/>
-                        <a:ea typeface="맑은 고딕" charset="0"/>
-                        <a:cs typeface="맑은 고딕" charset="0"/>
-                      </a:endParaRPr>
-                    </a:p>
-                  </a:txBody>
-                  <a:tcPr marL="38100" marR="38100" marT="38100" marB="38100" anchor="ctr">
-                    <a:lnL w="12700" cap="flat" cmpd="sng" algn="ctr">
-                      <a:solidFill>
-                        <a:srgbClr val="94A3B8"/>
-                      </a:solidFill>
-                      <a:prstDash val="solid"/>
-                      <a:round/>
-                      <a:headEnd type="none" w="med" len="med"/>
-                      <a:tailEnd type="none" w="med" len="med"/>
-                    </a:lnL>
-                    <a:lnR w="12700" cap="flat" cmpd="sng" algn="ctr">
-                      <a:solidFill>
-                        <a:srgbClr val="94A3B8"/>
-                      </a:solidFill>
-                      <a:prstDash val="solid"/>
-                      <a:round/>
-                      <a:headEnd type="none" w="med" len="med"/>
-                      <a:tailEnd type="none" w="med" len="med"/>
-                    </a:lnR>
-                    <a:lnT w="12700" cap="flat" cmpd="sng" algn="ctr">
-                      <a:solidFill>
-                        <a:srgbClr val="94A3B8"/>
-                      </a:solidFill>
-                      <a:prstDash val="solid"/>
-                      <a:round/>
-                      <a:headEnd type="none" w="med" len="med"/>
-                      <a:tailEnd type="none" w="med" len="med"/>
-                    </a:lnT>
-                    <a:lnB w="12700" cap="flat" cmpd="sng" algn="ctr">
-                      <a:solidFill>
-                        <a:srgbClr val="94A3B8"/>
-                      </a:solidFill>
-                      <a:prstDash val="solid"/>
-                      <a:round/>
-                      <a:headEnd type="none" w="med" len="med"/>
-                      <a:tailEnd type="none" w="med" len="med"/>
-                    </a:lnB>
-                    <a:solidFill>
-                      <a:srgbClr val="EAF3F1"/>
-                    </a:solidFill>
-                  </a:tcPr>
-                </a:tc>
-                <a:tc>
-                  <a:txBody>
-                    <a:bodyPr/>
-                    <a:lstStyle/>
-                    <a:p>
-                      <a:pPr eaLnBrk="0" algn="ctr" indent="0" marL="0">
-                        <a:buNone/>
-                      </a:pPr>
-                      <a:r>
-                        <a:rPr lang="en-US" sz="2400" dirty="0">
-                          <a:solidFill>
-                            <a:srgbClr val="1F2937"/>
-                          </a:solidFill>
-                          <a:latin typeface="맑은 고딕" pitchFamily="34" charset="0"/>
-                          <a:ea typeface="맑은 고딕" pitchFamily="34" charset="-122"/>
-                          <a:cs typeface="맑은 고딕" pitchFamily="34" charset="-120"/>
-                        </a:rPr>
-                        <a:t>2</a:t>
-                      </a:r>
-                      <a:endParaRPr lang="en-US" sz="2400" dirty="0">
-                        <a:latin typeface="맑은 고딕" charset="0"/>
-                        <a:ea typeface="맑은 고딕" charset="0"/>
-                        <a:cs typeface="맑은 고딕" charset="0"/>
-                      </a:endParaRPr>
-                    </a:p>
-                  </a:txBody>
-                  <a:tcPr marL="38100" marR="38100" marT="38100" marB="38100" anchor="ctr">
-                    <a:lnL w="12700" cap="flat" cmpd="sng" algn="ctr">
-                      <a:solidFill>
-                        <a:srgbClr val="94A3B8"/>
-                      </a:solidFill>
-                      <a:prstDash val="solid"/>
-                      <a:round/>
-                      <a:headEnd type="none" w="med" len="med"/>
-                      <a:tailEnd type="none" w="med" len="med"/>
-                    </a:lnL>
-                    <a:lnR w="12700" cap="flat" cmpd="sng" algn="ctr">
-                      <a:solidFill>
-                        <a:srgbClr val="94A3B8"/>
-                      </a:solidFill>
-                      <a:prstDash val="solid"/>
-                      <a:round/>
-                      <a:headEnd type="none" w="med" len="med"/>
-                      <a:tailEnd type="none" w="med" len="med"/>
-                    </a:lnR>
-                    <a:lnT w="12700" cap="flat" cmpd="sng" algn="ctr">
-                      <a:solidFill>
-                        <a:srgbClr val="94A3B8"/>
-                      </a:solidFill>
-                      <a:prstDash val="solid"/>
-                      <a:round/>
-                      <a:headEnd type="none" w="med" len="med"/>
-                      <a:tailEnd type="none" w="med" len="med"/>
-                    </a:lnT>
-                    <a:lnB w="12700" cap="flat" cmpd="sng" algn="ctr">
-                      <a:solidFill>
-                        <a:srgbClr val="94A3B8"/>
-                      </a:solidFill>
-                      <a:prstDash val="solid"/>
-                      <a:round/>
-                      <a:headEnd type="none" w="med" len="med"/>
-                      <a:tailEnd type="none" w="med" len="med"/>
-                    </a:lnB>
-                    <a:solidFill>
-                      <a:srgbClr val="FFFFFF"/>
-                    </a:solidFill>
-                  </a:tcPr>
-                </a:tc>
-                <a:tc>
-                  <a:txBody>
-                    <a:bodyPr/>
-                    <a:lstStyle/>
-                    <a:p>
-                      <a:pPr eaLnBrk="0" algn="ctr" indent="0" marL="0">
-                        <a:buNone/>
-                      </a:pPr>
-                      <a:r>
-                        <a:rPr lang="en-US" sz="2400" dirty="0">
-                          <a:solidFill>
-                            <a:srgbClr val="1F2937"/>
-                          </a:solidFill>
-                          <a:latin typeface="맑은 고딕" pitchFamily="34" charset="0"/>
-                          <a:ea typeface="맑은 고딕" pitchFamily="34" charset="-122"/>
-                          <a:cs typeface="맑은 고딕" pitchFamily="34" charset="-120"/>
-                        </a:rPr>
-                        <a:t>3</a:t>
-                      </a:r>
-                      <a:endParaRPr lang="en-US" sz="2400" dirty="0">
-                        <a:latin typeface="맑은 고딕" charset="0"/>
-                        <a:ea typeface="맑은 고딕" charset="0"/>
-                        <a:cs typeface="맑은 고딕" charset="0"/>
-                      </a:endParaRPr>
-                    </a:p>
-                  </a:txBody>
-                  <a:tcPr marL="38100" marR="38100" marT="38100" marB="38100" anchor="ctr">
-                    <a:lnL w="12700" cap="flat" cmpd="sng" algn="ctr">
-                      <a:solidFill>
-                        <a:srgbClr val="94A3B8"/>
-                      </a:solidFill>
-                      <a:prstDash val="solid"/>
-                      <a:round/>
-                      <a:headEnd type="none" w="med" len="med"/>
-                      <a:tailEnd type="none" w="med" len="med"/>
-                    </a:lnL>
-                    <a:lnR w="12700" cap="flat" cmpd="sng" algn="ctr">
-                      <a:solidFill>
-                        <a:srgbClr val="94A3B8"/>
-                      </a:solidFill>
-                      <a:prstDash val="solid"/>
-                      <a:round/>
-                      <a:headEnd type="none" w="med" len="med"/>
-                      <a:tailEnd type="none" w="med" len="med"/>
-                    </a:lnR>
-                    <a:lnT w="12700" cap="flat" cmpd="sng" algn="ctr">
-                      <a:solidFill>
-                        <a:srgbClr val="94A3B8"/>
-                      </a:solidFill>
-                      <a:prstDash val="solid"/>
-                      <a:round/>
-                      <a:headEnd type="none" w="med" len="med"/>
-                      <a:tailEnd type="none" w="med" len="med"/>
-                    </a:lnT>
-                    <a:lnB w="12700" cap="flat" cmpd="sng" algn="ctr">
-                      <a:solidFill>
-                        <a:srgbClr val="94A3B8"/>
-                      </a:solidFill>
-                      <a:prstDash val="solid"/>
-                      <a:round/>
-                      <a:headEnd type="none" w="med" len="med"/>
-                      <a:tailEnd type="none" w="med" len="med"/>
-                    </a:lnB>
-                    <a:solidFill>
-                      <a:srgbClr val="FFFFFF"/>
-                    </a:solidFill>
-                  </a:tcPr>
-                </a:tc>
-                <a:tc>
-                  <a:txBody>
-                    <a:bodyPr/>
-                    <a:lstStyle/>
-                    <a:p>
-                      <a:pPr eaLnBrk="0" algn="ctr" indent="0" marL="0">
-                        <a:buNone/>
-                      </a:pPr>
-                      <a:r>
-                        <a:rPr lang="en-US" sz="2400" dirty="0">
-                          <a:solidFill>
-                            <a:srgbClr val="1F2937"/>
-                          </a:solidFill>
-                          <a:latin typeface="맑은 고딕" pitchFamily="34" charset="0"/>
-                          <a:ea typeface="맑은 고딕" pitchFamily="34" charset="-122"/>
-                          <a:cs typeface="맑은 고딕" pitchFamily="34" charset="-120"/>
-                        </a:rPr>
-                        <a:t>4</a:t>
-                      </a:r>
-                      <a:endParaRPr lang="en-US" sz="2400" dirty="0">
-                        <a:latin typeface="맑은 고딕" charset="0"/>
-                        <a:ea typeface="맑은 고딕" charset="0"/>
-                        <a:cs typeface="맑은 고딕" charset="0"/>
-                      </a:endParaRPr>
-                    </a:p>
-                  </a:txBody>
-                  <a:tcPr marL="38100" marR="38100" marT="38100" marB="38100" anchor="ctr">
-                    <a:lnL w="12700" cap="flat" cmpd="sng" algn="ctr">
-                      <a:solidFill>
-                        <a:srgbClr val="94A3B8"/>
-                      </a:solidFill>
-                      <a:prstDash val="solid"/>
-                      <a:round/>
-                      <a:headEnd type="none" w="med" len="med"/>
-                      <a:tailEnd type="none" w="med" len="med"/>
-                    </a:lnL>
-                    <a:lnR w="12700" cap="flat" cmpd="sng" algn="ctr">
-                      <a:solidFill>
-                        <a:srgbClr val="94A3B8"/>
-                      </a:solidFill>
-                      <a:prstDash val="solid"/>
-                      <a:round/>
-                      <a:headEnd type="none" w="med" len="med"/>
-                      <a:tailEnd type="none" w="med" len="med"/>
-                    </a:lnR>
-                    <a:lnT w="12700" cap="flat" cmpd="sng" algn="ctr">
-                      <a:solidFill>
-                        <a:srgbClr val="94A3B8"/>
-                      </a:solidFill>
-                      <a:prstDash val="solid"/>
-                      <a:round/>
-                      <a:headEnd type="none" w="med" len="med"/>
-                      <a:tailEnd type="none" w="med" len="med"/>
-                    </a:lnT>
-                    <a:lnB w="12700" cap="flat" cmpd="sng" algn="ctr">
-                      <a:solidFill>
-                        <a:srgbClr val="94A3B8"/>
-                      </a:solidFill>
-                      <a:prstDash val="solid"/>
-                      <a:round/>
-                      <a:headEnd type="none" w="med" len="med"/>
-                      <a:tailEnd type="none" w="med" len="med"/>
-                    </a:lnB>
-                    <a:solidFill>
-                      <a:srgbClr val="FFFFFF"/>
-                    </a:solidFill>
-                  </a:tcPr>
-                </a:tc>
-                <a:tc>
-                  <a:txBody>
-                    <a:bodyPr/>
-                    <a:lstStyle/>
-                    <a:p>
-                      <a:pPr eaLnBrk="0" algn="ctr" indent="0" marL="0">
-                        <a:buNone/>
-                      </a:pPr>
-                      <a:r>
-                        <a:rPr lang="en-US" sz="2400" dirty="0">
-                          <a:solidFill>
-                            <a:srgbClr val="1F2937"/>
-                          </a:solidFill>
-                          <a:latin typeface="맑은 고딕" pitchFamily="34" charset="0"/>
-                          <a:ea typeface="맑은 고딕" pitchFamily="34" charset="-122"/>
-                          <a:cs typeface="맑은 고딕" pitchFamily="34" charset="-120"/>
-                        </a:rPr>
-                        <a:t>5</a:t>
-                      </a:r>
-                      <a:endParaRPr lang="en-US" sz="2400" dirty="0">
-                        <a:latin typeface="맑은 고딕" charset="0"/>
-                        <a:ea typeface="맑은 고딕" charset="0"/>
-                        <a:cs typeface="맑은 고딕" charset="0"/>
-                      </a:endParaRPr>
-                    </a:p>
-                  </a:txBody>
-                  <a:tcPr marL="38100" marR="38100" marT="38100" marB="38100" anchor="ctr">
-                    <a:lnL w="12700" cap="flat" cmpd="sng" algn="ctr">
-                      <a:solidFill>
-                        <a:srgbClr val="94A3B8"/>
-                      </a:solidFill>
-                      <a:prstDash val="solid"/>
-                      <a:round/>
-                      <a:headEnd type="none" w="med" len="med"/>
-                      <a:tailEnd type="none" w="med" len="med"/>
-                    </a:lnL>
-                    <a:lnR w="12700" cap="flat" cmpd="sng" algn="ctr">
-                      <a:solidFill>
-                        <a:srgbClr val="94A3B8"/>
-                      </a:solidFill>
-                      <a:prstDash val="solid"/>
-                      <a:round/>
-                      <a:headEnd type="none" w="med" len="med"/>
-                      <a:tailEnd type="none" w="med" len="med"/>
-                    </a:lnR>
-                    <a:lnT w="12700" cap="flat" cmpd="sng" algn="ctr">
-                      <a:solidFill>
-                        <a:srgbClr val="94A3B8"/>
-                      </a:solidFill>
-                      <a:prstDash val="solid"/>
-                      <a:round/>
-                      <a:headEnd type="none" w="med" len="med"/>
-                      <a:tailEnd type="none" w="med" len="med"/>
-                    </a:lnT>
-                    <a:lnB w="12700" cap="flat" cmpd="sng" algn="ctr">
-                      <a:solidFill>
-                        <a:srgbClr val="94A3B8"/>
-                      </a:solidFill>
-                      <a:prstDash val="solid"/>
-                      <a:round/>
-                      <a:headEnd type="none" w="med" len="med"/>
-                      <a:tailEnd type="none" w="med" len="med"/>
-                    </a:lnB>
-                    <a:solidFill>
-                      <a:srgbClr val="FFFFFF"/>
-                    </a:solidFill>
-                  </a:tcPr>
-                </a:tc>
-                <a:tc>
-                  <a:txBody>
-                    <a:bodyPr/>
-                    <a:lstStyle/>
-                    <a:p>
-                      <a:pPr eaLnBrk="0" algn="ctr" indent="0" marL="0">
-                        <a:buNone/>
-                      </a:pPr>
-                      <a:r>
-                        <a:rPr lang="en-US" sz="2400" dirty="0">
-                          <a:solidFill>
-                            <a:srgbClr val="1F2937"/>
-                          </a:solidFill>
-                          <a:latin typeface="맑은 고딕" pitchFamily="34" charset="0"/>
-                          <a:ea typeface="맑은 고딕" pitchFamily="34" charset="-122"/>
-                          <a:cs typeface="맑은 고딕" pitchFamily="34" charset="-120"/>
-                        </a:rPr>
-                        <a:t>6</a:t>
-                      </a:r>
-                      <a:endParaRPr lang="en-US" sz="2400" dirty="0">
-                        <a:latin typeface="맑은 고딕" charset="0"/>
-                        <a:ea typeface="맑은 고딕" charset="0"/>
-                        <a:cs typeface="맑은 고딕" charset="0"/>
-                      </a:endParaRPr>
-                    </a:p>
-                  </a:txBody>
-                  <a:tcPr marL="38100" marR="38100" marT="38100" marB="38100" anchor="ctr">
-                    <a:lnL w="12700" cap="flat" cmpd="sng" algn="ctr">
-                      <a:solidFill>
-                        <a:srgbClr val="94A3B8"/>
-                      </a:solidFill>
-                      <a:prstDash val="solid"/>
-                      <a:round/>
-                      <a:headEnd type="none" w="med" len="med"/>
-                      <a:tailEnd type="none" w="med" len="med"/>
-                    </a:lnL>
-                    <a:lnR w="12700" cap="flat" cmpd="sng" algn="ctr">
-                      <a:solidFill>
-                        <a:srgbClr val="94A3B8"/>
-                      </a:solidFill>
-                      <a:prstDash val="solid"/>
-                      <a:round/>
-                      <a:headEnd type="none" w="med" len="med"/>
-                      <a:tailEnd type="none" w="med" len="med"/>
-                    </a:lnR>
-                    <a:lnT w="12700" cap="flat" cmpd="sng" algn="ctr">
-                      <a:solidFill>
-                        <a:srgbClr val="94A3B8"/>
-                      </a:solidFill>
-                      <a:prstDash val="solid"/>
-                      <a:round/>
-                      <a:headEnd type="none" w="med" len="med"/>
-                      <a:tailEnd type="none" w="med" len="med"/>
-                    </a:lnT>
-                    <a:lnB w="12700" cap="flat" cmpd="sng" algn="ctr">
-                      <a:solidFill>
-                        <a:srgbClr val="94A3B8"/>
-                      </a:solidFill>
-                      <a:prstDash val="solid"/>
-                      <a:round/>
-                      <a:headEnd type="none" w="med" len="med"/>
-                      <a:tailEnd type="none" w="med" len="med"/>
-                    </a:lnB>
-                    <a:solidFill>
-                      <a:srgbClr val="FFFFFF"/>
-                    </a:solidFill>
-                  </a:tcPr>
-                </a:tc>
-              </a:tr>
-              <a:tr h="487680">
-                <a:tc>
-                  <a:txBody>
-                    <a:bodyPr/>
-                    <a:lstStyle/>
-                    <a:p>
-                      <a:pPr eaLnBrk="0" algn="ctr" indent="0" marL="0">
-                        <a:buNone/>
-                      </a:pPr>
-                      <a:r>
-                        <a:rPr lang="en-US" sz="2400" b="1" dirty="0">
-                          <a:solidFill>
-                            <a:srgbClr val="1F2937"/>
-                          </a:solidFill>
-                          <a:latin typeface="맑은 고딕" pitchFamily="34" charset="0"/>
-                          <a:ea typeface="맑은 고딕" pitchFamily="34" charset="-122"/>
-                          <a:cs typeface="맑은 고딕" pitchFamily="34" charset="-120"/>
-                        </a:rPr>
-                        <a:t>2</a:t>
-                      </a:r>
-                      <a:endParaRPr lang="en-US" sz="2400" dirty="0">
-                        <a:latin typeface="맑은 고딕" charset="0"/>
-                        <a:ea typeface="맑은 고딕" charset="0"/>
-                        <a:cs typeface="맑은 고딕" charset="0"/>
-                      </a:endParaRPr>
-                    </a:p>
-                  </a:txBody>
-                  <a:tcPr marL="38100" marR="38100" marT="38100" marB="38100" anchor="ctr">
-                    <a:lnL w="12700" cap="flat" cmpd="sng" algn="ctr">
-                      <a:solidFill>
-                        <a:srgbClr val="94A3B8"/>
-                      </a:solidFill>
-                      <a:prstDash val="solid"/>
-                      <a:round/>
-                      <a:headEnd type="none" w="med" len="med"/>
-                      <a:tailEnd type="none" w="med" len="med"/>
-                    </a:lnL>
-                    <a:lnR w="12700" cap="flat" cmpd="sng" algn="ctr">
-                      <a:solidFill>
-                        <a:srgbClr val="94A3B8"/>
-                      </a:solidFill>
-                      <a:prstDash val="solid"/>
-                      <a:round/>
-                      <a:headEnd type="none" w="med" len="med"/>
-                      <a:tailEnd type="none" w="med" len="med"/>
-                    </a:lnR>
-                    <a:lnT w="12700" cap="flat" cmpd="sng" algn="ctr">
-                      <a:solidFill>
-                        <a:srgbClr val="94A3B8"/>
-                      </a:solidFill>
-                      <a:prstDash val="solid"/>
-                      <a:round/>
-                      <a:headEnd type="none" w="med" len="med"/>
-                      <a:tailEnd type="none" w="med" len="med"/>
-                    </a:lnT>
-                    <a:lnB w="12700" cap="flat" cmpd="sng" algn="ctr">
-                      <a:solidFill>
-                        <a:srgbClr val="94A3B8"/>
-                      </a:solidFill>
-                      <a:prstDash val="solid"/>
-                      <a:round/>
-                      <a:headEnd type="none" w="med" len="med"/>
-                      <a:tailEnd type="none" w="med" len="med"/>
-                    </a:lnB>
-                    <a:solidFill>
-                      <a:srgbClr val="EAF3F1"/>
-                    </a:solidFill>
-                  </a:tcPr>
-                </a:tc>
-                <a:tc>
-                  <a:txBody>
-                    <a:bodyPr/>
-                    <a:lstStyle/>
-                    <a:p>
-                      <a:pPr eaLnBrk="0" algn="ctr" indent="0" marL="0">
-                        <a:buNone/>
-                      </a:pPr>
-                      <a:r>
-                        <a:rPr lang="en-US" sz="2400" dirty="0">
-                          <a:solidFill>
-                            <a:srgbClr val="1F2937"/>
-                          </a:solidFill>
-                          <a:latin typeface="맑은 고딕" pitchFamily="34" charset="0"/>
-                          <a:ea typeface="맑은 고딕" pitchFamily="34" charset="-122"/>
-                          <a:cs typeface="맑은 고딕" pitchFamily="34" charset="-120"/>
-                        </a:rPr>
-                        <a:t>3</a:t>
-                      </a:r>
-                      <a:endParaRPr lang="en-US" sz="2400" dirty="0">
-                        <a:latin typeface="맑은 고딕" charset="0"/>
-                        <a:ea typeface="맑은 고딕" charset="0"/>
-                        <a:cs typeface="맑은 고딕" charset="0"/>
-                      </a:endParaRPr>
-                    </a:p>
-                  </a:txBody>
-                  <a:tcPr marL="38100" marR="38100" marT="38100" marB="38100" anchor="ctr">
-                    <a:lnL w="12700" cap="flat" cmpd="sng" algn="ctr">
-                      <a:solidFill>
-                        <a:srgbClr val="94A3B8"/>
-                      </a:solidFill>
-                      <a:prstDash val="solid"/>
-                      <a:round/>
-                      <a:headEnd type="none" w="med" len="med"/>
-                      <a:tailEnd type="none" w="med" len="med"/>
-                    </a:lnL>
-                    <a:lnR w="12700" cap="flat" cmpd="sng" algn="ctr">
-                      <a:solidFill>
-                        <a:srgbClr val="94A3B8"/>
-                      </a:solidFill>
-                      <a:prstDash val="solid"/>
-                      <a:round/>
-                      <a:headEnd type="none" w="med" len="med"/>
-                      <a:tailEnd type="none" w="med" len="med"/>
-                    </a:lnR>
-                    <a:lnT w="12700" cap="flat" cmpd="sng" algn="ctr">
-                      <a:solidFill>
-                        <a:srgbClr val="94A3B8"/>
-                      </a:solidFill>
-                      <a:prstDash val="solid"/>
-                      <a:round/>
-                      <a:headEnd type="none" w="med" len="med"/>
-                      <a:tailEnd type="none" w="med" len="med"/>
-                    </a:lnT>
-                    <a:lnB w="12700" cap="flat" cmpd="sng" algn="ctr">
-                      <a:solidFill>
-                        <a:srgbClr val="94A3B8"/>
-                      </a:solidFill>
-                      <a:prstDash val="solid"/>
-                      <a:round/>
-                      <a:headEnd type="none" w="med" len="med"/>
-                      <a:tailEnd type="none" w="med" len="med"/>
-                    </a:lnB>
-                    <a:solidFill>
-                      <a:srgbClr val="FFFFFF"/>
-                    </a:solidFill>
-                  </a:tcPr>
-                </a:tc>
-                <a:tc>
-                  <a:txBody>
-                    <a:bodyPr/>
-                    <a:lstStyle/>
-                    <a:p>
-                      <a:pPr eaLnBrk="0" algn="ctr" indent="0" marL="0">
-                        <a:buNone/>
-                      </a:pPr>
-                      <a:r>
-                        <a:rPr lang="en-US" sz="2400" dirty="0">
-                          <a:solidFill>
-                            <a:srgbClr val="1F2937"/>
-                          </a:solidFill>
-                          <a:latin typeface="맑은 고딕" pitchFamily="34" charset="0"/>
-                          <a:ea typeface="맑은 고딕" pitchFamily="34" charset="-122"/>
-                          <a:cs typeface="맑은 고딕" pitchFamily="34" charset="-120"/>
-                        </a:rPr>
-                        <a:t>4</a:t>
-                      </a:r>
-                      <a:endParaRPr lang="en-US" sz="2400" dirty="0">
-                        <a:latin typeface="맑은 고딕" charset="0"/>
-                        <a:ea typeface="맑은 고딕" charset="0"/>
-                        <a:cs typeface="맑은 고딕" charset="0"/>
-                      </a:endParaRPr>
-                    </a:p>
-                  </a:txBody>
-                  <a:tcPr marL="38100" marR="38100" marT="38100" marB="38100" anchor="ctr">
-                    <a:lnL w="12700" cap="flat" cmpd="sng" algn="ctr">
-                      <a:solidFill>
-                        <a:srgbClr val="94A3B8"/>
-                      </a:solidFill>
-                      <a:prstDash val="solid"/>
-                      <a:round/>
-                      <a:headEnd type="none" w="med" len="med"/>
-                      <a:tailEnd type="none" w="med" len="med"/>
-                    </a:lnL>
-                    <a:lnR w="12700" cap="flat" cmpd="sng" algn="ctr">
-                      <a:solidFill>
-                        <a:srgbClr val="94A3B8"/>
-                      </a:solidFill>
-                      <a:prstDash val="solid"/>
-                      <a:round/>
-                      <a:headEnd type="none" w="med" len="med"/>
-                      <a:tailEnd type="none" w="med" len="med"/>
-                    </a:lnR>
-                    <a:lnT w="12700" cap="flat" cmpd="sng" algn="ctr">
-                      <a:solidFill>
-                        <a:srgbClr val="94A3B8"/>
-                      </a:solidFill>
-                      <a:prstDash val="solid"/>
-                      <a:round/>
-                      <a:headEnd type="none" w="med" len="med"/>
-                      <a:tailEnd type="none" w="med" len="med"/>
-                    </a:lnT>
-                    <a:lnB w="12700" cap="flat" cmpd="sng" algn="ctr">
-                      <a:solidFill>
-                        <a:srgbClr val="94A3B8"/>
-                      </a:solidFill>
-                      <a:prstDash val="solid"/>
-                      <a:round/>
-                      <a:headEnd type="none" w="med" len="med"/>
-                      <a:tailEnd type="none" w="med" len="med"/>
-                    </a:lnB>
-                    <a:solidFill>
-                      <a:srgbClr val="FFFFFF"/>
-                    </a:solidFill>
-                  </a:tcPr>
-                </a:tc>
-                <a:tc>
-                  <a:txBody>
-                    <a:bodyPr/>
-                    <a:lstStyle/>
-                    <a:p>
-                      <a:pPr eaLnBrk="0" algn="ctr" indent="0" marL="0">
-                        <a:buNone/>
-                      </a:pPr>
-                      <a:r>
-                        <a:rPr lang="en-US" sz="2400" dirty="0">
-                          <a:solidFill>
-                            <a:srgbClr val="1F2937"/>
-                          </a:solidFill>
-                          <a:latin typeface="맑은 고딕" pitchFamily="34" charset="0"/>
-                          <a:ea typeface="맑은 고딕" pitchFamily="34" charset="-122"/>
-                          <a:cs typeface="맑은 고딕" pitchFamily="34" charset="-120"/>
-                        </a:rPr>
-                        <a:t>5</a:t>
-                      </a:r>
-                      <a:endParaRPr lang="en-US" sz="2400" dirty="0">
-                        <a:latin typeface="맑은 고딕" charset="0"/>
-                        <a:ea typeface="맑은 고딕" charset="0"/>
-                        <a:cs typeface="맑은 고딕" charset="0"/>
-                      </a:endParaRPr>
-                    </a:p>
-                  </a:txBody>
-                  <a:tcPr marL="38100" marR="38100" marT="38100" marB="38100" anchor="ctr">
-                    <a:lnL w="12700" cap="flat" cmpd="sng" algn="ctr">
-                      <a:solidFill>
-                        <a:srgbClr val="94A3B8"/>
-                      </a:solidFill>
-                      <a:prstDash val="solid"/>
-                      <a:round/>
-                      <a:headEnd type="none" w="med" len="med"/>
-                      <a:tailEnd type="none" w="med" len="med"/>
-                    </a:lnL>
-                    <a:lnR w="12700" cap="flat" cmpd="sng" algn="ctr">
-                      <a:solidFill>
-                        <a:srgbClr val="94A3B8"/>
-                      </a:solidFill>
-                      <a:prstDash val="solid"/>
-                      <a:round/>
-                      <a:headEnd type="none" w="med" len="med"/>
-                      <a:tailEnd type="none" w="med" len="med"/>
-                    </a:lnR>
-                    <a:lnT w="12700" cap="flat" cmpd="sng" algn="ctr">
-                      <a:solidFill>
-                        <a:srgbClr val="94A3B8"/>
-                      </a:solidFill>
-                      <a:prstDash val="solid"/>
-                      <a:round/>
-                      <a:headEnd type="none" w="med" len="med"/>
-                      <a:tailEnd type="none" w="med" len="med"/>
-                    </a:lnT>
-                    <a:lnB w="12700" cap="flat" cmpd="sng" algn="ctr">
-                      <a:solidFill>
-                        <a:srgbClr val="94A3B8"/>
-                      </a:solidFill>
-                      <a:prstDash val="solid"/>
-                      <a:round/>
-                      <a:headEnd type="none" w="med" len="med"/>
-                      <a:tailEnd type="none" w="med" len="med"/>
-                    </a:lnB>
-                    <a:solidFill>
-                      <a:srgbClr val="FFFFFF"/>
-                    </a:solidFill>
-                  </a:tcPr>
-                </a:tc>
-                <a:tc>
-                  <a:txBody>
-                    <a:bodyPr/>
-                    <a:lstStyle/>
-                    <a:p>
-                      <a:pPr eaLnBrk="0" algn="ctr" indent="0" marL="0">
-                        <a:buNone/>
-                      </a:pPr>
-                      <a:r>
-                        <a:rPr lang="en-US" sz="2400" dirty="0">
-                          <a:solidFill>
-                            <a:srgbClr val="1F2937"/>
-                          </a:solidFill>
-                          <a:latin typeface="맑은 고딕" pitchFamily="34" charset="0"/>
-                          <a:ea typeface="맑은 고딕" pitchFamily="34" charset="-122"/>
-                          <a:cs typeface="맑은 고딕" pitchFamily="34" charset="-120"/>
-                        </a:rPr>
-                        <a:t>6</a:t>
-                      </a:r>
-                      <a:endParaRPr lang="en-US" sz="2400" dirty="0">
-                        <a:latin typeface="맑은 고딕" charset="0"/>
-                        <a:ea typeface="맑은 고딕" charset="0"/>
-                        <a:cs typeface="맑은 고딕" charset="0"/>
-                      </a:endParaRPr>
-                    </a:p>
-                  </a:txBody>
-                  <a:tcPr marL="38100" marR="38100" marT="38100" marB="38100" anchor="ctr">
-                    <a:lnL w="12700" cap="flat" cmpd="sng" algn="ctr">
-                      <a:solidFill>
-                        <a:srgbClr val="94A3B8"/>
-                      </a:solidFill>
-                      <a:prstDash val="solid"/>
-                      <a:round/>
-                      <a:headEnd type="none" w="med" len="med"/>
-                      <a:tailEnd type="none" w="med" len="med"/>
-                    </a:lnL>
-                    <a:lnR w="12700" cap="flat" cmpd="sng" algn="ctr">
-                      <a:solidFill>
-                        <a:srgbClr val="94A3B8"/>
-                      </a:solidFill>
-                      <a:prstDash val="solid"/>
-                      <a:round/>
-                      <a:headEnd type="none" w="med" len="med"/>
-                      <a:tailEnd type="none" w="med" len="med"/>
-                    </a:lnR>
-                    <a:lnT w="12700" cap="flat" cmpd="sng" algn="ctr">
-                      <a:solidFill>
-                        <a:srgbClr val="94A3B8"/>
-                      </a:solidFill>
-                      <a:prstDash val="solid"/>
-                      <a:round/>
-                      <a:headEnd type="none" w="med" len="med"/>
-                      <a:tailEnd type="none" w="med" len="med"/>
-                    </a:lnT>
-                    <a:lnB w="12700" cap="flat" cmpd="sng" algn="ctr">
-                      <a:solidFill>
-                        <a:srgbClr val="94A3B8"/>
-                      </a:solidFill>
-                      <a:prstDash val="solid"/>
-                      <a:round/>
-                      <a:headEnd type="none" w="med" len="med"/>
-                      <a:tailEnd type="none" w="med" len="med"/>
-                    </a:lnB>
-                    <a:solidFill>
-                      <a:srgbClr val="FFFFFF"/>
-                    </a:solidFill>
-                  </a:tcPr>
-                </a:tc>
-                <a:tc>
-                  <a:txBody>
-                    <a:bodyPr/>
-                    <a:lstStyle/>
-                    <a:p>
-                      <a:pPr eaLnBrk="0" algn="ctr" indent="0" marL="0">
-                        <a:buNone/>
-                      </a:pPr>
-                      <a:r>
-                        <a:rPr lang="en-US" sz="2400" dirty="0">
-                          <a:solidFill>
-                            <a:srgbClr val="1F2937"/>
-                          </a:solidFill>
-                          <a:latin typeface="맑은 고딕" pitchFamily="34" charset="0"/>
-                          <a:ea typeface="맑은 고딕" pitchFamily="34" charset="-122"/>
-                          <a:cs typeface="맑은 고딕" pitchFamily="34" charset="-120"/>
-                        </a:rPr>
-                        <a:t>7</a:t>
-                      </a:r>
-                      <a:endParaRPr lang="en-US" sz="2400" dirty="0">
-                        <a:latin typeface="맑은 고딕" charset="0"/>
-                        <a:ea typeface="맑은 고딕" charset="0"/>
-                        <a:cs typeface="맑은 고딕" charset="0"/>
-                      </a:endParaRPr>
-                    </a:p>
-                  </a:txBody>
-                  <a:tcPr marL="38100" marR="38100" marT="38100" marB="38100" anchor="ctr">
-                    <a:lnL w="12700" cap="flat" cmpd="sng" algn="ctr">
-                      <a:solidFill>
-                        <a:srgbClr val="94A3B8"/>
-                      </a:solidFill>
-                      <a:prstDash val="solid"/>
-                      <a:round/>
-                      <a:headEnd type="none" w="med" len="med"/>
-                      <a:tailEnd type="none" w="med" len="med"/>
-                    </a:lnL>
-                    <a:lnR w="12700" cap="flat" cmpd="sng" algn="ctr">
-                      <a:solidFill>
-                        <a:srgbClr val="94A3B8"/>
-                      </a:solidFill>
-                      <a:prstDash val="solid"/>
-                      <a:round/>
-                      <a:headEnd type="none" w="med" len="med"/>
-                      <a:tailEnd type="none" w="med" len="med"/>
-                    </a:lnR>
-                    <a:lnT w="12700" cap="flat" cmpd="sng" algn="ctr">
-                      <a:solidFill>
-                        <a:srgbClr val="94A3B8"/>
-                      </a:solidFill>
-                      <a:prstDash val="solid"/>
-                      <a:round/>
-                      <a:headEnd type="none" w="med" len="med"/>
-                      <a:tailEnd type="none" w="med" len="med"/>
-                    </a:lnT>
-                    <a:lnB w="12700" cap="flat" cmpd="sng" algn="ctr">
-                      <a:solidFill>
-                        <a:srgbClr val="94A3B8"/>
-                      </a:solidFill>
-                      <a:prstDash val="solid"/>
-                      <a:round/>
-                      <a:headEnd type="none" w="med" len="med"/>
-                      <a:tailEnd type="none" w="med" len="med"/>
-                    </a:lnB>
-                    <a:solidFill>
-                      <a:srgbClr val="FFFFFF"/>
-                    </a:solidFill>
-                  </a:tcPr>
-                </a:tc>
-              </a:tr>
-              <a:tr h="487680">
-                <a:tc>
-                  <a:txBody>
-                    <a:bodyPr/>
-                    <a:lstStyle/>
-                    <a:p>
-                      <a:pPr eaLnBrk="0" algn="ctr" indent="0" marL="0">
-                        <a:buNone/>
-                      </a:pPr>
-                      <a:r>
-                        <a:rPr lang="en-US" sz="2400" b="1" dirty="0">
-                          <a:solidFill>
-                            <a:srgbClr val="1F2937"/>
-                          </a:solidFill>
-                          <a:latin typeface="맑은 고딕" pitchFamily="34" charset="0"/>
-                          <a:ea typeface="맑은 고딕" pitchFamily="34" charset="-122"/>
-                          <a:cs typeface="맑은 고딕" pitchFamily="34" charset="-120"/>
-                        </a:rPr>
-                        <a:t>3</a:t>
-                      </a:r>
-                      <a:endParaRPr lang="en-US" sz="2400" dirty="0">
-                        <a:latin typeface="맑은 고딕" charset="0"/>
-                        <a:ea typeface="맑은 고딕" charset="0"/>
-                        <a:cs typeface="맑은 고딕" charset="0"/>
-                      </a:endParaRPr>
-                    </a:p>
-                  </a:txBody>
-                  <a:tcPr marL="38100" marR="38100" marT="38100" marB="38100" anchor="ctr">
-                    <a:lnL w="12700" cap="flat" cmpd="sng" algn="ctr">
-                      <a:solidFill>
-                        <a:srgbClr val="94A3B8"/>
-                      </a:solidFill>
-                      <a:prstDash val="solid"/>
-                      <a:round/>
-                      <a:headEnd type="none" w="med" len="med"/>
-                      <a:tailEnd type="none" w="med" len="med"/>
-                    </a:lnL>
-                    <a:lnR w="12700" cap="flat" cmpd="sng" algn="ctr">
-                      <a:solidFill>
-                        <a:srgbClr val="94A3B8"/>
-                      </a:solidFill>
-                      <a:prstDash val="solid"/>
-                      <a:round/>
-                      <a:headEnd type="none" w="med" len="med"/>
-                      <a:tailEnd type="none" w="med" len="med"/>
-                    </a:lnR>
-                    <a:lnT w="12700" cap="flat" cmpd="sng" algn="ctr">
-                      <a:solidFill>
-                        <a:srgbClr val="94A3B8"/>
-                      </a:solidFill>
-                      <a:prstDash val="solid"/>
-                      <a:round/>
-                      <a:headEnd type="none" w="med" len="med"/>
-                      <a:tailEnd type="none" w="med" len="med"/>
-                    </a:lnT>
-                    <a:lnB w="12700" cap="flat" cmpd="sng" algn="ctr">
-                      <a:solidFill>
-                        <a:srgbClr val="94A3B8"/>
-                      </a:solidFill>
-                      <a:prstDash val="solid"/>
-                      <a:round/>
-                      <a:headEnd type="none" w="med" len="med"/>
-                      <a:tailEnd type="none" w="med" len="med"/>
-                    </a:lnB>
-                    <a:solidFill>
-                      <a:srgbClr val="EAF3F1"/>
-                    </a:solidFill>
-                  </a:tcPr>
-                </a:tc>
-                <a:tc>
-                  <a:txBody>
-                    <a:bodyPr/>
-                    <a:lstStyle/>
-                    <a:p>
-                      <a:pPr eaLnBrk="0" algn="ctr" indent="0" marL="0">
-                        <a:buNone/>
-                      </a:pPr>
-                      <a:r>
-                        <a:rPr lang="en-US" sz="2400" dirty="0">
-                          <a:solidFill>
-                            <a:srgbClr val="1F2937"/>
-                          </a:solidFill>
-                          <a:latin typeface="맑은 고딕" pitchFamily="34" charset="0"/>
-                          <a:ea typeface="맑은 고딕" pitchFamily="34" charset="-122"/>
-                          <a:cs typeface="맑은 고딕" pitchFamily="34" charset="-120"/>
-                        </a:rPr>
-                        <a:t>4</a:t>
-                      </a:r>
-                      <a:endParaRPr lang="en-US" sz="2400" dirty="0">
-                        <a:latin typeface="맑은 고딕" charset="0"/>
-                        <a:ea typeface="맑은 고딕" charset="0"/>
-                        <a:cs typeface="맑은 고딕" charset="0"/>
-                      </a:endParaRPr>
-                    </a:p>
-                  </a:txBody>
-                  <a:tcPr marL="38100" marR="38100" marT="38100" marB="38100" anchor="ctr">
-                    <a:lnL w="12700" cap="flat" cmpd="sng" algn="ctr">
-                      <a:solidFill>
-                        <a:srgbClr val="94A3B8"/>
-                      </a:solidFill>
-                      <a:prstDash val="solid"/>
-                      <a:round/>
-                      <a:headEnd type="none" w="med" len="med"/>
-                      <a:tailEnd type="none" w="med" len="med"/>
-                    </a:lnL>
-                    <a:lnR w="12700" cap="flat" cmpd="sng" algn="ctr">
-                      <a:solidFill>
-                        <a:srgbClr val="94A3B8"/>
-                      </a:solidFill>
-                      <a:prstDash val="solid"/>
-                      <a:round/>
-                      <a:headEnd type="none" w="med" len="med"/>
-                      <a:tailEnd type="none" w="med" len="med"/>
-                    </a:lnR>
-                    <a:lnT w="12700" cap="flat" cmpd="sng" algn="ctr">
-                      <a:solidFill>
-                        <a:srgbClr val="94A3B8"/>
-                      </a:solidFill>
-                      <a:prstDash val="solid"/>
-                      <a:round/>
-                      <a:headEnd type="none" w="med" len="med"/>
-                      <a:tailEnd type="none" w="med" len="med"/>
-                    </a:lnT>
-                    <a:lnB w="12700" cap="flat" cmpd="sng" algn="ctr">
-                      <a:solidFill>
-                        <a:srgbClr val="94A3B8"/>
-                      </a:solidFill>
-                      <a:prstDash val="solid"/>
-                      <a:round/>
-                      <a:headEnd type="none" w="med" len="med"/>
-                      <a:tailEnd type="none" w="med" len="med"/>
-                    </a:lnB>
-                    <a:solidFill>
-                      <a:srgbClr val="FFFFFF"/>
-                    </a:solidFill>
-                  </a:tcPr>
-                </a:tc>
-                <a:tc>
-                  <a:txBody>
-                    <a:bodyPr/>
-                    <a:lstStyle/>
-                    <a:p>
-                      <a:pPr eaLnBrk="0" algn="ctr" indent="0" marL="0">
-                        <a:buNone/>
-                      </a:pPr>
-                      <a:r>
-                        <a:rPr lang="en-US" sz="2400" dirty="0">
-                          <a:solidFill>
-                            <a:srgbClr val="1F2937"/>
-                          </a:solidFill>
-                          <a:latin typeface="맑은 고딕" pitchFamily="34" charset="0"/>
-                          <a:ea typeface="맑은 고딕" pitchFamily="34" charset="-122"/>
-                          <a:cs typeface="맑은 고딕" pitchFamily="34" charset="-120"/>
-                        </a:rPr>
-                        <a:t>5</a:t>
-                      </a:r>
-                      <a:endParaRPr lang="en-US" sz="2400" dirty="0">
-                        <a:latin typeface="맑은 고딕" charset="0"/>
-                        <a:ea typeface="맑은 고딕" charset="0"/>
-                        <a:cs typeface="맑은 고딕" charset="0"/>
-                      </a:endParaRPr>
-                    </a:p>
-                  </a:txBody>
-                  <a:tcPr marL="38100" marR="38100" marT="38100" marB="38100" anchor="ctr">
-                    <a:lnL w="12700" cap="flat" cmpd="sng" algn="ctr">
-                      <a:solidFill>
-                        <a:srgbClr val="94A3B8"/>
-                      </a:solidFill>
-                      <a:prstDash val="solid"/>
-                      <a:round/>
-                      <a:headEnd type="none" w="med" len="med"/>
-                      <a:tailEnd type="none" w="med" len="med"/>
-                    </a:lnL>
-                    <a:lnR w="12700" cap="flat" cmpd="sng" algn="ctr">
-                      <a:solidFill>
-                        <a:srgbClr val="94A3B8"/>
-                      </a:solidFill>
-                      <a:prstDash val="solid"/>
-                      <a:round/>
-                      <a:headEnd type="none" w="med" len="med"/>
-                      <a:tailEnd type="none" w="med" len="med"/>
-                    </a:lnR>
-                    <a:lnT w="12700" cap="flat" cmpd="sng" algn="ctr">
-                      <a:solidFill>
-                        <a:srgbClr val="94A3B8"/>
-                      </a:solidFill>
-                      <a:prstDash val="solid"/>
-                      <a:round/>
-                      <a:headEnd type="none" w="med" len="med"/>
-                      <a:tailEnd type="none" w="med" len="med"/>
-                    </a:lnT>
-                    <a:lnB w="12700" cap="flat" cmpd="sng" algn="ctr">
-                      <a:solidFill>
-                        <a:srgbClr val="94A3B8"/>
-                      </a:solidFill>
-                      <a:prstDash val="solid"/>
-                      <a:round/>
-                      <a:headEnd type="none" w="med" len="med"/>
-                      <a:tailEnd type="none" w="med" len="med"/>
-                    </a:lnB>
-                    <a:solidFill>
-                      <a:srgbClr val="FFFFFF"/>
-                    </a:solidFill>
-                  </a:tcPr>
-                </a:tc>
-                <a:tc>
-                  <a:txBody>
-                    <a:bodyPr/>
-                    <a:lstStyle/>
-                    <a:p>
-                      <a:pPr eaLnBrk="0" algn="ctr" indent="0" marL="0">
-                        <a:buNone/>
-                      </a:pPr>
-                      <a:r>
-                        <a:rPr lang="en-US" sz="2400" dirty="0">
-                          <a:solidFill>
-                            <a:srgbClr val="1F2937"/>
-                          </a:solidFill>
-                          <a:latin typeface="맑은 고딕" pitchFamily="34" charset="0"/>
-                          <a:ea typeface="맑은 고딕" pitchFamily="34" charset="-122"/>
-                          <a:cs typeface="맑은 고딕" pitchFamily="34" charset="-120"/>
-                        </a:rPr>
-                        <a:t>6</a:t>
-                      </a:r>
-                      <a:endParaRPr lang="en-US" sz="2400" dirty="0">
-                        <a:latin typeface="맑은 고딕" charset="0"/>
-                        <a:ea typeface="맑은 고딕" charset="0"/>
-                        <a:cs typeface="맑은 고딕" charset="0"/>
-                      </a:endParaRPr>
-                    </a:p>
-                  </a:txBody>
-                  <a:tcPr marL="38100" marR="38100" marT="38100" marB="38100" anchor="ctr">
-                    <a:lnL w="12700" cap="flat" cmpd="sng" algn="ctr">
-                      <a:solidFill>
-                        <a:srgbClr val="94A3B8"/>
-                      </a:solidFill>
-                      <a:prstDash val="solid"/>
-                      <a:round/>
-                      <a:headEnd type="none" w="med" len="med"/>
-                      <a:tailEnd type="none" w="med" len="med"/>
-                    </a:lnL>
-                    <a:lnR w="12700" cap="flat" cmpd="sng" algn="ctr">
-                      <a:solidFill>
-                        <a:srgbClr val="94A3B8"/>
-                      </a:solidFill>
-                      <a:prstDash val="solid"/>
-                      <a:round/>
-                      <a:headEnd type="none" w="med" len="med"/>
-                      <a:tailEnd type="none" w="med" len="med"/>
-                    </a:lnR>
-                    <a:lnT w="12700" cap="flat" cmpd="sng" algn="ctr">
-                      <a:solidFill>
-                        <a:srgbClr val="94A3B8"/>
-                      </a:solidFill>
-                      <a:prstDash val="solid"/>
-                      <a:round/>
-                      <a:headEnd type="none" w="med" len="med"/>
-                      <a:tailEnd type="none" w="med" len="med"/>
-                    </a:lnT>
-                    <a:lnB w="12700" cap="flat" cmpd="sng" algn="ctr">
-                      <a:solidFill>
-                        <a:srgbClr val="94A3B8"/>
-                      </a:solidFill>
-                      <a:prstDash val="solid"/>
-                      <a:round/>
-                      <a:headEnd type="none" w="med" len="med"/>
-                      <a:tailEnd type="none" w="med" len="med"/>
-                    </a:lnB>
-                    <a:solidFill>
-                      <a:srgbClr val="FFFFFF"/>
-                    </a:solidFill>
-                  </a:tcPr>
-                </a:tc>
-                <a:tc>
-                  <a:txBody>
-                    <a:bodyPr/>
-                    <a:lstStyle/>
-                    <a:p>
-                      <a:pPr eaLnBrk="0" algn="ctr" indent="0" marL="0">
-                        <a:buNone/>
-                      </a:pPr>
-                      <a:r>
-                        <a:rPr lang="en-US" sz="2400" dirty="0">
-                          <a:solidFill>
-                            <a:srgbClr val="1F2937"/>
-                          </a:solidFill>
-                          <a:latin typeface="맑은 고딕" pitchFamily="34" charset="0"/>
-                          <a:ea typeface="맑은 고딕" pitchFamily="34" charset="-122"/>
-                          <a:cs typeface="맑은 고딕" pitchFamily="34" charset="-120"/>
-                        </a:rPr>
-                        <a:t>7</a:t>
-                      </a:r>
-                      <a:endParaRPr lang="en-US" sz="2400" dirty="0">
-                        <a:latin typeface="맑은 고딕" charset="0"/>
-                        <a:ea typeface="맑은 고딕" charset="0"/>
-                        <a:cs typeface="맑은 고딕" charset="0"/>
-                      </a:endParaRPr>
-                    </a:p>
-                  </a:txBody>
-                  <a:tcPr marL="38100" marR="38100" marT="38100" marB="38100" anchor="ctr">
-                    <a:lnL w="12700" cap="flat" cmpd="sng" algn="ctr">
-                      <a:solidFill>
-                        <a:srgbClr val="94A3B8"/>
-                      </a:solidFill>
-                      <a:prstDash val="solid"/>
-                      <a:round/>
-                      <a:headEnd type="none" w="med" len="med"/>
-                      <a:tailEnd type="none" w="med" len="med"/>
-                    </a:lnL>
-                    <a:lnR w="12700" cap="flat" cmpd="sng" algn="ctr">
-                      <a:solidFill>
-                        <a:srgbClr val="94A3B8"/>
-                      </a:solidFill>
-                      <a:prstDash val="solid"/>
-                      <a:round/>
-                      <a:headEnd type="none" w="med" len="med"/>
-                      <a:tailEnd type="none" w="med" len="med"/>
-                    </a:lnR>
-                    <a:lnT w="12700" cap="flat" cmpd="sng" algn="ctr">
-                      <a:solidFill>
-                        <a:srgbClr val="94A3B8"/>
-                      </a:solidFill>
-                      <a:prstDash val="solid"/>
-                      <a:round/>
-                      <a:headEnd type="none" w="med" len="med"/>
-                      <a:tailEnd type="none" w="med" len="med"/>
-                    </a:lnT>
-                    <a:lnB w="12700" cap="flat" cmpd="sng" algn="ctr">
-                      <a:solidFill>
-                        <a:srgbClr val="94A3B8"/>
-                      </a:solidFill>
-                      <a:prstDash val="solid"/>
-                      <a:round/>
-                      <a:headEnd type="none" w="med" len="med"/>
-                      <a:tailEnd type="none" w="med" len="med"/>
-                    </a:lnB>
-                    <a:solidFill>
-                      <a:srgbClr val="FFFFFF"/>
-                    </a:solidFill>
-                  </a:tcPr>
-                </a:tc>
-                <a:tc>
-                  <a:txBody>
-                    <a:bodyPr/>
-                    <a:lstStyle/>
-                    <a:p>
-                      <a:pPr eaLnBrk="0" algn="ctr" indent="0" marL="0">
-                        <a:buNone/>
-                      </a:pPr>
-                      <a:r>
-                        <a:rPr lang="en-US" sz="2400" dirty="0">
-                          <a:solidFill>
-                            <a:srgbClr val="1F2937"/>
-                          </a:solidFill>
-                          <a:latin typeface="맑은 고딕" pitchFamily="34" charset="0"/>
-                          <a:ea typeface="맑은 고딕" pitchFamily="34" charset="-122"/>
-                          <a:cs typeface="맑은 고딕" pitchFamily="34" charset="-120"/>
-                        </a:rPr>
-                        <a:t>8</a:t>
-                      </a:r>
-                      <a:endParaRPr lang="en-US" sz="2400" dirty="0">
-                        <a:latin typeface="맑은 고딕" charset="0"/>
-                        <a:ea typeface="맑은 고딕" charset="0"/>
-                        <a:cs typeface="맑은 고딕" charset="0"/>
-                      </a:endParaRPr>
-                    </a:p>
-                  </a:txBody>
-                  <a:tcPr marL="38100" marR="38100" marT="38100" marB="38100" anchor="ctr">
-                    <a:lnL w="12700" cap="flat" cmpd="sng" algn="ctr">
-                      <a:solidFill>
-                        <a:srgbClr val="94A3B8"/>
-                      </a:solidFill>
-                      <a:prstDash val="solid"/>
-                      <a:round/>
-                      <a:headEnd type="none" w="med" len="med"/>
-                      <a:tailEnd type="none" w="med" len="med"/>
-                    </a:lnL>
-                    <a:lnR w="12700" cap="flat" cmpd="sng" algn="ctr">
-                      <a:solidFill>
-                        <a:srgbClr val="94A3B8"/>
-                      </a:solidFill>
-                      <a:prstDash val="solid"/>
-                      <a:round/>
-                      <a:headEnd type="none" w="med" len="med"/>
-                      <a:tailEnd type="none" w="med" len="med"/>
-                    </a:lnR>
-                    <a:lnT w="12700" cap="flat" cmpd="sng" algn="ctr">
-                      <a:solidFill>
-                        <a:srgbClr val="94A3B8"/>
-                      </a:solidFill>
-                      <a:prstDash val="solid"/>
-                      <a:round/>
-                      <a:headEnd type="none" w="med" len="med"/>
-                      <a:tailEnd type="none" w="med" len="med"/>
-                    </a:lnT>
-                    <a:lnB w="12700" cap="flat" cmpd="sng" algn="ctr">
-                      <a:solidFill>
-                        <a:srgbClr val="94A3B8"/>
-                      </a:solidFill>
-                      <a:prstDash val="solid"/>
-                      <a:round/>
-                      <a:headEnd type="none" w="med" len="med"/>
-                      <a:tailEnd type="none" w="med" len="med"/>
-                    </a:lnB>
-                    <a:solidFill>
-                      <a:srgbClr val="FFFFFF"/>
-                    </a:solidFill>
-                  </a:tcPr>
-                </a:tc>
-              </a:tr>
-              <a:tr h="487680">
-                <a:tc>
-                  <a:txBody>
-                    <a:bodyPr/>
-                    <a:lstStyle/>
-                    <a:p>
-                      <a:pPr eaLnBrk="0" algn="ctr" indent="0" marL="0">
-                        <a:buNone/>
-                      </a:pPr>
-                      <a:r>
-                        <a:rPr lang="en-US" sz="2400" b="1" dirty="0">
-                          <a:solidFill>
-                            <a:srgbClr val="1F2937"/>
-                          </a:solidFill>
-                          <a:latin typeface="맑은 고딕" pitchFamily="34" charset="0"/>
-                          <a:ea typeface="맑은 고딕" pitchFamily="34" charset="-122"/>
-                          <a:cs typeface="맑은 고딕" pitchFamily="34" charset="-120"/>
-                        </a:rPr>
-                        <a:t>4</a:t>
-                      </a:r>
-                      <a:endParaRPr lang="en-US" sz="2400" dirty="0">
-                        <a:latin typeface="맑은 고딕" charset="0"/>
-                        <a:ea typeface="맑은 고딕" charset="0"/>
-                        <a:cs typeface="맑은 고딕" charset="0"/>
-                      </a:endParaRPr>
-                    </a:p>
-                  </a:txBody>
-                  <a:tcPr marL="38100" marR="38100" marT="38100" marB="38100" anchor="ctr">
-                    <a:lnL w="12700" cap="flat" cmpd="sng" algn="ctr">
-                      <a:solidFill>
-                        <a:srgbClr val="94A3B8"/>
-                      </a:solidFill>
-                      <a:prstDash val="solid"/>
-                      <a:round/>
-                      <a:headEnd type="none" w="med" len="med"/>
-                      <a:tailEnd type="none" w="med" len="med"/>
-                    </a:lnL>
-                    <a:lnR w="12700" cap="flat" cmpd="sng" algn="ctr">
-                      <a:solidFill>
-                        <a:srgbClr val="94A3B8"/>
-                      </a:solidFill>
-                      <a:prstDash val="solid"/>
-                      <a:round/>
-                      <a:headEnd type="none" w="med" len="med"/>
-                      <a:tailEnd type="none" w="med" len="med"/>
-                    </a:lnR>
-                    <a:lnT w="12700" cap="flat" cmpd="sng" algn="ctr">
-                      <a:solidFill>
-                        <a:srgbClr val="94A3B8"/>
-                      </a:solidFill>
-                      <a:prstDash val="solid"/>
-                      <a:round/>
-                      <a:headEnd type="none" w="med" len="med"/>
-                      <a:tailEnd type="none" w="med" len="med"/>
-                    </a:lnT>
-                    <a:lnB w="12700" cap="flat" cmpd="sng" algn="ctr">
-                      <a:solidFill>
-                        <a:srgbClr val="94A3B8"/>
-                      </a:solidFill>
-                      <a:prstDash val="solid"/>
-                      <a:round/>
-                      <a:headEnd type="none" w="med" len="med"/>
-                      <a:tailEnd type="none" w="med" len="med"/>
-                    </a:lnB>
-                    <a:solidFill>
-                      <a:srgbClr val="EAF3F1"/>
-                    </a:solidFill>
-                  </a:tcPr>
-                </a:tc>
-                <a:tc>
-                  <a:txBody>
-                    <a:bodyPr/>
-                    <a:lstStyle/>
-                    <a:p>
-                      <a:pPr eaLnBrk="0" algn="ctr" indent="0" marL="0">
-                        <a:buNone/>
-                      </a:pPr>
-                      <a:r>
-                        <a:rPr lang="en-US" sz="2400" dirty="0">
-                          <a:solidFill>
-                            <a:srgbClr val="1F2937"/>
-                          </a:solidFill>
-                          <a:latin typeface="맑은 고딕" pitchFamily="34" charset="0"/>
-                          <a:ea typeface="맑은 고딕" pitchFamily="34" charset="-122"/>
-                          <a:cs typeface="맑은 고딕" pitchFamily="34" charset="-120"/>
-                        </a:rPr>
-                        <a:t>5</a:t>
-                      </a:r>
-                      <a:endParaRPr lang="en-US" sz="2400" dirty="0">
-                        <a:latin typeface="맑은 고딕" charset="0"/>
-                        <a:ea typeface="맑은 고딕" charset="0"/>
-                        <a:cs typeface="맑은 고딕" charset="0"/>
-                      </a:endParaRPr>
-                    </a:p>
-                  </a:txBody>
-                  <a:tcPr marL="38100" marR="38100" marT="38100" marB="38100" anchor="ctr">
-                    <a:lnL w="12700" cap="flat" cmpd="sng" algn="ctr">
-                      <a:solidFill>
-                        <a:srgbClr val="94A3B8"/>
-                      </a:solidFill>
-                      <a:prstDash val="solid"/>
-                      <a:round/>
-                      <a:headEnd type="none" w="med" len="med"/>
-                      <a:tailEnd type="none" w="med" len="med"/>
-                    </a:lnL>
-                    <a:lnR w="12700" cap="flat" cmpd="sng" algn="ctr">
-                      <a:solidFill>
-                        <a:srgbClr val="94A3B8"/>
-                      </a:solidFill>
-                      <a:prstDash val="solid"/>
-                      <a:round/>
-                      <a:headEnd type="none" w="med" len="med"/>
-                      <a:tailEnd type="none" w="med" len="med"/>
-                    </a:lnR>
-                    <a:lnT w="12700" cap="flat" cmpd="sng" algn="ctr">
-                      <a:solidFill>
-                        <a:srgbClr val="94A3B8"/>
-                      </a:solidFill>
-                      <a:prstDash val="solid"/>
-                      <a:round/>
-                      <a:headEnd type="none" w="med" len="med"/>
-                      <a:tailEnd type="none" w="med" len="med"/>
-                    </a:lnT>
-                    <a:lnB w="12700" cap="flat" cmpd="sng" algn="ctr">
-                      <a:solidFill>
-                        <a:srgbClr val="94A3B8"/>
-                      </a:solidFill>
-                      <a:prstDash val="solid"/>
-                      <a:round/>
-                      <a:headEnd type="none" w="med" len="med"/>
-                      <a:tailEnd type="none" w="med" len="med"/>
-                    </a:lnB>
-                    <a:solidFill>
-                      <a:srgbClr val="FFFFFF"/>
-                    </a:solidFill>
-                  </a:tcPr>
-                </a:tc>
-                <a:tc>
-                  <a:txBody>
-                    <a:bodyPr/>
-                    <a:lstStyle/>
-                    <a:p>
-                      <a:pPr eaLnBrk="0" algn="ctr" indent="0" marL="0">
-                        <a:buNone/>
-                      </a:pPr>
-                      <a:r>
-                        <a:rPr lang="en-US" sz="2400" dirty="0">
-                          <a:solidFill>
-                            <a:srgbClr val="1F2937"/>
-                          </a:solidFill>
-                          <a:latin typeface="맑은 고딕" pitchFamily="34" charset="0"/>
-                          <a:ea typeface="맑은 고딕" pitchFamily="34" charset="-122"/>
-                          <a:cs typeface="맑은 고딕" pitchFamily="34" charset="-120"/>
-                        </a:rPr>
-                        <a:t>6</a:t>
-                      </a:r>
-                      <a:endParaRPr lang="en-US" sz="2400" dirty="0">
-                        <a:latin typeface="맑은 고딕" charset="0"/>
-                        <a:ea typeface="맑은 고딕" charset="0"/>
-                        <a:cs typeface="맑은 고딕" charset="0"/>
-                      </a:endParaRPr>
-                    </a:p>
-                  </a:txBody>
-                  <a:tcPr marL="38100" marR="38100" marT="38100" marB="38100" anchor="ctr">
-                    <a:lnL w="12700" cap="flat" cmpd="sng" algn="ctr">
-                      <a:solidFill>
-                        <a:srgbClr val="94A3B8"/>
-                      </a:solidFill>
-                      <a:prstDash val="solid"/>
-                      <a:round/>
-                      <a:headEnd type="none" w="med" len="med"/>
-                      <a:tailEnd type="none" w="med" len="med"/>
-                    </a:lnL>
-                    <a:lnR w="12700" cap="flat" cmpd="sng" algn="ctr">
-                      <a:solidFill>
-                        <a:srgbClr val="94A3B8"/>
-                      </a:solidFill>
-                      <a:prstDash val="solid"/>
-                      <a:round/>
-                      <a:headEnd type="none" w="med" len="med"/>
-                      <a:tailEnd type="none" w="med" len="med"/>
-                    </a:lnR>
-                    <a:lnT w="12700" cap="flat" cmpd="sng" algn="ctr">
-                      <a:solidFill>
-                        <a:srgbClr val="94A3B8"/>
-                      </a:solidFill>
-                      <a:prstDash val="solid"/>
-                      <a:round/>
-                      <a:headEnd type="none" w="med" len="med"/>
-                      <a:tailEnd type="none" w="med" len="med"/>
-                    </a:lnT>
-                    <a:lnB w="12700" cap="flat" cmpd="sng" algn="ctr">
-                      <a:solidFill>
-                        <a:srgbClr val="94A3B8"/>
-                      </a:solidFill>
-                      <a:prstDash val="solid"/>
-                      <a:round/>
-                      <a:headEnd type="none" w="med" len="med"/>
-                      <a:tailEnd type="none" w="med" len="med"/>
-                    </a:lnB>
-                    <a:solidFill>
-                      <a:srgbClr val="FFFFFF"/>
-                    </a:solidFill>
-                  </a:tcPr>
-                </a:tc>
-                <a:tc>
-                  <a:txBody>
-                    <a:bodyPr/>
-                    <a:lstStyle/>
-                    <a:p>
-                      <a:pPr eaLnBrk="0" algn="ctr" indent="0" marL="0">
-                        <a:buNone/>
-                      </a:pPr>
-                      <a:r>
-                        <a:rPr lang="en-US" sz="2400" dirty="0">
-                          <a:solidFill>
-                            <a:srgbClr val="1F2937"/>
-                          </a:solidFill>
-                          <a:latin typeface="맑은 고딕" pitchFamily="34" charset="0"/>
-                          <a:ea typeface="맑은 고딕" pitchFamily="34" charset="-122"/>
-                          <a:cs typeface="맑은 고딕" pitchFamily="34" charset="-120"/>
-                        </a:rPr>
-                        <a:t>7</a:t>
-                      </a:r>
-                      <a:endParaRPr lang="en-US" sz="2400" dirty="0">
-                        <a:latin typeface="맑은 고딕" charset="0"/>
-                        <a:ea typeface="맑은 고딕" charset="0"/>
-                        <a:cs typeface="맑은 고딕" charset="0"/>
-                      </a:endParaRPr>
-                    </a:p>
-                  </a:txBody>
-                  <a:tcPr marL="38100" marR="38100" marT="38100" marB="38100" anchor="ctr">
-                    <a:lnL w="12700" cap="flat" cmpd="sng" algn="ctr">
-                      <a:solidFill>
-                        <a:srgbClr val="94A3B8"/>
-                      </a:solidFill>
-                      <a:prstDash val="solid"/>
-                      <a:round/>
-                      <a:headEnd type="none" w="med" len="med"/>
-                      <a:tailEnd type="none" w="med" len="med"/>
-                    </a:lnL>
-                    <a:lnR w="12700" cap="flat" cmpd="sng" algn="ctr">
-                      <a:solidFill>
-                        <a:srgbClr val="94A3B8"/>
-                      </a:solidFill>
-                      <a:prstDash val="solid"/>
-                      <a:round/>
-                      <a:headEnd type="none" w="med" len="med"/>
-                      <a:tailEnd type="none" w="med" len="med"/>
-                    </a:lnR>
-                    <a:lnT w="12700" cap="flat" cmpd="sng" algn="ctr">
-                      <a:solidFill>
-                        <a:srgbClr val="94A3B8"/>
-                      </a:solidFill>
-                      <a:prstDash val="solid"/>
-                      <a:round/>
-                      <a:headEnd type="none" w="med" len="med"/>
-                      <a:tailEnd type="none" w="med" len="med"/>
-                    </a:lnT>
-                    <a:lnB w="12700" cap="flat" cmpd="sng" algn="ctr">
-                      <a:solidFill>
-                        <a:srgbClr val="94A3B8"/>
-                      </a:solidFill>
-                      <a:prstDash val="solid"/>
-                      <a:round/>
-                      <a:headEnd type="none" w="med" len="med"/>
-                      <a:tailEnd type="none" w="med" len="med"/>
-                    </a:lnB>
-                    <a:solidFill>
-                      <a:srgbClr val="FFFFFF"/>
-                    </a:solidFill>
-                  </a:tcPr>
-                </a:tc>
-                <a:tc>
-                  <a:txBody>
-                    <a:bodyPr/>
-                    <a:lstStyle/>
-                    <a:p>
-                      <a:pPr eaLnBrk="0" algn="ctr" indent="0" marL="0">
-                        <a:buNone/>
-                      </a:pPr>
-                      <a:r>
-                        <a:rPr lang="en-US" sz="2400" dirty="0">
-                          <a:solidFill>
-                            <a:srgbClr val="1F2937"/>
-                          </a:solidFill>
-                          <a:latin typeface="맑은 고딕" pitchFamily="34" charset="0"/>
-                          <a:ea typeface="맑은 고딕" pitchFamily="34" charset="-122"/>
-                          <a:cs typeface="맑은 고딕" pitchFamily="34" charset="-120"/>
-                        </a:rPr>
-                        <a:t>8</a:t>
-                      </a:r>
-                      <a:endParaRPr lang="en-US" sz="2400" dirty="0">
-                        <a:latin typeface="맑은 고딕" charset="0"/>
-                        <a:ea typeface="맑은 고딕" charset="0"/>
-                        <a:cs typeface="맑은 고딕" charset="0"/>
-                      </a:endParaRPr>
-                    </a:p>
-                  </a:txBody>
-                  <a:tcPr marL="38100" marR="38100" marT="38100" marB="38100" anchor="ctr">
-                    <a:lnL w="12700" cap="flat" cmpd="sng" algn="ctr">
-                      <a:solidFill>
-                        <a:srgbClr val="94A3B8"/>
-                      </a:solidFill>
-                      <a:prstDash val="solid"/>
-                      <a:round/>
-                      <a:headEnd type="none" w="med" len="med"/>
-                      <a:tailEnd type="none" w="med" len="med"/>
-                    </a:lnL>
-                    <a:lnR w="12700" cap="flat" cmpd="sng" algn="ctr">
-                      <a:solidFill>
-                        <a:srgbClr val="94A3B8"/>
-                      </a:solidFill>
-                      <a:prstDash val="solid"/>
-                      <a:round/>
-                      <a:headEnd type="none" w="med" len="med"/>
-                      <a:tailEnd type="none" w="med" len="med"/>
-                    </a:lnR>
-                    <a:lnT w="12700" cap="flat" cmpd="sng" algn="ctr">
-                      <a:solidFill>
-                        <a:srgbClr val="94A3B8"/>
-                      </a:solidFill>
-                      <a:prstDash val="solid"/>
-                      <a:round/>
-                      <a:headEnd type="none" w="med" len="med"/>
-                      <a:tailEnd type="none" w="med" len="med"/>
-                    </a:lnT>
-                    <a:lnB w="12700" cap="flat" cmpd="sng" algn="ctr">
-                      <a:solidFill>
-                        <a:srgbClr val="94A3B8"/>
-                      </a:solidFill>
-                      <a:prstDash val="solid"/>
-                      <a:round/>
-                      <a:headEnd type="none" w="med" len="med"/>
-                      <a:tailEnd type="none" w="med" len="med"/>
-                    </a:lnB>
-                    <a:solidFill>
-                      <a:srgbClr val="FFFFFF"/>
-                    </a:solidFill>
-                  </a:tcPr>
-                </a:tc>
-                <a:tc>
-                  <a:txBody>
-                    <a:bodyPr/>
-                    <a:lstStyle/>
-                    <a:p>
-                      <a:pPr eaLnBrk="0" algn="ctr" indent="0" marL="0">
-                        <a:buNone/>
-                      </a:pPr>
-                      <a:r>
-                        <a:rPr lang="en-US" sz="2400" dirty="0">
-                          <a:solidFill>
-                            <a:srgbClr val="1F2937"/>
-                          </a:solidFill>
-                          <a:latin typeface="맑은 고딕" pitchFamily="34" charset="0"/>
-                          <a:ea typeface="맑은 고딕" pitchFamily="34" charset="-122"/>
-                          <a:cs typeface="맑은 고딕" pitchFamily="34" charset="-120"/>
-                        </a:rPr>
-                        <a:t>9</a:t>
-                      </a:r>
-                      <a:endParaRPr lang="en-US" sz="2400" dirty="0">
-                        <a:latin typeface="맑은 고딕" charset="0"/>
-                        <a:ea typeface="맑은 고딕" charset="0"/>
-                        <a:cs typeface="맑은 고딕" charset="0"/>
-                      </a:endParaRPr>
-                    </a:p>
-                  </a:txBody>
-                  <a:tcPr marL="38100" marR="38100" marT="38100" marB="38100" anchor="ctr">
-                    <a:lnL w="12700" cap="flat" cmpd="sng" algn="ctr">
-                      <a:solidFill>
-                        <a:srgbClr val="94A3B8"/>
-                      </a:solidFill>
-                      <a:prstDash val="solid"/>
-                      <a:round/>
-                      <a:headEnd type="none" w="med" len="med"/>
-                      <a:tailEnd type="none" w="med" len="med"/>
-                    </a:lnL>
-                    <a:lnR w="12700" cap="flat" cmpd="sng" algn="ctr">
-                      <a:solidFill>
-                        <a:srgbClr val="94A3B8"/>
-                      </a:solidFill>
-                      <a:prstDash val="solid"/>
-                      <a:round/>
-                      <a:headEnd type="none" w="med" len="med"/>
-                      <a:tailEnd type="none" w="med" len="med"/>
-                    </a:lnR>
-                    <a:lnT w="12700" cap="flat" cmpd="sng" algn="ctr">
-                      <a:solidFill>
-                        <a:srgbClr val="94A3B8"/>
-                      </a:solidFill>
-                      <a:prstDash val="solid"/>
-                      <a:round/>
-                      <a:headEnd type="none" w="med" len="med"/>
-                      <a:tailEnd type="none" w="med" len="med"/>
-                    </a:lnT>
-                    <a:lnB w="12700" cap="flat" cmpd="sng" algn="ctr">
-                      <a:solidFill>
-                        <a:srgbClr val="94A3B8"/>
-                      </a:solidFill>
-                      <a:prstDash val="solid"/>
-                      <a:round/>
-                      <a:headEnd type="none" w="med" len="med"/>
-                      <a:tailEnd type="none" w="med" len="med"/>
-                    </a:lnB>
-                    <a:solidFill>
-                      <a:srgbClr val="FFFFFF"/>
-                    </a:solidFill>
-                  </a:tcPr>
-                </a:tc>
-              </a:tr>
-              <a:tr h="487680">
-                <a:tc>
-                  <a:txBody>
-                    <a:bodyPr/>
-                    <a:lstStyle/>
-                    <a:p>
-                      <a:pPr eaLnBrk="0" algn="ctr" indent="0" marL="0">
-                        <a:buNone/>
-                      </a:pPr>
-                      <a:r>
-                        <a:rPr lang="en-US" sz="2400" b="1" dirty="0">
-                          <a:solidFill>
-                            <a:srgbClr val="1F2937"/>
-                          </a:solidFill>
-                          <a:latin typeface="맑은 고딕" pitchFamily="34" charset="0"/>
-                          <a:ea typeface="맑은 고딕" pitchFamily="34" charset="-122"/>
-                          <a:cs typeface="맑은 고딕" pitchFamily="34" charset="-120"/>
-                        </a:rPr>
-                        <a:t>5</a:t>
-                      </a:r>
-                      <a:endParaRPr lang="en-US" sz="2400" dirty="0">
-                        <a:latin typeface="맑은 고딕" charset="0"/>
-                        <a:ea typeface="맑은 고딕" charset="0"/>
-                        <a:cs typeface="맑은 고딕" charset="0"/>
-                      </a:endParaRPr>
-                    </a:p>
-                  </a:txBody>
-                  <a:tcPr marL="38100" marR="38100" marT="38100" marB="38100" anchor="ctr">
-                    <a:lnL w="12700" cap="flat" cmpd="sng" algn="ctr">
-                      <a:solidFill>
-                        <a:srgbClr val="94A3B8"/>
-                      </a:solidFill>
-                      <a:prstDash val="solid"/>
-                      <a:round/>
-                      <a:headEnd type="none" w="med" len="med"/>
-                      <a:tailEnd type="none" w="med" len="med"/>
-                    </a:lnL>
-                    <a:lnR w="12700" cap="flat" cmpd="sng" algn="ctr">
-                      <a:solidFill>
-                        <a:srgbClr val="94A3B8"/>
-                      </a:solidFill>
-                      <a:prstDash val="solid"/>
-                      <a:round/>
-                      <a:headEnd type="none" w="med" len="med"/>
-                      <a:tailEnd type="none" w="med" len="med"/>
-                    </a:lnR>
-                    <a:lnT w="12700" cap="flat" cmpd="sng" algn="ctr">
-                      <a:solidFill>
-                        <a:srgbClr val="94A3B8"/>
-                      </a:solidFill>
-                      <a:prstDash val="solid"/>
-                      <a:round/>
-                      <a:headEnd type="none" w="med" len="med"/>
-                      <a:tailEnd type="none" w="med" len="med"/>
-                    </a:lnT>
-                    <a:lnB w="12700" cap="flat" cmpd="sng" algn="ctr">
-                      <a:solidFill>
-                        <a:srgbClr val="94A3B8"/>
-                      </a:solidFill>
-                      <a:prstDash val="solid"/>
-                      <a:round/>
-                      <a:headEnd type="none" w="med" len="med"/>
-                      <a:tailEnd type="none" w="med" len="med"/>
-                    </a:lnB>
-                    <a:solidFill>
-                      <a:srgbClr val="EAF3F1"/>
-                    </a:solidFill>
-                  </a:tcPr>
-                </a:tc>
-                <a:tc>
-                  <a:txBody>
-                    <a:bodyPr/>
-                    <a:lstStyle/>
-                    <a:p>
-                      <a:pPr eaLnBrk="0" algn="ctr" indent="0" marL="0">
-                        <a:buNone/>
-                      </a:pPr>
-                      <a:r>
-                        <a:rPr lang="en-US" sz="2400" dirty="0">
-                          <a:solidFill>
-                            <a:srgbClr val="1F2937"/>
-                          </a:solidFill>
-                          <a:latin typeface="맑은 고딕" pitchFamily="34" charset="0"/>
-                          <a:ea typeface="맑은 고딕" pitchFamily="34" charset="-122"/>
-                          <a:cs typeface="맑은 고딕" pitchFamily="34" charset="-120"/>
-                        </a:rPr>
-                        <a:t>6</a:t>
-                      </a:r>
-                      <a:endParaRPr lang="en-US" sz="2400" dirty="0">
-                        <a:latin typeface="맑은 고딕" charset="0"/>
-                        <a:ea typeface="맑은 고딕" charset="0"/>
-                        <a:cs typeface="맑은 고딕" charset="0"/>
-                      </a:endParaRPr>
-                    </a:p>
-                  </a:txBody>
-                  <a:tcPr marL="38100" marR="38100" marT="38100" marB="38100" anchor="ctr">
-                    <a:lnL w="12700" cap="flat" cmpd="sng" algn="ctr">
-                      <a:solidFill>
-                        <a:srgbClr val="94A3B8"/>
-                      </a:solidFill>
-                      <a:prstDash val="solid"/>
-                      <a:round/>
-                      <a:headEnd type="none" w="med" len="med"/>
-                      <a:tailEnd type="none" w="med" len="med"/>
-                    </a:lnL>
-                    <a:lnR w="12700" cap="flat" cmpd="sng" algn="ctr">
-                      <a:solidFill>
-                        <a:srgbClr val="94A3B8"/>
-                      </a:solidFill>
-                      <a:prstDash val="solid"/>
-                      <a:round/>
-                      <a:headEnd type="none" w="med" len="med"/>
-                      <a:tailEnd type="none" w="med" len="med"/>
-                    </a:lnR>
-                    <a:lnT w="12700" cap="flat" cmpd="sng" algn="ctr">
-                      <a:solidFill>
-                        <a:srgbClr val="94A3B8"/>
-                      </a:solidFill>
-                      <a:prstDash val="solid"/>
-                      <a:round/>
-                      <a:headEnd type="none" w="med" len="med"/>
-                      <a:tailEnd type="none" w="med" len="med"/>
-                    </a:lnT>
-                    <a:lnB w="12700" cap="flat" cmpd="sng" algn="ctr">
-                      <a:solidFill>
-                        <a:srgbClr val="94A3B8"/>
-                      </a:solidFill>
-                      <a:prstDash val="solid"/>
-                      <a:round/>
-                      <a:headEnd type="none" w="med" len="med"/>
-                      <a:tailEnd type="none" w="med" len="med"/>
-                    </a:lnB>
-                    <a:solidFill>
-                      <a:srgbClr val="FFFFFF"/>
-                    </a:solidFill>
-                  </a:tcPr>
-                </a:tc>
-                <a:tc>
-                  <a:txBody>
-                    <a:bodyPr/>
-                    <a:lstStyle/>
-                    <a:p>
-                      <a:pPr eaLnBrk="0" algn="ctr" indent="0" marL="0">
-                        <a:buNone/>
-                      </a:pPr>
-                      <a:r>
-                        <a:rPr lang="en-US" sz="2400" dirty="0">
-                          <a:solidFill>
-                            <a:srgbClr val="1F2937"/>
-                          </a:solidFill>
-                          <a:latin typeface="맑은 고딕" pitchFamily="34" charset="0"/>
-                          <a:ea typeface="맑은 고딕" pitchFamily="34" charset="-122"/>
-                          <a:cs typeface="맑은 고딕" pitchFamily="34" charset="-120"/>
-                        </a:rPr>
-                        <a:t>7</a:t>
-                      </a:r>
-                      <a:endParaRPr lang="en-US" sz="2400" dirty="0">
-                        <a:latin typeface="맑은 고딕" charset="0"/>
-                        <a:ea typeface="맑은 고딕" charset="0"/>
-                        <a:cs typeface="맑은 고딕" charset="0"/>
-                      </a:endParaRPr>
-                    </a:p>
-                  </a:txBody>
-                  <a:tcPr marL="38100" marR="38100" marT="38100" marB="38100" anchor="ctr">
-                    <a:lnL w="12700" cap="flat" cmpd="sng" algn="ctr">
-                      <a:solidFill>
-                        <a:srgbClr val="94A3B8"/>
-                      </a:solidFill>
-                      <a:prstDash val="solid"/>
-                      <a:round/>
-                      <a:headEnd type="none" w="med" len="med"/>
-                      <a:tailEnd type="none" w="med" len="med"/>
-                    </a:lnL>
-                    <a:lnR w="12700" cap="flat" cmpd="sng" algn="ctr">
-                      <a:solidFill>
-                        <a:srgbClr val="94A3B8"/>
-                      </a:solidFill>
-                      <a:prstDash val="solid"/>
-                      <a:round/>
-                      <a:headEnd type="none" w="med" len="med"/>
-                      <a:tailEnd type="none" w="med" len="med"/>
-                    </a:lnR>
-                    <a:lnT w="12700" cap="flat" cmpd="sng" algn="ctr">
-                      <a:solidFill>
-                        <a:srgbClr val="94A3B8"/>
-                      </a:solidFill>
-                      <a:prstDash val="solid"/>
-                      <a:round/>
-                      <a:headEnd type="none" w="med" len="med"/>
-                      <a:tailEnd type="none" w="med" len="med"/>
-                    </a:lnT>
-                    <a:lnB w="12700" cap="flat" cmpd="sng" algn="ctr">
-                      <a:solidFill>
-                        <a:srgbClr val="94A3B8"/>
-                      </a:solidFill>
-                      <a:prstDash val="solid"/>
-                      <a:round/>
-                      <a:headEnd type="none" w="med" len="med"/>
-                      <a:tailEnd type="none" w="med" len="med"/>
-                    </a:lnB>
-                    <a:solidFill>
-                      <a:srgbClr val="FFFFFF"/>
-                    </a:solidFill>
-                  </a:tcPr>
-                </a:tc>
-                <a:tc>
-                  <a:txBody>
-                    <a:bodyPr/>
-                    <a:lstStyle/>
-                    <a:p>
-                      <a:pPr eaLnBrk="0" algn="ctr" indent="0" marL="0">
-                        <a:buNone/>
-                      </a:pPr>
-                      <a:r>
-                        <a:rPr lang="en-US" sz="2400" dirty="0">
-                          <a:solidFill>
-                            <a:srgbClr val="1F2937"/>
-                          </a:solidFill>
-                          <a:latin typeface="맑은 고딕" pitchFamily="34" charset="0"/>
-                          <a:ea typeface="맑은 고딕" pitchFamily="34" charset="-122"/>
-                          <a:cs typeface="맑은 고딕" pitchFamily="34" charset="-120"/>
-                        </a:rPr>
-                        <a:t>8</a:t>
-                      </a:r>
-                      <a:endParaRPr lang="en-US" sz="2400" dirty="0">
-                        <a:latin typeface="맑은 고딕" charset="0"/>
-                        <a:ea typeface="맑은 고딕" charset="0"/>
-                        <a:cs typeface="맑은 고딕" charset="0"/>
-                      </a:endParaRPr>
-                    </a:p>
-                  </a:txBody>
-                  <a:tcPr marL="38100" marR="38100" marT="38100" marB="38100" anchor="ctr">
-                    <a:lnL w="12700" cap="flat" cmpd="sng" algn="ctr">
-                      <a:solidFill>
-                        <a:srgbClr val="94A3B8"/>
-                      </a:solidFill>
-                      <a:prstDash val="solid"/>
-                      <a:round/>
-                      <a:headEnd type="none" w="med" len="med"/>
-                      <a:tailEnd type="none" w="med" len="med"/>
-                    </a:lnL>
-                    <a:lnR w="12700" cap="flat" cmpd="sng" algn="ctr">
-                      <a:solidFill>
-                        <a:srgbClr val="94A3B8"/>
-                      </a:solidFill>
-                      <a:prstDash val="solid"/>
-                      <a:round/>
-                      <a:headEnd type="none" w="med" len="med"/>
-                      <a:tailEnd type="none" w="med" len="med"/>
-                    </a:lnR>
-                    <a:lnT w="12700" cap="flat" cmpd="sng" algn="ctr">
-                      <a:solidFill>
-                        <a:srgbClr val="94A3B8"/>
-                      </a:solidFill>
-                      <a:prstDash val="solid"/>
-                      <a:round/>
-                      <a:headEnd type="none" w="med" len="med"/>
-                      <a:tailEnd type="none" w="med" len="med"/>
-                    </a:lnT>
-                    <a:lnB w="12700" cap="flat" cmpd="sng" algn="ctr">
-                      <a:solidFill>
-                        <a:srgbClr val="94A3B8"/>
-                      </a:solidFill>
-                      <a:prstDash val="solid"/>
-                      <a:round/>
-                      <a:headEnd type="none" w="med" len="med"/>
-                      <a:tailEnd type="none" w="med" len="med"/>
-                    </a:lnB>
-                    <a:solidFill>
-                      <a:srgbClr val="FFFFFF"/>
-                    </a:solidFill>
-                  </a:tcPr>
-                </a:tc>
-                <a:tc>
-                  <a:txBody>
-                    <a:bodyPr/>
-                    <a:lstStyle/>
-                    <a:p>
-                      <a:pPr eaLnBrk="0" algn="ctr" indent="0" marL="0">
-                        <a:buNone/>
-                      </a:pPr>
-                      <a:r>
-                        <a:rPr lang="en-US" sz="2400" dirty="0">
-                          <a:solidFill>
-                            <a:srgbClr val="1F2937"/>
-                          </a:solidFill>
-                          <a:latin typeface="맑은 고딕" pitchFamily="34" charset="0"/>
-                          <a:ea typeface="맑은 고딕" pitchFamily="34" charset="-122"/>
-                          <a:cs typeface="맑은 고딕" pitchFamily="34" charset="-120"/>
-                        </a:rPr>
-                        <a:t>9</a:t>
-                      </a:r>
-                      <a:endParaRPr lang="en-US" sz="2400" dirty="0">
-                        <a:latin typeface="맑은 고딕" charset="0"/>
-                        <a:ea typeface="맑은 고딕" charset="0"/>
-                        <a:cs typeface="맑은 고딕" charset="0"/>
-                      </a:endParaRPr>
-                    </a:p>
-                  </a:txBody>
-                  <a:tcPr marL="38100" marR="38100" marT="38100" marB="38100" anchor="ctr">
-                    <a:lnL w="12700" cap="flat" cmpd="sng" algn="ctr">
-                      <a:solidFill>
-                        <a:srgbClr val="94A3B8"/>
-                      </a:solidFill>
-                      <a:prstDash val="solid"/>
-                      <a:round/>
-                      <a:headEnd type="none" w="med" len="med"/>
-                      <a:tailEnd type="none" w="med" len="med"/>
-                    </a:lnL>
-                    <a:lnR w="12700" cap="flat" cmpd="sng" algn="ctr">
-                      <a:solidFill>
-                        <a:srgbClr val="94A3B8"/>
-                      </a:solidFill>
-                      <a:prstDash val="solid"/>
-                      <a:round/>
-                      <a:headEnd type="none" w="med" len="med"/>
-                      <a:tailEnd type="none" w="med" len="med"/>
-                    </a:lnR>
-                    <a:lnT w="12700" cap="flat" cmpd="sng" algn="ctr">
-                      <a:solidFill>
-                        <a:srgbClr val="94A3B8"/>
-                      </a:solidFill>
-                      <a:prstDash val="solid"/>
-                      <a:round/>
-                      <a:headEnd type="none" w="med" len="med"/>
-                      <a:tailEnd type="none" w="med" len="med"/>
-                    </a:lnT>
-                    <a:lnB w="12700" cap="flat" cmpd="sng" algn="ctr">
-                      <a:solidFill>
-                        <a:srgbClr val="94A3B8"/>
-                      </a:solidFill>
-                      <a:prstDash val="solid"/>
-                      <a:round/>
-                      <a:headEnd type="none" w="med" len="med"/>
-                      <a:tailEnd type="none" w="med" len="med"/>
-                    </a:lnB>
-                    <a:solidFill>
-                      <a:srgbClr val="FFFFFF"/>
-                    </a:solidFill>
-                  </a:tcPr>
-                </a:tc>
-                <a:tc>
-                  <a:txBody>
-                    <a:bodyPr/>
-                    <a:lstStyle/>
-                    <a:p>
-                      <a:pPr eaLnBrk="0" algn="ctr" indent="0" marL="0">
-                        <a:buNone/>
-                      </a:pPr>
-                      <a:r>
-                        <a:rPr lang="en-US" sz="2400" dirty="0">
-                          <a:solidFill>
-                            <a:srgbClr val="1F2937"/>
-                          </a:solidFill>
-                          <a:latin typeface="맑은 고딕" pitchFamily="34" charset="0"/>
-                          <a:ea typeface="맑은 고딕" pitchFamily="34" charset="-122"/>
-                          <a:cs typeface="맑은 고딕" pitchFamily="34" charset="-120"/>
-                        </a:rPr>
-                        <a:t>10</a:t>
-                      </a:r>
-                      <a:endParaRPr lang="en-US" sz="2400" dirty="0">
-                        <a:latin typeface="맑은 고딕" charset="0"/>
-                        <a:ea typeface="맑은 고딕" charset="0"/>
-                        <a:cs typeface="맑은 고딕" charset="0"/>
-                      </a:endParaRPr>
-                    </a:p>
-                  </a:txBody>
-                  <a:tcPr marL="38100" marR="38100" marT="38100" marB="38100" anchor="ctr">
-                    <a:lnL w="12700" cap="flat" cmpd="sng" algn="ctr">
-                      <a:solidFill>
-                        <a:srgbClr val="94A3B8"/>
-                      </a:solidFill>
-                      <a:prstDash val="solid"/>
-                      <a:round/>
-                      <a:headEnd type="none" w="med" len="med"/>
-                      <a:tailEnd type="none" w="med" len="med"/>
-                    </a:lnL>
-                    <a:lnR w="12700" cap="flat" cmpd="sng" algn="ctr">
-                      <a:solidFill>
-                        <a:srgbClr val="94A3B8"/>
-                      </a:solidFill>
-                      <a:prstDash val="solid"/>
-                      <a:round/>
-                      <a:headEnd type="none" w="med" len="med"/>
-                      <a:tailEnd type="none" w="med" len="med"/>
-                    </a:lnR>
-                    <a:lnT w="12700" cap="flat" cmpd="sng" algn="ctr">
-                      <a:solidFill>
-                        <a:srgbClr val="94A3B8"/>
-                      </a:solidFill>
-                      <a:prstDash val="solid"/>
-                      <a:round/>
-                      <a:headEnd type="none" w="med" len="med"/>
-                      <a:tailEnd type="none" w="med" len="med"/>
-                    </a:lnT>
-                    <a:lnB w="12700" cap="flat" cmpd="sng" algn="ctr">
-                      <a:solidFill>
-                        <a:srgbClr val="94A3B8"/>
-                      </a:solidFill>
-                      <a:prstDash val="solid"/>
-                      <a:round/>
-                      <a:headEnd type="none" w="med" len="med"/>
-                      <a:tailEnd type="none" w="med" len="med"/>
-                    </a:lnB>
-                    <a:solidFill>
-                      <a:srgbClr val="FFFFFF"/>
-                    </a:solidFill>
-                  </a:tcPr>
-                </a:tc>
-              </a:tr>
-            </a:tbl>
-          </a:graphicData>
-        </a:graphic>
-      </p:graphicFrame>
-      <p:sp>
-        <p:nvSpPr>
-          <p:cNvPr id="25" name="Slide Number Placeholder 0"/>
-          <p:cNvSpPr>
-            <a:spLocks noGrp="1"/>
-          </p:cNvSpPr>
-          <p:nvPr>
-            <p:ph type="sldNum" sz="quarter" idx="4294967295"/>
-          </p:nvPr>
-        </p:nvSpPr>
-        <p:spPr>
-          <a:xfrm>
-            <a:off x="10881360" y="6382512"/>
-            <a:ext cx="731520" cy="320040"/>
-          </a:xfrm>
-          <a:prstGeom prst="rect">
-            <a:avLst/>
-          </a:prstGeom>
-          <a:extLst>
-            <a:ext uri="{C572A759-6A51-4108-AA02-DFA0A04FC94B}">
-              <ma14:wrappingTextBoxFlag xmlns:ma14="http://schemas.microsoft.com/office/mac/drawingml/2011/main" val="0"/>
-            </a:ext>
-          </a:extLst>
-        </p:spPr>
-        <p:txBody>
-          <a:bodyPr/>
-          <a:lstStyle>
-            <a:lvl1pPr>
-              <a:defRPr sz="1200">
-                <a:solidFill>
-                  <a:srgbClr val="4B5563"/>
-                </a:solidFill>
-                <a:latin typeface="맑은 고딕"/>
-                <a:ea typeface="맑은 고딕"/>
-                <a:cs typeface="맑은 고딕"/>
-              </a:defRPr>
-            </a:lvl1pPr>
-          </a:lstStyle>
-          <a:p>
-            <a:pPr eaLnBrk="0" algn="r"/>
-            <a:fld id="{F7021451-1387-4CA6-816F-3879F97B5CBC}" type="slidenum">
-              <a:rPr b="0" lang="en-US"/>
-              <a:t>8</a:t>
-            </a:fld>
-            <a:endParaRPr lang="en-US"/>
-          </a:p>
-        </p:txBody>
-      </p:sp>
-    </p:spTree>
-  </p:cSld>
-  <p:clrMapOvr>
-    <a:masterClrMapping/>
-  </p:clrMapOvr>
-</p:sld>
-</file>
-
-<file path=ppt/slides/slide9.xml><?xml version="1.0" encoding="utf-8"?>
-<p:sld xmlns:a="http://schemas.openxmlformats.org/drawingml/2006/main" xmlns:r="http://schemas.openxmlformats.org/officeDocument/2006/relationships" xmlns:p="http://schemas.openxmlformats.org/presentationml/2006/main">
-  <p:cSld name="Slide 9">
-    <p:spTree>
-      <p:nvGrpSpPr>
-        <p:cNvPr id="1" name=""/>
-        <p:cNvGrpSpPr/>
-        <p:nvPr/>
-      </p:nvGrpSpPr>
-      <p:grpSpPr>
-        <a:xfrm>
-          <a:off x="0" y="0"/>
-          <a:ext cx="0" cy="0"/>
-          <a:chOff x="0" y="0"/>
-          <a:chExt cx="0" cy="0"/>
-        </a:xfrm>
-      </p:grpSpPr>
-      <p:sp>
-        <p:nvSpPr>
-          <p:cNvPr id="2" name="Text 0"/>
-          <p:cNvSpPr/>
-          <p:nvPr>
-            <p:ph idx="100" type="title" hasCustomPrompt="1"/>
-          </p:nvPr>
-        </p:nvSpPr>
-        <p:spPr>
-          <a:xfrm>
-            <a:off x="548640" y="320040"/>
-            <a:ext cx="11064240" cy="868680"/>
-          </a:xfrm>
-          <a:prstGeom prst="rect">
-            <a:avLst/>
-          </a:prstGeom>
-          <a:noFill/>
-          <a:ln/>
-        </p:spPr>
-        <p:txBody>
-          <a:bodyPr wrap="square" lIns="0" tIns="0" rIns="0" bIns="0" rtlCol="0" anchor="ctr"/>
-          <a:lstStyle/>
-          <a:p>
-            <a:pPr eaLnBrk="0" algn="l" indent="0" marL="0">
-              <a:buNone/>
-            </a:pPr>
-            <a:r>
-              <a:rPr lang="ko-KR" altLang="en-US" sz="4400" b="1" dirty="0">
-                <a:solidFill>
-                  <a:srgbClr val="1F2937"/>
-                </a:solidFill>
-                <a:latin typeface="맑은 고딕" pitchFamily="34" charset="0"/>
-                <a:ea typeface="맑은 고딕" pitchFamily="34" charset="-122"/>
-                <a:cs typeface="맑은 고딕" pitchFamily="34" charset="-120"/>
-              </a:rPr>
-              <a:t>비스듬히 보면</a:t>
-            </a:r>
-            <a:endParaRPr lang="ko-KR" sz="4400" dirty="0"/>
-          </a:p>
-        </p:txBody>
-      </p:sp>
-      <p:sp>
-        <p:nvSpPr>
-          <p:cNvPr id="3" name="S09-card104"/>
-          <p:cNvSpPr/>
-          <p:nvPr/>
-        </p:nvSpPr>
-        <p:spPr>
-          <a:xfrm>
-            <a:off x="548640" y="4897120"/>
-            <a:ext cx="5431536" cy="1320800"/>
-          </a:xfrm>
-          <a:prstGeom prst="roundRect">
-            <a:avLst>
-              <a:gd name="adj" fmla="val 8308"/>
-            </a:avLst>
-          </a:prstGeom>
-          <a:solidFill>
-            <a:srgbClr val="EAF3F1"/>
-          </a:solidFill>
-          <a:ln w="12700">
-            <a:solidFill>
-              <a:srgbClr val="EAF3F1"/>
-            </a:solidFill>
-            <a:prstDash val="solid"/>
-          </a:ln>
-        </p:spPr>
-      </p:sp>
-      <p:sp>
-        <p:nvSpPr>
-          <p:cNvPr id="4" name="S09-cardtext105"/>
-          <p:cNvSpPr txBox="1"/>
-          <p:nvPr/>
-        </p:nvSpPr>
-        <p:spPr>
-          <a:xfrm>
-            <a:off x="822960" y="5034280"/>
-            <a:ext cx="4882896" cy="1046480"/>
-          </a:xfrm>
-          <a:prstGeom prst="rect">
-            <a:avLst/>
-          </a:prstGeom>
-          <a:noFill/>
-          <a:ln/>
-        </p:spPr>
-        <p:txBody>
-          <a:bodyPr wrap="square" lIns="0" tIns="0" rIns="0" bIns="0" rtlCol="0" anchor="ctr"/>
-          <a:lstStyle/>
-          <a:p>
-            <a:pPr eaLnBrk="0" indent="0" marL="0">
-              <a:spcAft>
-                <a:spcPts val="600"/>
-              </a:spcAft>
-              <a:buNone/>
-            </a:pPr>
-            <a:r>
-              <a:rPr lang="ko-KR" altLang="en-US" sz="3200" dirty="0">
-                <a:solidFill>
-                  <a:srgbClr val="1F2937"/>
-                </a:solidFill>
-                <a:latin typeface="맑은 고딕" pitchFamily="34" charset="0"/>
-                <a:ea typeface="맑은 고딕" pitchFamily="34" charset="-122"/>
-                <a:cs typeface="맑은 고딕" pitchFamily="34" charset="-120"/>
-              </a:rPr>
-              <a:t>↘ 2, 4, 6, 8, 10: 2씩 커져요.</a:t>
-            </a:r>
-            <a:endParaRPr lang="ko-KR" sz="3200" dirty="0"/>
-          </a:p>
-        </p:txBody>
-      </p:sp>
-      <p:sp>
-        <p:nvSpPr>
-          <p:cNvPr id="5" name="S09-card106"/>
-          <p:cNvSpPr/>
-          <p:nvPr/>
-        </p:nvSpPr>
-        <p:spPr>
-          <a:xfrm>
-            <a:off x="6208776" y="4897120"/>
-            <a:ext cx="5431536" cy="1320800"/>
-          </a:xfrm>
-          <a:prstGeom prst="roundRect">
-            <a:avLst>
-              <a:gd name="adj" fmla="val 8308"/>
-            </a:avLst>
-          </a:prstGeom>
-          <a:solidFill>
-            <a:srgbClr val="EAF3F1"/>
-          </a:solidFill>
-          <a:ln w="12700">
-            <a:solidFill>
-              <a:srgbClr val="EAF3F1"/>
-            </a:solidFill>
-            <a:prstDash val="solid"/>
-          </a:ln>
-        </p:spPr>
-      </p:sp>
-      <p:sp>
-        <p:nvSpPr>
-          <p:cNvPr id="6" name="S09-cardtext107"/>
-          <p:cNvSpPr txBox="1"/>
-          <p:nvPr/>
-        </p:nvSpPr>
-        <p:spPr>
-          <a:xfrm>
-            <a:off x="6483096" y="5034280"/>
-            <a:ext cx="4882896" cy="1046480"/>
-          </a:xfrm>
-          <a:prstGeom prst="rect">
-            <a:avLst/>
-          </a:prstGeom>
-          <a:noFill/>
-          <a:ln/>
-        </p:spPr>
-        <p:txBody>
-          <a:bodyPr wrap="square" lIns="0" tIns="0" rIns="0" bIns="0" rtlCol="0" anchor="ctr"/>
-          <a:lstStyle/>
-          <a:p>
-            <a:pPr eaLnBrk="0" indent="0" marL="0">
-              <a:spcAft>
-                <a:spcPts val="600"/>
-              </a:spcAft>
-              <a:buNone/>
-            </a:pPr>
-            <a:r>
-              <a:rPr lang="ko-KR" altLang="en-US" sz="3200" dirty="0">
-                <a:solidFill>
-                  <a:srgbClr val="1F2937"/>
-                </a:solidFill>
-                <a:latin typeface="맑은 고딕" pitchFamily="34" charset="0"/>
-                <a:ea typeface="맑은 고딕" pitchFamily="34" charset="-122"/>
-                <a:cs typeface="맑은 고딕" pitchFamily="34" charset="-120"/>
-              </a:rPr>
-              <a:t>↙ 6, 6, 6, 6, 6: 모두 같아요.</a:t>
-            </a:r>
-            <a:endParaRPr lang="ko-KR" sz="3200" dirty="0"/>
-          </a:p>
-        </p:txBody>
-      </p:sp>
-      <p:graphicFrame>
-        <p:nvGraphicFramePr>
-          <p:cNvPr id="10" name="S09-table108"/>
-          <p:cNvGraphicFramePr>
-            <a:graphicFrameLocks noGrp="1"/>
-          </p:cNvGraphicFramePr>
-          <p:nvPr>
-            <p:extLst>
-              <p:ext uri="{D42A27DB-BD31-4B8C-83A1-F6EECF244321}">
-                <p14:modId xmlns:p14="http://schemas.microsoft.com/office/powerpoint/2010/main" val="1579011935"/>
-              </p:ext>
-            </p:extLst>
-          </p:nvPr>
-        </p:nvGraphicFramePr>
-        <p:xfrm>
-          <a:off x="1156716" y="1412240"/>
-          <a:ext cx="9875520" cy="914400"/>
-        </p:xfrm>
-        <a:graphic>
-          <a:graphicData uri="http://schemas.openxmlformats.org/drawingml/2006/table">
-            <a:tbl>
-              <a:tblPr/>
-              <a:tblGrid>
-                <a:gridCol w="1645920"/>
-                <a:gridCol w="1645920"/>
-                <a:gridCol w="1645920"/>
-                <a:gridCol w="1645920"/>
-                <a:gridCol w="1645920"/>
-                <a:gridCol w="1645920"/>
-              </a:tblGrid>
-              <a:tr h="528320">
+              <a:tr h="511810">
                 <a:tc>
                   <a:txBody>
                     <a:bodyPr/>
@@ -20424,7 +17678,7 @@
                   </a:tcPr>
                 </a:tc>
               </a:tr>
-              <a:tr h="528320">
+              <a:tr h="511810">
                 <a:tc>
                   <a:txBody>
                     <a:bodyPr/>
@@ -20834,7 +18088,7 @@
                   </a:tcPr>
                 </a:tc>
               </a:tr>
-              <a:tr h="528320">
+              <a:tr h="511810">
                 <a:tc>
                   <a:txBody>
                     <a:bodyPr/>
@@ -21244,7 +18498,7 @@
                   </a:tcPr>
                 </a:tc>
               </a:tr>
-              <a:tr h="528320">
+              <a:tr h="511810">
                 <a:tc>
                   <a:txBody>
                     <a:bodyPr/>
@@ -21654,7 +18908,7 @@
                   </a:tcPr>
                 </a:tc>
               </a:tr>
-              <a:tr h="528320">
+              <a:tr h="511810">
                 <a:tc>
                   <a:txBody>
                     <a:bodyPr/>
@@ -22064,7 +19318,2753 @@
                   </a:tcPr>
                 </a:tc>
               </a:tr>
-              <a:tr h="528320">
+              <a:tr h="511810">
+                <a:tc>
+                  <a:txBody>
+                    <a:bodyPr/>
+                    <a:lstStyle/>
+                    <a:p>
+                      <a:pPr eaLnBrk="0" algn="ctr" indent="0" marL="0">
+                        <a:buNone/>
+                      </a:pPr>
+                      <a:r>
+                        <a:rPr lang="en-US" sz="2600" b="1" dirty="0">
+                          <a:solidFill>
+                            <a:srgbClr val="1F2937"/>
+                          </a:solidFill>
+                          <a:latin typeface="맑은 고딕" pitchFamily="34" charset="0"/>
+                          <a:ea typeface="맑은 고딕" pitchFamily="34" charset="-122"/>
+                          <a:cs typeface="맑은 고딕" pitchFamily="34" charset="-120"/>
+                        </a:rPr>
+                        <a:t>5</a:t>
+                      </a:r>
+                      <a:endParaRPr lang="en-US" sz="2600" dirty="0">
+                        <a:latin typeface="맑은 고딕" charset="0"/>
+                        <a:ea typeface="맑은 고딕" charset="0"/>
+                        <a:cs typeface="맑은 고딕" charset="0"/>
+                      </a:endParaRPr>
+                    </a:p>
+                  </a:txBody>
+                  <a:tcPr marL="38100" marR="38100" marT="38100" marB="38100" anchor="ctr">
+                    <a:lnL w="12700" cap="flat" cmpd="sng" algn="ctr">
+                      <a:solidFill>
+                        <a:srgbClr val="94A3B8"/>
+                      </a:solidFill>
+                      <a:prstDash val="solid"/>
+                      <a:round/>
+                      <a:headEnd type="none" w="med" len="med"/>
+                      <a:tailEnd type="none" w="med" len="med"/>
+                    </a:lnL>
+                    <a:lnR w="12700" cap="flat" cmpd="sng" algn="ctr">
+                      <a:solidFill>
+                        <a:srgbClr val="94A3B8"/>
+                      </a:solidFill>
+                      <a:prstDash val="solid"/>
+                      <a:round/>
+                      <a:headEnd type="none" w="med" len="med"/>
+                      <a:tailEnd type="none" w="med" len="med"/>
+                    </a:lnR>
+                    <a:lnT w="12700" cap="flat" cmpd="sng" algn="ctr">
+                      <a:solidFill>
+                        <a:srgbClr val="94A3B8"/>
+                      </a:solidFill>
+                      <a:prstDash val="solid"/>
+                      <a:round/>
+                      <a:headEnd type="none" w="med" len="med"/>
+                      <a:tailEnd type="none" w="med" len="med"/>
+                    </a:lnT>
+                    <a:lnB w="12700" cap="flat" cmpd="sng" algn="ctr">
+                      <a:solidFill>
+                        <a:srgbClr val="94A3B8"/>
+                      </a:solidFill>
+                      <a:prstDash val="solid"/>
+                      <a:round/>
+                      <a:headEnd type="none" w="med" len="med"/>
+                      <a:tailEnd type="none" w="med" len="med"/>
+                    </a:lnB>
+                    <a:solidFill>
+                      <a:srgbClr val="EAF3F1"/>
+                    </a:solidFill>
+                  </a:tcPr>
+                </a:tc>
+                <a:tc>
+                  <a:txBody>
+                    <a:bodyPr/>
+                    <a:lstStyle/>
+                    <a:p>
+                      <a:pPr eaLnBrk="0" algn="ctr" indent="0" marL="0">
+                        <a:buNone/>
+                      </a:pPr>
+                      <a:r>
+                        <a:rPr lang="en-US" sz="2600" dirty="0">
+                          <a:solidFill>
+                            <a:srgbClr val="1F2937"/>
+                          </a:solidFill>
+                          <a:latin typeface="맑은 고딕" pitchFamily="34" charset="0"/>
+                          <a:ea typeface="맑은 고딕" pitchFamily="34" charset="-122"/>
+                          <a:cs typeface="맑은 고딕" pitchFamily="34" charset="-120"/>
+                        </a:rPr>
+                        <a:t>6</a:t>
+                      </a:r>
+                      <a:endParaRPr lang="en-US" sz="2600" dirty="0">
+                        <a:latin typeface="맑은 고딕" charset="0"/>
+                        <a:ea typeface="맑은 고딕" charset="0"/>
+                        <a:cs typeface="맑은 고딕" charset="0"/>
+                      </a:endParaRPr>
+                    </a:p>
+                  </a:txBody>
+                  <a:tcPr marL="38100" marR="38100" marT="38100" marB="38100" anchor="ctr">
+                    <a:lnL w="12700" cap="flat" cmpd="sng" algn="ctr">
+                      <a:solidFill>
+                        <a:srgbClr val="94A3B8"/>
+                      </a:solidFill>
+                      <a:prstDash val="solid"/>
+                      <a:round/>
+                      <a:headEnd type="none" w="med" len="med"/>
+                      <a:tailEnd type="none" w="med" len="med"/>
+                    </a:lnL>
+                    <a:lnR w="12700" cap="flat" cmpd="sng" algn="ctr">
+                      <a:solidFill>
+                        <a:srgbClr val="94A3B8"/>
+                      </a:solidFill>
+                      <a:prstDash val="solid"/>
+                      <a:round/>
+                      <a:headEnd type="none" w="med" len="med"/>
+                      <a:tailEnd type="none" w="med" len="med"/>
+                    </a:lnR>
+                    <a:lnT w="12700" cap="flat" cmpd="sng" algn="ctr">
+                      <a:solidFill>
+                        <a:srgbClr val="94A3B8"/>
+                      </a:solidFill>
+                      <a:prstDash val="solid"/>
+                      <a:round/>
+                      <a:headEnd type="none" w="med" len="med"/>
+                      <a:tailEnd type="none" w="med" len="med"/>
+                    </a:lnT>
+                    <a:lnB w="12700" cap="flat" cmpd="sng" algn="ctr">
+                      <a:solidFill>
+                        <a:srgbClr val="94A3B8"/>
+                      </a:solidFill>
+                      <a:prstDash val="solid"/>
+                      <a:round/>
+                      <a:headEnd type="none" w="med" len="med"/>
+                      <a:tailEnd type="none" w="med" len="med"/>
+                    </a:lnB>
+                    <a:solidFill>
+                      <a:srgbClr val="FFFFFF"/>
+                    </a:solidFill>
+                  </a:tcPr>
+                </a:tc>
+                <a:tc>
+                  <a:txBody>
+                    <a:bodyPr/>
+                    <a:lstStyle/>
+                    <a:p>
+                      <a:pPr eaLnBrk="0" algn="ctr" indent="0" marL="0">
+                        <a:buNone/>
+                      </a:pPr>
+                      <a:r>
+                        <a:rPr lang="en-US" sz="2600" dirty="0">
+                          <a:solidFill>
+                            <a:srgbClr val="1F2937"/>
+                          </a:solidFill>
+                          <a:latin typeface="맑은 고딕" pitchFamily="34" charset="0"/>
+                          <a:ea typeface="맑은 고딕" pitchFamily="34" charset="-122"/>
+                          <a:cs typeface="맑은 고딕" pitchFamily="34" charset="-120"/>
+                        </a:rPr>
+                        <a:t>7</a:t>
+                      </a:r>
+                      <a:endParaRPr lang="en-US" sz="2600" dirty="0">
+                        <a:latin typeface="맑은 고딕" charset="0"/>
+                        <a:ea typeface="맑은 고딕" charset="0"/>
+                        <a:cs typeface="맑은 고딕" charset="0"/>
+                      </a:endParaRPr>
+                    </a:p>
+                  </a:txBody>
+                  <a:tcPr marL="38100" marR="38100" marT="38100" marB="38100" anchor="ctr">
+                    <a:lnL w="12700" cap="flat" cmpd="sng" algn="ctr">
+                      <a:solidFill>
+                        <a:srgbClr val="94A3B8"/>
+                      </a:solidFill>
+                      <a:prstDash val="solid"/>
+                      <a:round/>
+                      <a:headEnd type="none" w="med" len="med"/>
+                      <a:tailEnd type="none" w="med" len="med"/>
+                    </a:lnL>
+                    <a:lnR w="12700" cap="flat" cmpd="sng" algn="ctr">
+                      <a:solidFill>
+                        <a:srgbClr val="94A3B8"/>
+                      </a:solidFill>
+                      <a:prstDash val="solid"/>
+                      <a:round/>
+                      <a:headEnd type="none" w="med" len="med"/>
+                      <a:tailEnd type="none" w="med" len="med"/>
+                    </a:lnR>
+                    <a:lnT w="12700" cap="flat" cmpd="sng" algn="ctr">
+                      <a:solidFill>
+                        <a:srgbClr val="94A3B8"/>
+                      </a:solidFill>
+                      <a:prstDash val="solid"/>
+                      <a:round/>
+                      <a:headEnd type="none" w="med" len="med"/>
+                      <a:tailEnd type="none" w="med" len="med"/>
+                    </a:lnT>
+                    <a:lnB w="12700" cap="flat" cmpd="sng" algn="ctr">
+                      <a:solidFill>
+                        <a:srgbClr val="94A3B8"/>
+                      </a:solidFill>
+                      <a:prstDash val="solid"/>
+                      <a:round/>
+                      <a:headEnd type="none" w="med" len="med"/>
+                      <a:tailEnd type="none" w="med" len="med"/>
+                    </a:lnB>
+                    <a:solidFill>
+                      <a:srgbClr val="FFFFFF"/>
+                    </a:solidFill>
+                  </a:tcPr>
+                </a:tc>
+                <a:tc>
+                  <a:txBody>
+                    <a:bodyPr/>
+                    <a:lstStyle/>
+                    <a:p>
+                      <a:pPr eaLnBrk="0" algn="ctr" indent="0" marL="0">
+                        <a:buNone/>
+                      </a:pPr>
+                      <a:r>
+                        <a:rPr lang="en-US" sz="2600" dirty="0">
+                          <a:solidFill>
+                            <a:srgbClr val="1F2937"/>
+                          </a:solidFill>
+                          <a:latin typeface="맑은 고딕" pitchFamily="34" charset="0"/>
+                          <a:ea typeface="맑은 고딕" pitchFamily="34" charset="-122"/>
+                          <a:cs typeface="맑은 고딕" pitchFamily="34" charset="-120"/>
+                        </a:rPr>
+                        <a:t>8</a:t>
+                      </a:r>
+                      <a:endParaRPr lang="en-US" sz="2600" dirty="0">
+                        <a:latin typeface="맑은 고딕" charset="0"/>
+                        <a:ea typeface="맑은 고딕" charset="0"/>
+                        <a:cs typeface="맑은 고딕" charset="0"/>
+                      </a:endParaRPr>
+                    </a:p>
+                  </a:txBody>
+                  <a:tcPr marL="38100" marR="38100" marT="38100" marB="38100" anchor="ctr">
+                    <a:lnL w="12700" cap="flat" cmpd="sng" algn="ctr">
+                      <a:solidFill>
+                        <a:srgbClr val="94A3B8"/>
+                      </a:solidFill>
+                      <a:prstDash val="solid"/>
+                      <a:round/>
+                      <a:headEnd type="none" w="med" len="med"/>
+                      <a:tailEnd type="none" w="med" len="med"/>
+                    </a:lnL>
+                    <a:lnR w="12700" cap="flat" cmpd="sng" algn="ctr">
+                      <a:solidFill>
+                        <a:srgbClr val="94A3B8"/>
+                      </a:solidFill>
+                      <a:prstDash val="solid"/>
+                      <a:round/>
+                      <a:headEnd type="none" w="med" len="med"/>
+                      <a:tailEnd type="none" w="med" len="med"/>
+                    </a:lnR>
+                    <a:lnT w="12700" cap="flat" cmpd="sng" algn="ctr">
+                      <a:solidFill>
+                        <a:srgbClr val="94A3B8"/>
+                      </a:solidFill>
+                      <a:prstDash val="solid"/>
+                      <a:round/>
+                      <a:headEnd type="none" w="med" len="med"/>
+                      <a:tailEnd type="none" w="med" len="med"/>
+                    </a:lnT>
+                    <a:lnB w="12700" cap="flat" cmpd="sng" algn="ctr">
+                      <a:solidFill>
+                        <a:srgbClr val="94A3B8"/>
+                      </a:solidFill>
+                      <a:prstDash val="solid"/>
+                      <a:round/>
+                      <a:headEnd type="none" w="med" len="med"/>
+                      <a:tailEnd type="none" w="med" len="med"/>
+                    </a:lnB>
+                    <a:solidFill>
+                      <a:srgbClr val="FFFFFF"/>
+                    </a:solidFill>
+                  </a:tcPr>
+                </a:tc>
+                <a:tc>
+                  <a:txBody>
+                    <a:bodyPr/>
+                    <a:lstStyle/>
+                    <a:p>
+                      <a:pPr eaLnBrk="0" algn="ctr" indent="0" marL="0">
+                        <a:buNone/>
+                      </a:pPr>
+                      <a:r>
+                        <a:rPr lang="en-US" sz="2600" dirty="0">
+                          <a:solidFill>
+                            <a:srgbClr val="1F2937"/>
+                          </a:solidFill>
+                          <a:latin typeface="맑은 고딕" pitchFamily="34" charset="0"/>
+                          <a:ea typeface="맑은 고딕" pitchFamily="34" charset="-122"/>
+                          <a:cs typeface="맑은 고딕" pitchFamily="34" charset="-120"/>
+                        </a:rPr>
+                        <a:t>9</a:t>
+                      </a:r>
+                      <a:endParaRPr lang="en-US" sz="2600" dirty="0">
+                        <a:latin typeface="맑은 고딕" charset="0"/>
+                        <a:ea typeface="맑은 고딕" charset="0"/>
+                        <a:cs typeface="맑은 고딕" charset="0"/>
+                      </a:endParaRPr>
+                    </a:p>
+                  </a:txBody>
+                  <a:tcPr marL="38100" marR="38100" marT="38100" marB="38100" anchor="ctr">
+                    <a:lnL w="12700" cap="flat" cmpd="sng" algn="ctr">
+                      <a:solidFill>
+                        <a:srgbClr val="94A3B8"/>
+                      </a:solidFill>
+                      <a:prstDash val="solid"/>
+                      <a:round/>
+                      <a:headEnd type="none" w="med" len="med"/>
+                      <a:tailEnd type="none" w="med" len="med"/>
+                    </a:lnL>
+                    <a:lnR w="12700" cap="flat" cmpd="sng" algn="ctr">
+                      <a:solidFill>
+                        <a:srgbClr val="94A3B8"/>
+                      </a:solidFill>
+                      <a:prstDash val="solid"/>
+                      <a:round/>
+                      <a:headEnd type="none" w="med" len="med"/>
+                      <a:tailEnd type="none" w="med" len="med"/>
+                    </a:lnR>
+                    <a:lnT w="12700" cap="flat" cmpd="sng" algn="ctr">
+                      <a:solidFill>
+                        <a:srgbClr val="94A3B8"/>
+                      </a:solidFill>
+                      <a:prstDash val="solid"/>
+                      <a:round/>
+                      <a:headEnd type="none" w="med" len="med"/>
+                      <a:tailEnd type="none" w="med" len="med"/>
+                    </a:lnT>
+                    <a:lnB w="12700" cap="flat" cmpd="sng" algn="ctr">
+                      <a:solidFill>
+                        <a:srgbClr val="94A3B8"/>
+                      </a:solidFill>
+                      <a:prstDash val="solid"/>
+                      <a:round/>
+                      <a:headEnd type="none" w="med" len="med"/>
+                      <a:tailEnd type="none" w="med" len="med"/>
+                    </a:lnB>
+                    <a:solidFill>
+                      <a:srgbClr val="FFFFFF"/>
+                    </a:solidFill>
+                  </a:tcPr>
+                </a:tc>
+                <a:tc>
+                  <a:txBody>
+                    <a:bodyPr/>
+                    <a:lstStyle/>
+                    <a:p>
+                      <a:pPr eaLnBrk="0" algn="ctr" indent="0" marL="0">
+                        <a:buNone/>
+                      </a:pPr>
+                      <a:r>
+                        <a:rPr lang="en-US" sz="2600" dirty="0">
+                          <a:solidFill>
+                            <a:srgbClr val="1F2937"/>
+                          </a:solidFill>
+                          <a:latin typeface="맑은 고딕" pitchFamily="34" charset="0"/>
+                          <a:ea typeface="맑은 고딕" pitchFamily="34" charset="-122"/>
+                          <a:cs typeface="맑은 고딕" pitchFamily="34" charset="-120"/>
+                        </a:rPr>
+                        <a:t>10</a:t>
+                      </a:r>
+                      <a:endParaRPr lang="en-US" sz="2600" dirty="0">
+                        <a:latin typeface="맑은 고딕" charset="0"/>
+                        <a:ea typeface="맑은 고딕" charset="0"/>
+                        <a:cs typeface="맑은 고딕" charset="0"/>
+                      </a:endParaRPr>
+                    </a:p>
+                  </a:txBody>
+                  <a:tcPr marL="38100" marR="38100" marT="38100" marB="38100" anchor="ctr">
+                    <a:lnL w="12700" cap="flat" cmpd="sng" algn="ctr">
+                      <a:solidFill>
+                        <a:srgbClr val="94A3B8"/>
+                      </a:solidFill>
+                      <a:prstDash val="solid"/>
+                      <a:round/>
+                      <a:headEnd type="none" w="med" len="med"/>
+                      <a:tailEnd type="none" w="med" len="med"/>
+                    </a:lnL>
+                    <a:lnR w="12700" cap="flat" cmpd="sng" algn="ctr">
+                      <a:solidFill>
+                        <a:srgbClr val="94A3B8"/>
+                      </a:solidFill>
+                      <a:prstDash val="solid"/>
+                      <a:round/>
+                      <a:headEnd type="none" w="med" len="med"/>
+                      <a:tailEnd type="none" w="med" len="med"/>
+                    </a:lnR>
+                    <a:lnT w="12700" cap="flat" cmpd="sng" algn="ctr">
+                      <a:solidFill>
+                        <a:srgbClr val="94A3B8"/>
+                      </a:solidFill>
+                      <a:prstDash val="solid"/>
+                      <a:round/>
+                      <a:headEnd type="none" w="med" len="med"/>
+                      <a:tailEnd type="none" w="med" len="med"/>
+                    </a:lnT>
+                    <a:lnB w="12700" cap="flat" cmpd="sng" algn="ctr">
+                      <a:solidFill>
+                        <a:srgbClr val="94A3B8"/>
+                      </a:solidFill>
+                      <a:prstDash val="solid"/>
+                      <a:round/>
+                      <a:headEnd type="none" w="med" len="med"/>
+                      <a:tailEnd type="none" w="med" len="med"/>
+                    </a:lnB>
+                    <a:solidFill>
+                      <a:srgbClr val="FFFFFF"/>
+                    </a:solidFill>
+                  </a:tcPr>
+                </a:tc>
+              </a:tr>
+            </a:tbl>
+          </a:graphicData>
+        </a:graphic>
+      </p:graphicFrame>
+      <p:sp>
+        <p:nvSpPr>
+          <p:cNvPr id="25" name="Slide Number Placeholder 0"/>
+          <p:cNvSpPr>
+            <a:spLocks noGrp="1"/>
+          </p:cNvSpPr>
+          <p:nvPr>
+            <p:ph type="sldNum" sz="quarter" idx="4294967295"/>
+          </p:nvPr>
+        </p:nvSpPr>
+        <p:spPr>
+          <a:xfrm>
+            <a:off x="10881360" y="6382512"/>
+            <a:ext cx="731520" cy="320040"/>
+          </a:xfrm>
+          <a:prstGeom prst="rect">
+            <a:avLst/>
+          </a:prstGeom>
+          <a:extLst>
+            <a:ext uri="{C572A759-6A51-4108-AA02-DFA0A04FC94B}">
+              <ma14:wrappingTextBoxFlag xmlns:ma14="http://schemas.microsoft.com/office/mac/drawingml/2011/main" val="0"/>
+            </a:ext>
+          </a:extLst>
+        </p:spPr>
+        <p:txBody>
+          <a:bodyPr/>
+          <a:lstStyle>
+            <a:lvl1pPr>
+              <a:defRPr sz="1200">
+                <a:solidFill>
+                  <a:srgbClr val="4B5563"/>
+                </a:solidFill>
+                <a:latin typeface="맑은 고딕"/>
+                <a:ea typeface="맑은 고딕"/>
+                <a:cs typeface="맑은 고딕"/>
+              </a:defRPr>
+            </a:lvl1pPr>
+          </a:lstStyle>
+          <a:p>
+            <a:pPr eaLnBrk="0" algn="r"/>
+            <a:fld id="{F7021451-1387-4CA6-816F-3879F97B5CBC}" type="slidenum">
+              <a:rPr b="0" lang="en-US"/>
+              <a:t>8</a:t>
+            </a:fld>
+            <a:endParaRPr lang="en-US"/>
+          </a:p>
+        </p:txBody>
+      </p:sp>
+    </p:spTree>
+  </p:cSld>
+  <p:clrMapOvr>
+    <a:masterClrMapping/>
+  </p:clrMapOvr>
+</p:sld>
+</file>
+
+<file path=ppt/slides/slide9.xml><?xml version="1.0" encoding="utf-8"?>
+<p:sld xmlns:a="http://schemas.openxmlformats.org/drawingml/2006/main" xmlns:r="http://schemas.openxmlformats.org/officeDocument/2006/relationships" xmlns:p="http://schemas.openxmlformats.org/presentationml/2006/main">
+  <p:cSld name="Slide 9">
+    <p:spTree>
+      <p:nvGrpSpPr>
+        <p:cNvPr id="1" name=""/>
+        <p:cNvGrpSpPr/>
+        <p:nvPr/>
+      </p:nvGrpSpPr>
+      <p:grpSpPr>
+        <a:xfrm>
+          <a:off x="0" y="0"/>
+          <a:ext cx="0" cy="0"/>
+          <a:chOff x="0" y="0"/>
+          <a:chExt cx="0" cy="0"/>
+        </a:xfrm>
+      </p:grpSpPr>
+      <p:sp>
+        <p:nvSpPr>
+          <p:cNvPr id="2" name="Text 0"/>
+          <p:cNvSpPr/>
+          <p:nvPr>
+            <p:ph idx="100" type="title" hasCustomPrompt="1"/>
+          </p:nvPr>
+        </p:nvSpPr>
+        <p:spPr>
+          <a:xfrm>
+            <a:off x="548640" y="320040"/>
+            <a:ext cx="11064240" cy="868680"/>
+          </a:xfrm>
+          <a:prstGeom prst="rect">
+            <a:avLst/>
+          </a:prstGeom>
+          <a:noFill/>
+          <a:ln/>
+        </p:spPr>
+        <p:txBody>
+          <a:bodyPr wrap="square" lIns="0" tIns="0" rIns="0" bIns="0" rtlCol="0" anchor="ctr"/>
+          <a:lstStyle/>
+          <a:p>
+            <a:pPr eaLnBrk="0" algn="l" indent="0" marL="0">
+              <a:buNone/>
+            </a:pPr>
+            <a:r>
+              <a:rPr lang="ko-KR" altLang="en-US" sz="4400" b="1" dirty="0">
+                <a:solidFill>
+                  <a:srgbClr val="1F2937"/>
+                </a:solidFill>
+                <a:latin typeface="맑은 고딕" pitchFamily="34" charset="0"/>
+                <a:ea typeface="맑은 고딕" pitchFamily="34" charset="-122"/>
+                <a:cs typeface="맑은 고딕" pitchFamily="34" charset="-120"/>
+              </a:rPr>
+              <a:t>비스듬히 보면</a:t>
+            </a:r>
+            <a:endParaRPr lang="ko-KR" sz="4400" dirty="0"/>
+          </a:p>
+        </p:txBody>
+      </p:sp>
+      <p:sp>
+        <p:nvSpPr>
+          <p:cNvPr id="3" name="S09-card104"/>
+          <p:cNvSpPr/>
+          <p:nvPr/>
+        </p:nvSpPr>
+        <p:spPr>
+          <a:xfrm>
+            <a:off x="548640" y="4897120"/>
+            <a:ext cx="5431536" cy="1320800"/>
+          </a:xfrm>
+          <a:prstGeom prst="roundRect">
+            <a:avLst>
+              <a:gd name="adj" fmla="val 8308"/>
+            </a:avLst>
+          </a:prstGeom>
+          <a:solidFill>
+            <a:srgbClr val="EAF3F1"/>
+          </a:solidFill>
+          <a:ln w="12700">
+            <a:solidFill>
+              <a:srgbClr val="EAF3F1"/>
+            </a:solidFill>
+            <a:prstDash val="solid"/>
+          </a:ln>
+        </p:spPr>
+      </p:sp>
+      <p:sp>
+        <p:nvSpPr>
+          <p:cNvPr id="4" name="S09-cardtext105"/>
+          <p:cNvSpPr txBox="1"/>
+          <p:nvPr/>
+        </p:nvSpPr>
+        <p:spPr>
+          <a:xfrm>
+            <a:off x="822960" y="5034280"/>
+            <a:ext cx="4882896" cy="1046480"/>
+          </a:xfrm>
+          <a:prstGeom prst="rect">
+            <a:avLst/>
+          </a:prstGeom>
+          <a:noFill/>
+          <a:ln/>
+        </p:spPr>
+        <p:txBody>
+          <a:bodyPr wrap="square" lIns="0" tIns="0" rIns="0" bIns="0" rtlCol="0" anchor="ctr"/>
+          <a:lstStyle/>
+          <a:p>
+            <a:pPr eaLnBrk="0" indent="0" marL="0">
+              <a:spcAft>
+                <a:spcPts val="600"/>
+              </a:spcAft>
+              <a:buNone/>
+            </a:pPr>
+            <a:r>
+              <a:rPr lang="ko-KR" altLang="en-US" sz="3200" dirty="0">
+                <a:solidFill>
+                  <a:srgbClr val="1F2937"/>
+                </a:solidFill>
+                <a:latin typeface="맑은 고딕" pitchFamily="34" charset="0"/>
+                <a:ea typeface="맑은 고딕" pitchFamily="34" charset="-122"/>
+                <a:cs typeface="맑은 고딕" pitchFamily="34" charset="-120"/>
+              </a:rPr>
+              <a:t>↘ 2, 4, 6, 8, 10: 2씩 커져요.</a:t>
+            </a:r>
+            <a:endParaRPr lang="ko-KR" sz="3200" dirty="0"/>
+          </a:p>
+        </p:txBody>
+      </p:sp>
+      <p:sp>
+        <p:nvSpPr>
+          <p:cNvPr id="5" name="S09-card106"/>
+          <p:cNvSpPr/>
+          <p:nvPr/>
+        </p:nvSpPr>
+        <p:spPr>
+          <a:xfrm>
+            <a:off x="6208776" y="4897120"/>
+            <a:ext cx="5431536" cy="1320800"/>
+          </a:xfrm>
+          <a:prstGeom prst="roundRect">
+            <a:avLst>
+              <a:gd name="adj" fmla="val 8308"/>
+            </a:avLst>
+          </a:prstGeom>
+          <a:solidFill>
+            <a:srgbClr val="EAF3F1"/>
+          </a:solidFill>
+          <a:ln w="12700">
+            <a:solidFill>
+              <a:srgbClr val="EAF3F1"/>
+            </a:solidFill>
+            <a:prstDash val="solid"/>
+          </a:ln>
+        </p:spPr>
+      </p:sp>
+      <p:sp>
+        <p:nvSpPr>
+          <p:cNvPr id="6" name="S09-cardtext107"/>
+          <p:cNvSpPr txBox="1"/>
+          <p:nvPr/>
+        </p:nvSpPr>
+        <p:spPr>
+          <a:xfrm>
+            <a:off x="6483096" y="5034280"/>
+            <a:ext cx="4882896" cy="1046480"/>
+          </a:xfrm>
+          <a:prstGeom prst="rect">
+            <a:avLst/>
+          </a:prstGeom>
+          <a:noFill/>
+          <a:ln/>
+        </p:spPr>
+        <p:txBody>
+          <a:bodyPr wrap="square" lIns="0" tIns="0" rIns="0" bIns="0" rtlCol="0" anchor="ctr"/>
+          <a:lstStyle/>
+          <a:p>
+            <a:pPr eaLnBrk="0" indent="0" marL="0">
+              <a:spcAft>
+                <a:spcPts val="600"/>
+              </a:spcAft>
+              <a:buNone/>
+            </a:pPr>
+            <a:r>
+              <a:rPr lang="ko-KR" altLang="en-US" sz="3200" dirty="0">
+                <a:solidFill>
+                  <a:srgbClr val="1F2937"/>
+                </a:solidFill>
+                <a:latin typeface="맑은 고딕" pitchFamily="34" charset="0"/>
+                <a:ea typeface="맑은 고딕" pitchFamily="34" charset="-122"/>
+                <a:cs typeface="맑은 고딕" pitchFamily="34" charset="-120"/>
+              </a:rPr>
+              <a:t>↙ 6, 6, 6, 6, 6: 모두 같아요.</a:t>
+            </a:r>
+            <a:endParaRPr lang="ko-KR" sz="3200" dirty="0"/>
+          </a:p>
+        </p:txBody>
+      </p:sp>
+      <p:graphicFrame>
+        <p:nvGraphicFramePr>
+          <p:cNvPr id="10" name="S09-table108"/>
+          <p:cNvGraphicFramePr>
+            <a:graphicFrameLocks noGrp="1"/>
+          </p:cNvGraphicFramePr>
+          <p:nvPr>
+            <p:extLst>
+              <p:ext uri="{D42A27DB-BD31-4B8C-83A1-F6EECF244321}">
+                <p14:modId xmlns:p14="http://schemas.microsoft.com/office/powerpoint/2010/main" val="1579011935"/>
+              </p:ext>
+            </p:extLst>
+          </p:nvPr>
+        </p:nvGraphicFramePr>
+        <p:xfrm>
+          <a:off x="1156716" y="1461770"/>
+          <a:ext cx="9875520" cy="914400"/>
+        </p:xfrm>
+        <a:graphic>
+          <a:graphicData uri="http://schemas.openxmlformats.org/drawingml/2006/table">
+            <a:tbl>
+              <a:tblPr/>
+              <a:tblGrid>
+                <a:gridCol w="1645920"/>
+                <a:gridCol w="1645920"/>
+                <a:gridCol w="1645920"/>
+                <a:gridCol w="1645920"/>
+                <a:gridCol w="1645920"/>
+                <a:gridCol w="1645920"/>
+              </a:tblGrid>
+              <a:tr h="511810">
+                <a:tc>
+                  <a:txBody>
+                    <a:bodyPr/>
+                    <a:lstStyle/>
+                    <a:p>
+                      <a:pPr eaLnBrk="0" algn="ctr" indent="0" marL="0">
+                        <a:buNone/>
+                      </a:pPr>
+                      <a:r>
+                        <a:rPr lang="en-US" sz="2600" b="1" dirty="0">
+                          <a:solidFill>
+                            <a:srgbClr val="1F2937"/>
+                          </a:solidFill>
+                          <a:latin typeface="맑은 고딕" pitchFamily="34" charset="0"/>
+                          <a:ea typeface="맑은 고딕" pitchFamily="34" charset="-122"/>
+                          <a:cs typeface="맑은 고딕" pitchFamily="34" charset="-120"/>
+                        </a:rPr>
+                        <a:t>+</a:t>
+                      </a:r>
+                      <a:endParaRPr lang="en-US" sz="2600" dirty="0">
+                        <a:latin typeface="맑은 고딕" charset="0"/>
+                        <a:ea typeface="맑은 고딕" charset="0"/>
+                        <a:cs typeface="맑은 고딕" charset="0"/>
+                      </a:endParaRPr>
+                    </a:p>
+                  </a:txBody>
+                  <a:tcPr marL="38100" marR="38100" marT="38100" marB="38100" anchor="ctr">
+                    <a:lnL w="12700" cap="flat" cmpd="sng" algn="ctr">
+                      <a:solidFill>
+                        <a:srgbClr val="94A3B8"/>
+                      </a:solidFill>
+                      <a:prstDash val="solid"/>
+                      <a:round/>
+                      <a:headEnd type="none" w="med" len="med"/>
+                      <a:tailEnd type="none" w="med" len="med"/>
+                    </a:lnL>
+                    <a:lnR w="12700" cap="flat" cmpd="sng" algn="ctr">
+                      <a:solidFill>
+                        <a:srgbClr val="94A3B8"/>
+                      </a:solidFill>
+                      <a:prstDash val="solid"/>
+                      <a:round/>
+                      <a:headEnd type="none" w="med" len="med"/>
+                      <a:tailEnd type="none" w="med" len="med"/>
+                    </a:lnR>
+                    <a:lnT w="12700" cap="flat" cmpd="sng" algn="ctr">
+                      <a:solidFill>
+                        <a:srgbClr val="94A3B8"/>
+                      </a:solidFill>
+                      <a:prstDash val="solid"/>
+                      <a:round/>
+                      <a:headEnd type="none" w="med" len="med"/>
+                      <a:tailEnd type="none" w="med" len="med"/>
+                    </a:lnT>
+                    <a:lnB w="12700" cap="flat" cmpd="sng" algn="ctr">
+                      <a:solidFill>
+                        <a:srgbClr val="94A3B8"/>
+                      </a:solidFill>
+                      <a:prstDash val="solid"/>
+                      <a:round/>
+                      <a:headEnd type="none" w="med" len="med"/>
+                      <a:tailEnd type="none" w="med" len="med"/>
+                    </a:lnB>
+                    <a:solidFill>
+                      <a:srgbClr val="EAF3F1"/>
+                    </a:solidFill>
+                  </a:tcPr>
+                </a:tc>
+                <a:tc>
+                  <a:txBody>
+                    <a:bodyPr/>
+                    <a:lstStyle/>
+                    <a:p>
+                      <a:pPr eaLnBrk="0" algn="ctr" indent="0" marL="0">
+                        <a:buNone/>
+                      </a:pPr>
+                      <a:r>
+                        <a:rPr lang="en-US" sz="2600" b="1" dirty="0">
+                          <a:solidFill>
+                            <a:srgbClr val="1F2937"/>
+                          </a:solidFill>
+                          <a:latin typeface="맑은 고딕" pitchFamily="34" charset="0"/>
+                          <a:ea typeface="맑은 고딕" pitchFamily="34" charset="-122"/>
+                          <a:cs typeface="맑은 고딕" pitchFamily="34" charset="-120"/>
+                        </a:rPr>
+                        <a:t>1</a:t>
+                      </a:r>
+                      <a:endParaRPr lang="en-US" sz="2600" dirty="0">
+                        <a:latin typeface="맑은 고딕" charset="0"/>
+                        <a:ea typeface="맑은 고딕" charset="0"/>
+                        <a:cs typeface="맑은 고딕" charset="0"/>
+                      </a:endParaRPr>
+                    </a:p>
+                  </a:txBody>
+                  <a:tcPr marL="38100" marR="38100" marT="38100" marB="38100" anchor="ctr">
+                    <a:lnL w="12700" cap="flat" cmpd="sng" algn="ctr">
+                      <a:solidFill>
+                        <a:srgbClr val="94A3B8"/>
+                      </a:solidFill>
+                      <a:prstDash val="solid"/>
+                      <a:round/>
+                      <a:headEnd type="none" w="med" len="med"/>
+                      <a:tailEnd type="none" w="med" len="med"/>
+                    </a:lnL>
+                    <a:lnR w="12700" cap="flat" cmpd="sng" algn="ctr">
+                      <a:solidFill>
+                        <a:srgbClr val="94A3B8"/>
+                      </a:solidFill>
+                      <a:prstDash val="solid"/>
+                      <a:round/>
+                      <a:headEnd type="none" w="med" len="med"/>
+                      <a:tailEnd type="none" w="med" len="med"/>
+                    </a:lnR>
+                    <a:lnT w="12700" cap="flat" cmpd="sng" algn="ctr">
+                      <a:solidFill>
+                        <a:srgbClr val="94A3B8"/>
+                      </a:solidFill>
+                      <a:prstDash val="solid"/>
+                      <a:round/>
+                      <a:headEnd type="none" w="med" len="med"/>
+                      <a:tailEnd type="none" w="med" len="med"/>
+                    </a:lnT>
+                    <a:lnB w="12700" cap="flat" cmpd="sng" algn="ctr">
+                      <a:solidFill>
+                        <a:srgbClr val="94A3B8"/>
+                      </a:solidFill>
+                      <a:prstDash val="solid"/>
+                      <a:round/>
+                      <a:headEnd type="none" w="med" len="med"/>
+                      <a:tailEnd type="none" w="med" len="med"/>
+                    </a:lnB>
+                    <a:solidFill>
+                      <a:srgbClr val="EAF3F1"/>
+                    </a:solidFill>
+                  </a:tcPr>
+                </a:tc>
+                <a:tc>
+                  <a:txBody>
+                    <a:bodyPr/>
+                    <a:lstStyle/>
+                    <a:p>
+                      <a:pPr eaLnBrk="0" algn="ctr" indent="0" marL="0">
+                        <a:buNone/>
+                      </a:pPr>
+                      <a:r>
+                        <a:rPr lang="en-US" sz="2600" b="1" dirty="0">
+                          <a:solidFill>
+                            <a:srgbClr val="1F2937"/>
+                          </a:solidFill>
+                          <a:latin typeface="맑은 고딕" pitchFamily="34" charset="0"/>
+                          <a:ea typeface="맑은 고딕" pitchFamily="34" charset="-122"/>
+                          <a:cs typeface="맑은 고딕" pitchFamily="34" charset="-120"/>
+                        </a:rPr>
+                        <a:t>2</a:t>
+                      </a:r>
+                      <a:endParaRPr lang="en-US" sz="2600" dirty="0">
+                        <a:latin typeface="맑은 고딕" charset="0"/>
+                        <a:ea typeface="맑은 고딕" charset="0"/>
+                        <a:cs typeface="맑은 고딕" charset="0"/>
+                      </a:endParaRPr>
+                    </a:p>
+                  </a:txBody>
+                  <a:tcPr marL="38100" marR="38100" marT="38100" marB="38100" anchor="ctr">
+                    <a:lnL w="12700" cap="flat" cmpd="sng" algn="ctr">
+                      <a:solidFill>
+                        <a:srgbClr val="94A3B8"/>
+                      </a:solidFill>
+                      <a:prstDash val="solid"/>
+                      <a:round/>
+                      <a:headEnd type="none" w="med" len="med"/>
+                      <a:tailEnd type="none" w="med" len="med"/>
+                    </a:lnL>
+                    <a:lnR w="12700" cap="flat" cmpd="sng" algn="ctr">
+                      <a:solidFill>
+                        <a:srgbClr val="94A3B8"/>
+                      </a:solidFill>
+                      <a:prstDash val="solid"/>
+                      <a:round/>
+                      <a:headEnd type="none" w="med" len="med"/>
+                      <a:tailEnd type="none" w="med" len="med"/>
+                    </a:lnR>
+                    <a:lnT w="12700" cap="flat" cmpd="sng" algn="ctr">
+                      <a:solidFill>
+                        <a:srgbClr val="94A3B8"/>
+                      </a:solidFill>
+                      <a:prstDash val="solid"/>
+                      <a:round/>
+                      <a:headEnd type="none" w="med" len="med"/>
+                      <a:tailEnd type="none" w="med" len="med"/>
+                    </a:lnT>
+                    <a:lnB w="12700" cap="flat" cmpd="sng" algn="ctr">
+                      <a:solidFill>
+                        <a:srgbClr val="94A3B8"/>
+                      </a:solidFill>
+                      <a:prstDash val="solid"/>
+                      <a:round/>
+                      <a:headEnd type="none" w="med" len="med"/>
+                      <a:tailEnd type="none" w="med" len="med"/>
+                    </a:lnB>
+                    <a:solidFill>
+                      <a:srgbClr val="EAF3F1"/>
+                    </a:solidFill>
+                  </a:tcPr>
+                </a:tc>
+                <a:tc>
+                  <a:txBody>
+                    <a:bodyPr/>
+                    <a:lstStyle/>
+                    <a:p>
+                      <a:pPr eaLnBrk="0" algn="ctr" indent="0" marL="0">
+                        <a:buNone/>
+                      </a:pPr>
+                      <a:r>
+                        <a:rPr lang="en-US" sz="2600" b="1" dirty="0">
+                          <a:solidFill>
+                            <a:srgbClr val="1F2937"/>
+                          </a:solidFill>
+                          <a:latin typeface="맑은 고딕" pitchFamily="34" charset="0"/>
+                          <a:ea typeface="맑은 고딕" pitchFamily="34" charset="-122"/>
+                          <a:cs typeface="맑은 고딕" pitchFamily="34" charset="-120"/>
+                        </a:rPr>
+                        <a:t>3</a:t>
+                      </a:r>
+                      <a:endParaRPr lang="en-US" sz="2600" dirty="0">
+                        <a:latin typeface="맑은 고딕" charset="0"/>
+                        <a:ea typeface="맑은 고딕" charset="0"/>
+                        <a:cs typeface="맑은 고딕" charset="0"/>
+                      </a:endParaRPr>
+                    </a:p>
+                  </a:txBody>
+                  <a:tcPr marL="38100" marR="38100" marT="38100" marB="38100" anchor="ctr">
+                    <a:lnL w="12700" cap="flat" cmpd="sng" algn="ctr">
+                      <a:solidFill>
+                        <a:srgbClr val="94A3B8"/>
+                      </a:solidFill>
+                      <a:prstDash val="solid"/>
+                      <a:round/>
+                      <a:headEnd type="none" w="med" len="med"/>
+                      <a:tailEnd type="none" w="med" len="med"/>
+                    </a:lnL>
+                    <a:lnR w="12700" cap="flat" cmpd="sng" algn="ctr">
+                      <a:solidFill>
+                        <a:srgbClr val="94A3B8"/>
+                      </a:solidFill>
+                      <a:prstDash val="solid"/>
+                      <a:round/>
+                      <a:headEnd type="none" w="med" len="med"/>
+                      <a:tailEnd type="none" w="med" len="med"/>
+                    </a:lnR>
+                    <a:lnT w="12700" cap="flat" cmpd="sng" algn="ctr">
+                      <a:solidFill>
+                        <a:srgbClr val="94A3B8"/>
+                      </a:solidFill>
+                      <a:prstDash val="solid"/>
+                      <a:round/>
+                      <a:headEnd type="none" w="med" len="med"/>
+                      <a:tailEnd type="none" w="med" len="med"/>
+                    </a:lnT>
+                    <a:lnB w="12700" cap="flat" cmpd="sng" algn="ctr">
+                      <a:solidFill>
+                        <a:srgbClr val="94A3B8"/>
+                      </a:solidFill>
+                      <a:prstDash val="solid"/>
+                      <a:round/>
+                      <a:headEnd type="none" w="med" len="med"/>
+                      <a:tailEnd type="none" w="med" len="med"/>
+                    </a:lnB>
+                    <a:solidFill>
+                      <a:srgbClr val="EAF3F1"/>
+                    </a:solidFill>
+                  </a:tcPr>
+                </a:tc>
+                <a:tc>
+                  <a:txBody>
+                    <a:bodyPr/>
+                    <a:lstStyle/>
+                    <a:p>
+                      <a:pPr eaLnBrk="0" algn="ctr" indent="0" marL="0">
+                        <a:buNone/>
+                      </a:pPr>
+                      <a:r>
+                        <a:rPr lang="en-US" sz="2600" b="1" dirty="0">
+                          <a:solidFill>
+                            <a:srgbClr val="1F2937"/>
+                          </a:solidFill>
+                          <a:latin typeface="맑은 고딕" pitchFamily="34" charset="0"/>
+                          <a:ea typeface="맑은 고딕" pitchFamily="34" charset="-122"/>
+                          <a:cs typeface="맑은 고딕" pitchFamily="34" charset="-120"/>
+                        </a:rPr>
+                        <a:t>4</a:t>
+                      </a:r>
+                      <a:endParaRPr lang="en-US" sz="2600" dirty="0">
+                        <a:latin typeface="맑은 고딕" charset="0"/>
+                        <a:ea typeface="맑은 고딕" charset="0"/>
+                        <a:cs typeface="맑은 고딕" charset="0"/>
+                      </a:endParaRPr>
+                    </a:p>
+                  </a:txBody>
+                  <a:tcPr marL="38100" marR="38100" marT="38100" marB="38100" anchor="ctr">
+                    <a:lnL w="12700" cap="flat" cmpd="sng" algn="ctr">
+                      <a:solidFill>
+                        <a:srgbClr val="94A3B8"/>
+                      </a:solidFill>
+                      <a:prstDash val="solid"/>
+                      <a:round/>
+                      <a:headEnd type="none" w="med" len="med"/>
+                      <a:tailEnd type="none" w="med" len="med"/>
+                    </a:lnL>
+                    <a:lnR w="12700" cap="flat" cmpd="sng" algn="ctr">
+                      <a:solidFill>
+                        <a:srgbClr val="94A3B8"/>
+                      </a:solidFill>
+                      <a:prstDash val="solid"/>
+                      <a:round/>
+                      <a:headEnd type="none" w="med" len="med"/>
+                      <a:tailEnd type="none" w="med" len="med"/>
+                    </a:lnR>
+                    <a:lnT w="12700" cap="flat" cmpd="sng" algn="ctr">
+                      <a:solidFill>
+                        <a:srgbClr val="94A3B8"/>
+                      </a:solidFill>
+                      <a:prstDash val="solid"/>
+                      <a:round/>
+                      <a:headEnd type="none" w="med" len="med"/>
+                      <a:tailEnd type="none" w="med" len="med"/>
+                    </a:lnT>
+                    <a:lnB w="12700" cap="flat" cmpd="sng" algn="ctr">
+                      <a:solidFill>
+                        <a:srgbClr val="94A3B8"/>
+                      </a:solidFill>
+                      <a:prstDash val="solid"/>
+                      <a:round/>
+                      <a:headEnd type="none" w="med" len="med"/>
+                      <a:tailEnd type="none" w="med" len="med"/>
+                    </a:lnB>
+                    <a:solidFill>
+                      <a:srgbClr val="EAF3F1"/>
+                    </a:solidFill>
+                  </a:tcPr>
+                </a:tc>
+                <a:tc>
+                  <a:txBody>
+                    <a:bodyPr/>
+                    <a:lstStyle/>
+                    <a:p>
+                      <a:pPr eaLnBrk="0" algn="ctr" indent="0" marL="0">
+                        <a:buNone/>
+                      </a:pPr>
+                      <a:r>
+                        <a:rPr lang="en-US" sz="2600" b="1" dirty="0">
+                          <a:solidFill>
+                            <a:srgbClr val="1F2937"/>
+                          </a:solidFill>
+                          <a:latin typeface="맑은 고딕" pitchFamily="34" charset="0"/>
+                          <a:ea typeface="맑은 고딕" pitchFamily="34" charset="-122"/>
+                          <a:cs typeface="맑은 고딕" pitchFamily="34" charset="-120"/>
+                        </a:rPr>
+                        <a:t>5</a:t>
+                      </a:r>
+                      <a:endParaRPr lang="en-US" sz="2600" dirty="0">
+                        <a:latin typeface="맑은 고딕" charset="0"/>
+                        <a:ea typeface="맑은 고딕" charset="0"/>
+                        <a:cs typeface="맑은 고딕" charset="0"/>
+                      </a:endParaRPr>
+                    </a:p>
+                  </a:txBody>
+                  <a:tcPr marL="38100" marR="38100" marT="38100" marB="38100" anchor="ctr">
+                    <a:lnL w="12700" cap="flat" cmpd="sng" algn="ctr">
+                      <a:solidFill>
+                        <a:srgbClr val="94A3B8"/>
+                      </a:solidFill>
+                      <a:prstDash val="solid"/>
+                      <a:round/>
+                      <a:headEnd type="none" w="med" len="med"/>
+                      <a:tailEnd type="none" w="med" len="med"/>
+                    </a:lnL>
+                    <a:lnR w="12700" cap="flat" cmpd="sng" algn="ctr">
+                      <a:solidFill>
+                        <a:srgbClr val="94A3B8"/>
+                      </a:solidFill>
+                      <a:prstDash val="solid"/>
+                      <a:round/>
+                      <a:headEnd type="none" w="med" len="med"/>
+                      <a:tailEnd type="none" w="med" len="med"/>
+                    </a:lnR>
+                    <a:lnT w="12700" cap="flat" cmpd="sng" algn="ctr">
+                      <a:solidFill>
+                        <a:srgbClr val="94A3B8"/>
+                      </a:solidFill>
+                      <a:prstDash val="solid"/>
+                      <a:round/>
+                      <a:headEnd type="none" w="med" len="med"/>
+                      <a:tailEnd type="none" w="med" len="med"/>
+                    </a:lnT>
+                    <a:lnB w="12700" cap="flat" cmpd="sng" algn="ctr">
+                      <a:solidFill>
+                        <a:srgbClr val="94A3B8"/>
+                      </a:solidFill>
+                      <a:prstDash val="solid"/>
+                      <a:round/>
+                      <a:headEnd type="none" w="med" len="med"/>
+                      <a:tailEnd type="none" w="med" len="med"/>
+                    </a:lnB>
+                    <a:solidFill>
+                      <a:srgbClr val="EAF3F1"/>
+                    </a:solidFill>
+                  </a:tcPr>
+                </a:tc>
+              </a:tr>
+              <a:tr h="511810">
+                <a:tc>
+                  <a:txBody>
+                    <a:bodyPr/>
+                    <a:lstStyle/>
+                    <a:p>
+                      <a:pPr eaLnBrk="0" algn="ctr" indent="0" marL="0">
+                        <a:buNone/>
+                      </a:pPr>
+                      <a:r>
+                        <a:rPr lang="en-US" sz="2600" b="1" dirty="0">
+                          <a:solidFill>
+                            <a:srgbClr val="1F2937"/>
+                          </a:solidFill>
+                          <a:latin typeface="맑은 고딕" pitchFamily="34" charset="0"/>
+                          <a:ea typeface="맑은 고딕" pitchFamily="34" charset="-122"/>
+                          <a:cs typeface="맑은 고딕" pitchFamily="34" charset="-120"/>
+                        </a:rPr>
+                        <a:t>1</a:t>
+                      </a:r>
+                      <a:endParaRPr lang="en-US" sz="2600" dirty="0">
+                        <a:latin typeface="맑은 고딕" charset="0"/>
+                        <a:ea typeface="맑은 고딕" charset="0"/>
+                        <a:cs typeface="맑은 고딕" charset="0"/>
+                      </a:endParaRPr>
+                    </a:p>
+                  </a:txBody>
+                  <a:tcPr marL="38100" marR="38100" marT="38100" marB="38100" anchor="ctr">
+                    <a:lnL w="12700" cap="flat" cmpd="sng" algn="ctr">
+                      <a:solidFill>
+                        <a:srgbClr val="94A3B8"/>
+                      </a:solidFill>
+                      <a:prstDash val="solid"/>
+                      <a:round/>
+                      <a:headEnd type="none" w="med" len="med"/>
+                      <a:tailEnd type="none" w="med" len="med"/>
+                    </a:lnL>
+                    <a:lnR w="12700" cap="flat" cmpd="sng" algn="ctr">
+                      <a:solidFill>
+                        <a:srgbClr val="94A3B8"/>
+                      </a:solidFill>
+                      <a:prstDash val="solid"/>
+                      <a:round/>
+                      <a:headEnd type="none" w="med" len="med"/>
+                      <a:tailEnd type="none" w="med" len="med"/>
+                    </a:lnR>
+                    <a:lnT w="12700" cap="flat" cmpd="sng" algn="ctr">
+                      <a:solidFill>
+                        <a:srgbClr val="94A3B8"/>
+                      </a:solidFill>
+                      <a:prstDash val="solid"/>
+                      <a:round/>
+                      <a:headEnd type="none" w="med" len="med"/>
+                      <a:tailEnd type="none" w="med" len="med"/>
+                    </a:lnT>
+                    <a:lnB w="12700" cap="flat" cmpd="sng" algn="ctr">
+                      <a:solidFill>
+                        <a:srgbClr val="94A3B8"/>
+                      </a:solidFill>
+                      <a:prstDash val="solid"/>
+                      <a:round/>
+                      <a:headEnd type="none" w="med" len="med"/>
+                      <a:tailEnd type="none" w="med" len="med"/>
+                    </a:lnB>
+                    <a:solidFill>
+                      <a:srgbClr val="EAF3F1"/>
+                    </a:solidFill>
+                  </a:tcPr>
+                </a:tc>
+                <a:tc>
+                  <a:txBody>
+                    <a:bodyPr/>
+                    <a:lstStyle/>
+                    <a:p>
+                      <a:pPr eaLnBrk="0" algn="ctr" indent="0" marL="0">
+                        <a:buNone/>
+                      </a:pPr>
+                      <a:r>
+                        <a:rPr lang="en-US" sz="2600" dirty="0">
+                          <a:solidFill>
+                            <a:srgbClr val="1F2937"/>
+                          </a:solidFill>
+                          <a:latin typeface="맑은 고딕" pitchFamily="34" charset="0"/>
+                          <a:ea typeface="맑은 고딕" pitchFamily="34" charset="-122"/>
+                          <a:cs typeface="맑은 고딕" pitchFamily="34" charset="-120"/>
+                        </a:rPr>
+                        <a:t>2</a:t>
+                      </a:r>
+                      <a:endParaRPr lang="en-US" sz="2600" dirty="0">
+                        <a:latin typeface="맑은 고딕" charset="0"/>
+                        <a:ea typeface="맑은 고딕" charset="0"/>
+                        <a:cs typeface="맑은 고딕" charset="0"/>
+                      </a:endParaRPr>
+                    </a:p>
+                  </a:txBody>
+                  <a:tcPr marL="38100" marR="38100" marT="38100" marB="38100" anchor="ctr">
+                    <a:lnL w="12700" cap="flat" cmpd="sng" algn="ctr">
+                      <a:solidFill>
+                        <a:srgbClr val="94A3B8"/>
+                      </a:solidFill>
+                      <a:prstDash val="solid"/>
+                      <a:round/>
+                      <a:headEnd type="none" w="med" len="med"/>
+                      <a:tailEnd type="none" w="med" len="med"/>
+                    </a:lnL>
+                    <a:lnR w="12700" cap="flat" cmpd="sng" algn="ctr">
+                      <a:solidFill>
+                        <a:srgbClr val="94A3B8"/>
+                      </a:solidFill>
+                      <a:prstDash val="solid"/>
+                      <a:round/>
+                      <a:headEnd type="none" w="med" len="med"/>
+                      <a:tailEnd type="none" w="med" len="med"/>
+                    </a:lnR>
+                    <a:lnT w="12700" cap="flat" cmpd="sng" algn="ctr">
+                      <a:solidFill>
+                        <a:srgbClr val="94A3B8"/>
+                      </a:solidFill>
+                      <a:prstDash val="solid"/>
+                      <a:round/>
+                      <a:headEnd type="none" w="med" len="med"/>
+                      <a:tailEnd type="none" w="med" len="med"/>
+                    </a:lnT>
+                    <a:lnB w="12700" cap="flat" cmpd="sng" algn="ctr">
+                      <a:solidFill>
+                        <a:srgbClr val="94A3B8"/>
+                      </a:solidFill>
+                      <a:prstDash val="solid"/>
+                      <a:round/>
+                      <a:headEnd type="none" w="med" len="med"/>
+                      <a:tailEnd type="none" w="med" len="med"/>
+                    </a:lnB>
+                    <a:solidFill>
+                      <a:srgbClr val="FFFFFF"/>
+                    </a:solidFill>
+                  </a:tcPr>
+                </a:tc>
+                <a:tc>
+                  <a:txBody>
+                    <a:bodyPr/>
+                    <a:lstStyle/>
+                    <a:p>
+                      <a:pPr eaLnBrk="0" algn="ctr" indent="0" marL="0">
+                        <a:buNone/>
+                      </a:pPr>
+                      <a:r>
+                        <a:rPr lang="en-US" sz="2600" dirty="0">
+                          <a:solidFill>
+                            <a:srgbClr val="1F2937"/>
+                          </a:solidFill>
+                          <a:latin typeface="맑은 고딕" pitchFamily="34" charset="0"/>
+                          <a:ea typeface="맑은 고딕" pitchFamily="34" charset="-122"/>
+                          <a:cs typeface="맑은 고딕" pitchFamily="34" charset="-120"/>
+                        </a:rPr>
+                        <a:t>3</a:t>
+                      </a:r>
+                      <a:endParaRPr lang="en-US" sz="2600" dirty="0">
+                        <a:latin typeface="맑은 고딕" charset="0"/>
+                        <a:ea typeface="맑은 고딕" charset="0"/>
+                        <a:cs typeface="맑은 고딕" charset="0"/>
+                      </a:endParaRPr>
+                    </a:p>
+                  </a:txBody>
+                  <a:tcPr marL="38100" marR="38100" marT="38100" marB="38100" anchor="ctr">
+                    <a:lnL w="12700" cap="flat" cmpd="sng" algn="ctr">
+                      <a:solidFill>
+                        <a:srgbClr val="94A3B8"/>
+                      </a:solidFill>
+                      <a:prstDash val="solid"/>
+                      <a:round/>
+                      <a:headEnd type="none" w="med" len="med"/>
+                      <a:tailEnd type="none" w="med" len="med"/>
+                    </a:lnL>
+                    <a:lnR w="12700" cap="flat" cmpd="sng" algn="ctr">
+                      <a:solidFill>
+                        <a:srgbClr val="94A3B8"/>
+                      </a:solidFill>
+                      <a:prstDash val="solid"/>
+                      <a:round/>
+                      <a:headEnd type="none" w="med" len="med"/>
+                      <a:tailEnd type="none" w="med" len="med"/>
+                    </a:lnR>
+                    <a:lnT w="12700" cap="flat" cmpd="sng" algn="ctr">
+                      <a:solidFill>
+                        <a:srgbClr val="94A3B8"/>
+                      </a:solidFill>
+                      <a:prstDash val="solid"/>
+                      <a:round/>
+                      <a:headEnd type="none" w="med" len="med"/>
+                      <a:tailEnd type="none" w="med" len="med"/>
+                    </a:lnT>
+                    <a:lnB w="12700" cap="flat" cmpd="sng" algn="ctr">
+                      <a:solidFill>
+                        <a:srgbClr val="94A3B8"/>
+                      </a:solidFill>
+                      <a:prstDash val="solid"/>
+                      <a:round/>
+                      <a:headEnd type="none" w="med" len="med"/>
+                      <a:tailEnd type="none" w="med" len="med"/>
+                    </a:lnB>
+                    <a:solidFill>
+                      <a:srgbClr val="FFFFFF"/>
+                    </a:solidFill>
+                  </a:tcPr>
+                </a:tc>
+                <a:tc>
+                  <a:txBody>
+                    <a:bodyPr/>
+                    <a:lstStyle/>
+                    <a:p>
+                      <a:pPr eaLnBrk="0" algn="ctr" indent="0" marL="0">
+                        <a:buNone/>
+                      </a:pPr>
+                      <a:r>
+                        <a:rPr lang="en-US" sz="2600" dirty="0">
+                          <a:solidFill>
+                            <a:srgbClr val="1F2937"/>
+                          </a:solidFill>
+                          <a:latin typeface="맑은 고딕" pitchFamily="34" charset="0"/>
+                          <a:ea typeface="맑은 고딕" pitchFamily="34" charset="-122"/>
+                          <a:cs typeface="맑은 고딕" pitchFamily="34" charset="-120"/>
+                        </a:rPr>
+                        <a:t>4</a:t>
+                      </a:r>
+                      <a:endParaRPr lang="en-US" sz="2600" dirty="0">
+                        <a:latin typeface="맑은 고딕" charset="0"/>
+                        <a:ea typeface="맑은 고딕" charset="0"/>
+                        <a:cs typeface="맑은 고딕" charset="0"/>
+                      </a:endParaRPr>
+                    </a:p>
+                  </a:txBody>
+                  <a:tcPr marL="38100" marR="38100" marT="38100" marB="38100" anchor="ctr">
+                    <a:lnL w="12700" cap="flat" cmpd="sng" algn="ctr">
+                      <a:solidFill>
+                        <a:srgbClr val="94A3B8"/>
+                      </a:solidFill>
+                      <a:prstDash val="solid"/>
+                      <a:round/>
+                      <a:headEnd type="none" w="med" len="med"/>
+                      <a:tailEnd type="none" w="med" len="med"/>
+                    </a:lnL>
+                    <a:lnR w="12700" cap="flat" cmpd="sng" algn="ctr">
+                      <a:solidFill>
+                        <a:srgbClr val="94A3B8"/>
+                      </a:solidFill>
+                      <a:prstDash val="solid"/>
+                      <a:round/>
+                      <a:headEnd type="none" w="med" len="med"/>
+                      <a:tailEnd type="none" w="med" len="med"/>
+                    </a:lnR>
+                    <a:lnT w="12700" cap="flat" cmpd="sng" algn="ctr">
+                      <a:solidFill>
+                        <a:srgbClr val="94A3B8"/>
+                      </a:solidFill>
+                      <a:prstDash val="solid"/>
+                      <a:round/>
+                      <a:headEnd type="none" w="med" len="med"/>
+                      <a:tailEnd type="none" w="med" len="med"/>
+                    </a:lnT>
+                    <a:lnB w="12700" cap="flat" cmpd="sng" algn="ctr">
+                      <a:solidFill>
+                        <a:srgbClr val="94A3B8"/>
+                      </a:solidFill>
+                      <a:prstDash val="solid"/>
+                      <a:round/>
+                      <a:headEnd type="none" w="med" len="med"/>
+                      <a:tailEnd type="none" w="med" len="med"/>
+                    </a:lnB>
+                    <a:solidFill>
+                      <a:srgbClr val="FFFFFF"/>
+                    </a:solidFill>
+                  </a:tcPr>
+                </a:tc>
+                <a:tc>
+                  <a:txBody>
+                    <a:bodyPr/>
+                    <a:lstStyle/>
+                    <a:p>
+                      <a:pPr eaLnBrk="0" algn="ctr" indent="0" marL="0">
+                        <a:buNone/>
+                      </a:pPr>
+                      <a:r>
+                        <a:rPr lang="en-US" sz="2600" dirty="0">
+                          <a:solidFill>
+                            <a:srgbClr val="1F2937"/>
+                          </a:solidFill>
+                          <a:latin typeface="맑은 고딕" pitchFamily="34" charset="0"/>
+                          <a:ea typeface="맑은 고딕" pitchFamily="34" charset="-122"/>
+                          <a:cs typeface="맑은 고딕" pitchFamily="34" charset="-120"/>
+                        </a:rPr>
+                        <a:t>5</a:t>
+                      </a:r>
+                      <a:endParaRPr lang="en-US" sz="2600" dirty="0">
+                        <a:latin typeface="맑은 고딕" charset="0"/>
+                        <a:ea typeface="맑은 고딕" charset="0"/>
+                        <a:cs typeface="맑은 고딕" charset="0"/>
+                      </a:endParaRPr>
+                    </a:p>
+                  </a:txBody>
+                  <a:tcPr marL="38100" marR="38100" marT="38100" marB="38100" anchor="ctr">
+                    <a:lnL w="12700" cap="flat" cmpd="sng" algn="ctr">
+                      <a:solidFill>
+                        <a:srgbClr val="94A3B8"/>
+                      </a:solidFill>
+                      <a:prstDash val="solid"/>
+                      <a:round/>
+                      <a:headEnd type="none" w="med" len="med"/>
+                      <a:tailEnd type="none" w="med" len="med"/>
+                    </a:lnL>
+                    <a:lnR w="12700" cap="flat" cmpd="sng" algn="ctr">
+                      <a:solidFill>
+                        <a:srgbClr val="94A3B8"/>
+                      </a:solidFill>
+                      <a:prstDash val="solid"/>
+                      <a:round/>
+                      <a:headEnd type="none" w="med" len="med"/>
+                      <a:tailEnd type="none" w="med" len="med"/>
+                    </a:lnR>
+                    <a:lnT w="12700" cap="flat" cmpd="sng" algn="ctr">
+                      <a:solidFill>
+                        <a:srgbClr val="94A3B8"/>
+                      </a:solidFill>
+                      <a:prstDash val="solid"/>
+                      <a:round/>
+                      <a:headEnd type="none" w="med" len="med"/>
+                      <a:tailEnd type="none" w="med" len="med"/>
+                    </a:lnT>
+                    <a:lnB w="12700" cap="flat" cmpd="sng" algn="ctr">
+                      <a:solidFill>
+                        <a:srgbClr val="94A3B8"/>
+                      </a:solidFill>
+                      <a:prstDash val="solid"/>
+                      <a:round/>
+                      <a:headEnd type="none" w="med" len="med"/>
+                      <a:tailEnd type="none" w="med" len="med"/>
+                    </a:lnB>
+                    <a:solidFill>
+                      <a:srgbClr val="FFFFFF"/>
+                    </a:solidFill>
+                  </a:tcPr>
+                </a:tc>
+                <a:tc>
+                  <a:txBody>
+                    <a:bodyPr/>
+                    <a:lstStyle/>
+                    <a:p>
+                      <a:pPr eaLnBrk="0" algn="ctr" indent="0" marL="0">
+                        <a:buNone/>
+                      </a:pPr>
+                      <a:r>
+                        <a:rPr lang="en-US" sz="2600" dirty="0">
+                          <a:solidFill>
+                            <a:srgbClr val="1F2937"/>
+                          </a:solidFill>
+                          <a:latin typeface="맑은 고딕" pitchFamily="34" charset="0"/>
+                          <a:ea typeface="맑은 고딕" pitchFamily="34" charset="-122"/>
+                          <a:cs typeface="맑은 고딕" pitchFamily="34" charset="-120"/>
+                        </a:rPr>
+                        <a:t>6</a:t>
+                      </a:r>
+                      <a:endParaRPr lang="en-US" sz="2600" dirty="0">
+                        <a:latin typeface="맑은 고딕" charset="0"/>
+                        <a:ea typeface="맑은 고딕" charset="0"/>
+                        <a:cs typeface="맑은 고딕" charset="0"/>
+                      </a:endParaRPr>
+                    </a:p>
+                  </a:txBody>
+                  <a:tcPr marL="38100" marR="38100" marT="38100" marB="38100" anchor="ctr">
+                    <a:lnL w="12700" cap="flat" cmpd="sng" algn="ctr">
+                      <a:solidFill>
+                        <a:srgbClr val="94A3B8"/>
+                      </a:solidFill>
+                      <a:prstDash val="solid"/>
+                      <a:round/>
+                      <a:headEnd type="none" w="med" len="med"/>
+                      <a:tailEnd type="none" w="med" len="med"/>
+                    </a:lnL>
+                    <a:lnR w="12700" cap="flat" cmpd="sng" algn="ctr">
+                      <a:solidFill>
+                        <a:srgbClr val="94A3B8"/>
+                      </a:solidFill>
+                      <a:prstDash val="solid"/>
+                      <a:round/>
+                      <a:headEnd type="none" w="med" len="med"/>
+                      <a:tailEnd type="none" w="med" len="med"/>
+                    </a:lnR>
+                    <a:lnT w="12700" cap="flat" cmpd="sng" algn="ctr">
+                      <a:solidFill>
+                        <a:srgbClr val="94A3B8"/>
+                      </a:solidFill>
+                      <a:prstDash val="solid"/>
+                      <a:round/>
+                      <a:headEnd type="none" w="med" len="med"/>
+                      <a:tailEnd type="none" w="med" len="med"/>
+                    </a:lnT>
+                    <a:lnB w="12700" cap="flat" cmpd="sng" algn="ctr">
+                      <a:solidFill>
+                        <a:srgbClr val="94A3B8"/>
+                      </a:solidFill>
+                      <a:prstDash val="solid"/>
+                      <a:round/>
+                      <a:headEnd type="none" w="med" len="med"/>
+                      <a:tailEnd type="none" w="med" len="med"/>
+                    </a:lnB>
+                    <a:solidFill>
+                      <a:srgbClr val="FFFFFF"/>
+                    </a:solidFill>
+                  </a:tcPr>
+                </a:tc>
+              </a:tr>
+              <a:tr h="511810">
+                <a:tc>
+                  <a:txBody>
+                    <a:bodyPr/>
+                    <a:lstStyle/>
+                    <a:p>
+                      <a:pPr eaLnBrk="0" algn="ctr" indent="0" marL="0">
+                        <a:buNone/>
+                      </a:pPr>
+                      <a:r>
+                        <a:rPr lang="en-US" sz="2600" b="1" dirty="0">
+                          <a:solidFill>
+                            <a:srgbClr val="1F2937"/>
+                          </a:solidFill>
+                          <a:latin typeface="맑은 고딕" pitchFamily="34" charset="0"/>
+                          <a:ea typeface="맑은 고딕" pitchFamily="34" charset="-122"/>
+                          <a:cs typeface="맑은 고딕" pitchFamily="34" charset="-120"/>
+                        </a:rPr>
+                        <a:t>2</a:t>
+                      </a:r>
+                      <a:endParaRPr lang="en-US" sz="2600" dirty="0">
+                        <a:latin typeface="맑은 고딕" charset="0"/>
+                        <a:ea typeface="맑은 고딕" charset="0"/>
+                        <a:cs typeface="맑은 고딕" charset="0"/>
+                      </a:endParaRPr>
+                    </a:p>
+                  </a:txBody>
+                  <a:tcPr marL="38100" marR="38100" marT="38100" marB="38100" anchor="ctr">
+                    <a:lnL w="12700" cap="flat" cmpd="sng" algn="ctr">
+                      <a:solidFill>
+                        <a:srgbClr val="94A3B8"/>
+                      </a:solidFill>
+                      <a:prstDash val="solid"/>
+                      <a:round/>
+                      <a:headEnd type="none" w="med" len="med"/>
+                      <a:tailEnd type="none" w="med" len="med"/>
+                    </a:lnL>
+                    <a:lnR w="12700" cap="flat" cmpd="sng" algn="ctr">
+                      <a:solidFill>
+                        <a:srgbClr val="94A3B8"/>
+                      </a:solidFill>
+                      <a:prstDash val="solid"/>
+                      <a:round/>
+                      <a:headEnd type="none" w="med" len="med"/>
+                      <a:tailEnd type="none" w="med" len="med"/>
+                    </a:lnR>
+                    <a:lnT w="12700" cap="flat" cmpd="sng" algn="ctr">
+                      <a:solidFill>
+                        <a:srgbClr val="94A3B8"/>
+                      </a:solidFill>
+                      <a:prstDash val="solid"/>
+                      <a:round/>
+                      <a:headEnd type="none" w="med" len="med"/>
+                      <a:tailEnd type="none" w="med" len="med"/>
+                    </a:lnT>
+                    <a:lnB w="12700" cap="flat" cmpd="sng" algn="ctr">
+                      <a:solidFill>
+                        <a:srgbClr val="94A3B8"/>
+                      </a:solidFill>
+                      <a:prstDash val="solid"/>
+                      <a:round/>
+                      <a:headEnd type="none" w="med" len="med"/>
+                      <a:tailEnd type="none" w="med" len="med"/>
+                    </a:lnB>
+                    <a:solidFill>
+                      <a:srgbClr val="EAF3F1"/>
+                    </a:solidFill>
+                  </a:tcPr>
+                </a:tc>
+                <a:tc>
+                  <a:txBody>
+                    <a:bodyPr/>
+                    <a:lstStyle/>
+                    <a:p>
+                      <a:pPr eaLnBrk="0" algn="ctr" indent="0" marL="0">
+                        <a:buNone/>
+                      </a:pPr>
+                      <a:r>
+                        <a:rPr lang="en-US" sz="2600" dirty="0">
+                          <a:solidFill>
+                            <a:srgbClr val="1F2937"/>
+                          </a:solidFill>
+                          <a:latin typeface="맑은 고딕" pitchFamily="34" charset="0"/>
+                          <a:ea typeface="맑은 고딕" pitchFamily="34" charset="-122"/>
+                          <a:cs typeface="맑은 고딕" pitchFamily="34" charset="-120"/>
+                        </a:rPr>
+                        <a:t>3</a:t>
+                      </a:r>
+                      <a:endParaRPr lang="en-US" sz="2600" dirty="0">
+                        <a:latin typeface="맑은 고딕" charset="0"/>
+                        <a:ea typeface="맑은 고딕" charset="0"/>
+                        <a:cs typeface="맑은 고딕" charset="0"/>
+                      </a:endParaRPr>
+                    </a:p>
+                  </a:txBody>
+                  <a:tcPr marL="38100" marR="38100" marT="38100" marB="38100" anchor="ctr">
+                    <a:lnL w="12700" cap="flat" cmpd="sng" algn="ctr">
+                      <a:solidFill>
+                        <a:srgbClr val="94A3B8"/>
+                      </a:solidFill>
+                      <a:prstDash val="solid"/>
+                      <a:round/>
+                      <a:headEnd type="none" w="med" len="med"/>
+                      <a:tailEnd type="none" w="med" len="med"/>
+                    </a:lnL>
+                    <a:lnR w="12700" cap="flat" cmpd="sng" algn="ctr">
+                      <a:solidFill>
+                        <a:srgbClr val="94A3B8"/>
+                      </a:solidFill>
+                      <a:prstDash val="solid"/>
+                      <a:round/>
+                      <a:headEnd type="none" w="med" len="med"/>
+                      <a:tailEnd type="none" w="med" len="med"/>
+                    </a:lnR>
+                    <a:lnT w="12700" cap="flat" cmpd="sng" algn="ctr">
+                      <a:solidFill>
+                        <a:srgbClr val="94A3B8"/>
+                      </a:solidFill>
+                      <a:prstDash val="solid"/>
+                      <a:round/>
+                      <a:headEnd type="none" w="med" len="med"/>
+                      <a:tailEnd type="none" w="med" len="med"/>
+                    </a:lnT>
+                    <a:lnB w="12700" cap="flat" cmpd="sng" algn="ctr">
+                      <a:solidFill>
+                        <a:srgbClr val="94A3B8"/>
+                      </a:solidFill>
+                      <a:prstDash val="solid"/>
+                      <a:round/>
+                      <a:headEnd type="none" w="med" len="med"/>
+                      <a:tailEnd type="none" w="med" len="med"/>
+                    </a:lnB>
+                    <a:solidFill>
+                      <a:srgbClr val="FFFFFF"/>
+                    </a:solidFill>
+                  </a:tcPr>
+                </a:tc>
+                <a:tc>
+                  <a:txBody>
+                    <a:bodyPr/>
+                    <a:lstStyle/>
+                    <a:p>
+                      <a:pPr eaLnBrk="0" algn="ctr" indent="0" marL="0">
+                        <a:buNone/>
+                      </a:pPr>
+                      <a:r>
+                        <a:rPr lang="en-US" sz="2600" dirty="0">
+                          <a:solidFill>
+                            <a:srgbClr val="1F2937"/>
+                          </a:solidFill>
+                          <a:latin typeface="맑은 고딕" pitchFamily="34" charset="0"/>
+                          <a:ea typeface="맑은 고딕" pitchFamily="34" charset="-122"/>
+                          <a:cs typeface="맑은 고딕" pitchFamily="34" charset="-120"/>
+                        </a:rPr>
+                        <a:t>4</a:t>
+                      </a:r>
+                      <a:endParaRPr lang="en-US" sz="2600" dirty="0">
+                        <a:latin typeface="맑은 고딕" charset="0"/>
+                        <a:ea typeface="맑은 고딕" charset="0"/>
+                        <a:cs typeface="맑은 고딕" charset="0"/>
+                      </a:endParaRPr>
+                    </a:p>
+                  </a:txBody>
+                  <a:tcPr marL="38100" marR="38100" marT="38100" marB="38100" anchor="ctr">
+                    <a:lnL w="12700" cap="flat" cmpd="sng" algn="ctr">
+                      <a:solidFill>
+                        <a:srgbClr val="94A3B8"/>
+                      </a:solidFill>
+                      <a:prstDash val="solid"/>
+                      <a:round/>
+                      <a:headEnd type="none" w="med" len="med"/>
+                      <a:tailEnd type="none" w="med" len="med"/>
+                    </a:lnL>
+                    <a:lnR w="12700" cap="flat" cmpd="sng" algn="ctr">
+                      <a:solidFill>
+                        <a:srgbClr val="94A3B8"/>
+                      </a:solidFill>
+                      <a:prstDash val="solid"/>
+                      <a:round/>
+                      <a:headEnd type="none" w="med" len="med"/>
+                      <a:tailEnd type="none" w="med" len="med"/>
+                    </a:lnR>
+                    <a:lnT w="12700" cap="flat" cmpd="sng" algn="ctr">
+                      <a:solidFill>
+                        <a:srgbClr val="94A3B8"/>
+                      </a:solidFill>
+                      <a:prstDash val="solid"/>
+                      <a:round/>
+                      <a:headEnd type="none" w="med" len="med"/>
+                      <a:tailEnd type="none" w="med" len="med"/>
+                    </a:lnT>
+                    <a:lnB w="12700" cap="flat" cmpd="sng" algn="ctr">
+                      <a:solidFill>
+                        <a:srgbClr val="94A3B8"/>
+                      </a:solidFill>
+                      <a:prstDash val="solid"/>
+                      <a:round/>
+                      <a:headEnd type="none" w="med" len="med"/>
+                      <a:tailEnd type="none" w="med" len="med"/>
+                    </a:lnB>
+                    <a:solidFill>
+                      <a:srgbClr val="FFFFFF"/>
+                    </a:solidFill>
+                  </a:tcPr>
+                </a:tc>
+                <a:tc>
+                  <a:txBody>
+                    <a:bodyPr/>
+                    <a:lstStyle/>
+                    <a:p>
+                      <a:pPr eaLnBrk="0" algn="ctr" indent="0" marL="0">
+                        <a:buNone/>
+                      </a:pPr>
+                      <a:r>
+                        <a:rPr lang="en-US" sz="2600" dirty="0">
+                          <a:solidFill>
+                            <a:srgbClr val="1F2937"/>
+                          </a:solidFill>
+                          <a:latin typeface="맑은 고딕" pitchFamily="34" charset="0"/>
+                          <a:ea typeface="맑은 고딕" pitchFamily="34" charset="-122"/>
+                          <a:cs typeface="맑은 고딕" pitchFamily="34" charset="-120"/>
+                        </a:rPr>
+                        <a:t>5</a:t>
+                      </a:r>
+                      <a:endParaRPr lang="en-US" sz="2600" dirty="0">
+                        <a:latin typeface="맑은 고딕" charset="0"/>
+                        <a:ea typeface="맑은 고딕" charset="0"/>
+                        <a:cs typeface="맑은 고딕" charset="0"/>
+                      </a:endParaRPr>
+                    </a:p>
+                  </a:txBody>
+                  <a:tcPr marL="38100" marR="38100" marT="38100" marB="38100" anchor="ctr">
+                    <a:lnL w="12700" cap="flat" cmpd="sng" algn="ctr">
+                      <a:solidFill>
+                        <a:srgbClr val="94A3B8"/>
+                      </a:solidFill>
+                      <a:prstDash val="solid"/>
+                      <a:round/>
+                      <a:headEnd type="none" w="med" len="med"/>
+                      <a:tailEnd type="none" w="med" len="med"/>
+                    </a:lnL>
+                    <a:lnR w="12700" cap="flat" cmpd="sng" algn="ctr">
+                      <a:solidFill>
+                        <a:srgbClr val="94A3B8"/>
+                      </a:solidFill>
+                      <a:prstDash val="solid"/>
+                      <a:round/>
+                      <a:headEnd type="none" w="med" len="med"/>
+                      <a:tailEnd type="none" w="med" len="med"/>
+                    </a:lnR>
+                    <a:lnT w="12700" cap="flat" cmpd="sng" algn="ctr">
+                      <a:solidFill>
+                        <a:srgbClr val="94A3B8"/>
+                      </a:solidFill>
+                      <a:prstDash val="solid"/>
+                      <a:round/>
+                      <a:headEnd type="none" w="med" len="med"/>
+                      <a:tailEnd type="none" w="med" len="med"/>
+                    </a:lnT>
+                    <a:lnB w="12700" cap="flat" cmpd="sng" algn="ctr">
+                      <a:solidFill>
+                        <a:srgbClr val="94A3B8"/>
+                      </a:solidFill>
+                      <a:prstDash val="solid"/>
+                      <a:round/>
+                      <a:headEnd type="none" w="med" len="med"/>
+                      <a:tailEnd type="none" w="med" len="med"/>
+                    </a:lnB>
+                    <a:solidFill>
+                      <a:srgbClr val="FFFFFF"/>
+                    </a:solidFill>
+                  </a:tcPr>
+                </a:tc>
+                <a:tc>
+                  <a:txBody>
+                    <a:bodyPr/>
+                    <a:lstStyle/>
+                    <a:p>
+                      <a:pPr eaLnBrk="0" algn="ctr" indent="0" marL="0">
+                        <a:buNone/>
+                      </a:pPr>
+                      <a:r>
+                        <a:rPr lang="en-US" sz="2600" dirty="0">
+                          <a:solidFill>
+                            <a:srgbClr val="1F2937"/>
+                          </a:solidFill>
+                          <a:latin typeface="맑은 고딕" pitchFamily="34" charset="0"/>
+                          <a:ea typeface="맑은 고딕" pitchFamily="34" charset="-122"/>
+                          <a:cs typeface="맑은 고딕" pitchFamily="34" charset="-120"/>
+                        </a:rPr>
+                        <a:t>6</a:t>
+                      </a:r>
+                      <a:endParaRPr lang="en-US" sz="2600" dirty="0">
+                        <a:latin typeface="맑은 고딕" charset="0"/>
+                        <a:ea typeface="맑은 고딕" charset="0"/>
+                        <a:cs typeface="맑은 고딕" charset="0"/>
+                      </a:endParaRPr>
+                    </a:p>
+                  </a:txBody>
+                  <a:tcPr marL="38100" marR="38100" marT="38100" marB="38100" anchor="ctr">
+                    <a:lnL w="12700" cap="flat" cmpd="sng" algn="ctr">
+                      <a:solidFill>
+                        <a:srgbClr val="94A3B8"/>
+                      </a:solidFill>
+                      <a:prstDash val="solid"/>
+                      <a:round/>
+                      <a:headEnd type="none" w="med" len="med"/>
+                      <a:tailEnd type="none" w="med" len="med"/>
+                    </a:lnL>
+                    <a:lnR w="12700" cap="flat" cmpd="sng" algn="ctr">
+                      <a:solidFill>
+                        <a:srgbClr val="94A3B8"/>
+                      </a:solidFill>
+                      <a:prstDash val="solid"/>
+                      <a:round/>
+                      <a:headEnd type="none" w="med" len="med"/>
+                      <a:tailEnd type="none" w="med" len="med"/>
+                    </a:lnR>
+                    <a:lnT w="12700" cap="flat" cmpd="sng" algn="ctr">
+                      <a:solidFill>
+                        <a:srgbClr val="94A3B8"/>
+                      </a:solidFill>
+                      <a:prstDash val="solid"/>
+                      <a:round/>
+                      <a:headEnd type="none" w="med" len="med"/>
+                      <a:tailEnd type="none" w="med" len="med"/>
+                    </a:lnT>
+                    <a:lnB w="12700" cap="flat" cmpd="sng" algn="ctr">
+                      <a:solidFill>
+                        <a:srgbClr val="94A3B8"/>
+                      </a:solidFill>
+                      <a:prstDash val="solid"/>
+                      <a:round/>
+                      <a:headEnd type="none" w="med" len="med"/>
+                      <a:tailEnd type="none" w="med" len="med"/>
+                    </a:lnB>
+                    <a:solidFill>
+                      <a:srgbClr val="FFFFFF"/>
+                    </a:solidFill>
+                  </a:tcPr>
+                </a:tc>
+                <a:tc>
+                  <a:txBody>
+                    <a:bodyPr/>
+                    <a:lstStyle/>
+                    <a:p>
+                      <a:pPr eaLnBrk="0" algn="ctr" indent="0" marL="0">
+                        <a:buNone/>
+                      </a:pPr>
+                      <a:r>
+                        <a:rPr lang="en-US" sz="2600" dirty="0">
+                          <a:solidFill>
+                            <a:srgbClr val="1F2937"/>
+                          </a:solidFill>
+                          <a:latin typeface="맑은 고딕" pitchFamily="34" charset="0"/>
+                          <a:ea typeface="맑은 고딕" pitchFamily="34" charset="-122"/>
+                          <a:cs typeface="맑은 고딕" pitchFamily="34" charset="-120"/>
+                        </a:rPr>
+                        <a:t>7</a:t>
+                      </a:r>
+                      <a:endParaRPr lang="en-US" sz="2600" dirty="0">
+                        <a:latin typeface="맑은 고딕" charset="0"/>
+                        <a:ea typeface="맑은 고딕" charset="0"/>
+                        <a:cs typeface="맑은 고딕" charset="0"/>
+                      </a:endParaRPr>
+                    </a:p>
+                  </a:txBody>
+                  <a:tcPr marL="38100" marR="38100" marT="38100" marB="38100" anchor="ctr">
+                    <a:lnL w="12700" cap="flat" cmpd="sng" algn="ctr">
+                      <a:solidFill>
+                        <a:srgbClr val="94A3B8"/>
+                      </a:solidFill>
+                      <a:prstDash val="solid"/>
+                      <a:round/>
+                      <a:headEnd type="none" w="med" len="med"/>
+                      <a:tailEnd type="none" w="med" len="med"/>
+                    </a:lnL>
+                    <a:lnR w="12700" cap="flat" cmpd="sng" algn="ctr">
+                      <a:solidFill>
+                        <a:srgbClr val="94A3B8"/>
+                      </a:solidFill>
+                      <a:prstDash val="solid"/>
+                      <a:round/>
+                      <a:headEnd type="none" w="med" len="med"/>
+                      <a:tailEnd type="none" w="med" len="med"/>
+                    </a:lnR>
+                    <a:lnT w="12700" cap="flat" cmpd="sng" algn="ctr">
+                      <a:solidFill>
+                        <a:srgbClr val="94A3B8"/>
+                      </a:solidFill>
+                      <a:prstDash val="solid"/>
+                      <a:round/>
+                      <a:headEnd type="none" w="med" len="med"/>
+                      <a:tailEnd type="none" w="med" len="med"/>
+                    </a:lnT>
+                    <a:lnB w="12700" cap="flat" cmpd="sng" algn="ctr">
+                      <a:solidFill>
+                        <a:srgbClr val="94A3B8"/>
+                      </a:solidFill>
+                      <a:prstDash val="solid"/>
+                      <a:round/>
+                      <a:headEnd type="none" w="med" len="med"/>
+                      <a:tailEnd type="none" w="med" len="med"/>
+                    </a:lnB>
+                    <a:solidFill>
+                      <a:srgbClr val="FFFFFF"/>
+                    </a:solidFill>
+                  </a:tcPr>
+                </a:tc>
+              </a:tr>
+              <a:tr h="511810">
+                <a:tc>
+                  <a:txBody>
+                    <a:bodyPr/>
+                    <a:lstStyle/>
+                    <a:p>
+                      <a:pPr eaLnBrk="0" algn="ctr" indent="0" marL="0">
+                        <a:buNone/>
+                      </a:pPr>
+                      <a:r>
+                        <a:rPr lang="en-US" sz="2600" b="1" dirty="0">
+                          <a:solidFill>
+                            <a:srgbClr val="1F2937"/>
+                          </a:solidFill>
+                          <a:latin typeface="맑은 고딕" pitchFamily="34" charset="0"/>
+                          <a:ea typeface="맑은 고딕" pitchFamily="34" charset="-122"/>
+                          <a:cs typeface="맑은 고딕" pitchFamily="34" charset="-120"/>
+                        </a:rPr>
+                        <a:t>3</a:t>
+                      </a:r>
+                      <a:endParaRPr lang="en-US" sz="2600" dirty="0">
+                        <a:latin typeface="맑은 고딕" charset="0"/>
+                        <a:ea typeface="맑은 고딕" charset="0"/>
+                        <a:cs typeface="맑은 고딕" charset="0"/>
+                      </a:endParaRPr>
+                    </a:p>
+                  </a:txBody>
+                  <a:tcPr marL="38100" marR="38100" marT="38100" marB="38100" anchor="ctr">
+                    <a:lnL w="12700" cap="flat" cmpd="sng" algn="ctr">
+                      <a:solidFill>
+                        <a:srgbClr val="94A3B8"/>
+                      </a:solidFill>
+                      <a:prstDash val="solid"/>
+                      <a:round/>
+                      <a:headEnd type="none" w="med" len="med"/>
+                      <a:tailEnd type="none" w="med" len="med"/>
+                    </a:lnL>
+                    <a:lnR w="12700" cap="flat" cmpd="sng" algn="ctr">
+                      <a:solidFill>
+                        <a:srgbClr val="94A3B8"/>
+                      </a:solidFill>
+                      <a:prstDash val="solid"/>
+                      <a:round/>
+                      <a:headEnd type="none" w="med" len="med"/>
+                      <a:tailEnd type="none" w="med" len="med"/>
+                    </a:lnR>
+                    <a:lnT w="12700" cap="flat" cmpd="sng" algn="ctr">
+                      <a:solidFill>
+                        <a:srgbClr val="94A3B8"/>
+                      </a:solidFill>
+                      <a:prstDash val="solid"/>
+                      <a:round/>
+                      <a:headEnd type="none" w="med" len="med"/>
+                      <a:tailEnd type="none" w="med" len="med"/>
+                    </a:lnT>
+                    <a:lnB w="12700" cap="flat" cmpd="sng" algn="ctr">
+                      <a:solidFill>
+                        <a:srgbClr val="94A3B8"/>
+                      </a:solidFill>
+                      <a:prstDash val="solid"/>
+                      <a:round/>
+                      <a:headEnd type="none" w="med" len="med"/>
+                      <a:tailEnd type="none" w="med" len="med"/>
+                    </a:lnB>
+                    <a:solidFill>
+                      <a:srgbClr val="EAF3F1"/>
+                    </a:solidFill>
+                  </a:tcPr>
+                </a:tc>
+                <a:tc>
+                  <a:txBody>
+                    <a:bodyPr/>
+                    <a:lstStyle/>
+                    <a:p>
+                      <a:pPr eaLnBrk="0" algn="ctr" indent="0" marL="0">
+                        <a:buNone/>
+                      </a:pPr>
+                      <a:r>
+                        <a:rPr lang="en-US" sz="2600" dirty="0">
+                          <a:solidFill>
+                            <a:srgbClr val="1F2937"/>
+                          </a:solidFill>
+                          <a:latin typeface="맑은 고딕" pitchFamily="34" charset="0"/>
+                          <a:ea typeface="맑은 고딕" pitchFamily="34" charset="-122"/>
+                          <a:cs typeface="맑은 고딕" pitchFamily="34" charset="-120"/>
+                        </a:rPr>
+                        <a:t>4</a:t>
+                      </a:r>
+                      <a:endParaRPr lang="en-US" sz="2600" dirty="0">
+                        <a:latin typeface="맑은 고딕" charset="0"/>
+                        <a:ea typeface="맑은 고딕" charset="0"/>
+                        <a:cs typeface="맑은 고딕" charset="0"/>
+                      </a:endParaRPr>
+                    </a:p>
+                  </a:txBody>
+                  <a:tcPr marL="38100" marR="38100" marT="38100" marB="38100" anchor="ctr">
+                    <a:lnL w="12700" cap="flat" cmpd="sng" algn="ctr">
+                      <a:solidFill>
+                        <a:srgbClr val="94A3B8"/>
+                      </a:solidFill>
+                      <a:prstDash val="solid"/>
+                      <a:round/>
+                      <a:headEnd type="none" w="med" len="med"/>
+                      <a:tailEnd type="none" w="med" len="med"/>
+                    </a:lnL>
+                    <a:lnR w="12700" cap="flat" cmpd="sng" algn="ctr">
+                      <a:solidFill>
+                        <a:srgbClr val="94A3B8"/>
+                      </a:solidFill>
+                      <a:prstDash val="solid"/>
+                      <a:round/>
+                      <a:headEnd type="none" w="med" len="med"/>
+                      <a:tailEnd type="none" w="med" len="med"/>
+                    </a:lnR>
+                    <a:lnT w="12700" cap="flat" cmpd="sng" algn="ctr">
+                      <a:solidFill>
+                        <a:srgbClr val="94A3B8"/>
+                      </a:solidFill>
+                      <a:prstDash val="solid"/>
+                      <a:round/>
+                      <a:headEnd type="none" w="med" len="med"/>
+                      <a:tailEnd type="none" w="med" len="med"/>
+                    </a:lnT>
+                    <a:lnB w="12700" cap="flat" cmpd="sng" algn="ctr">
+                      <a:solidFill>
+                        <a:srgbClr val="94A3B8"/>
+                      </a:solidFill>
+                      <a:prstDash val="solid"/>
+                      <a:round/>
+                      <a:headEnd type="none" w="med" len="med"/>
+                      <a:tailEnd type="none" w="med" len="med"/>
+                    </a:lnB>
+                    <a:solidFill>
+                      <a:srgbClr val="FFFFFF"/>
+                    </a:solidFill>
+                  </a:tcPr>
+                </a:tc>
+                <a:tc>
+                  <a:txBody>
+                    <a:bodyPr/>
+                    <a:lstStyle/>
+                    <a:p>
+                      <a:pPr eaLnBrk="0" algn="ctr" indent="0" marL="0">
+                        <a:buNone/>
+                      </a:pPr>
+                      <a:r>
+                        <a:rPr lang="en-US" sz="2600" dirty="0">
+                          <a:solidFill>
+                            <a:srgbClr val="1F2937"/>
+                          </a:solidFill>
+                          <a:latin typeface="맑은 고딕" pitchFamily="34" charset="0"/>
+                          <a:ea typeface="맑은 고딕" pitchFamily="34" charset="-122"/>
+                          <a:cs typeface="맑은 고딕" pitchFamily="34" charset="-120"/>
+                        </a:rPr>
+                        <a:t>5</a:t>
+                      </a:r>
+                      <a:endParaRPr lang="en-US" sz="2600" dirty="0">
+                        <a:latin typeface="맑은 고딕" charset="0"/>
+                        <a:ea typeface="맑은 고딕" charset="0"/>
+                        <a:cs typeface="맑은 고딕" charset="0"/>
+                      </a:endParaRPr>
+                    </a:p>
+                  </a:txBody>
+                  <a:tcPr marL="38100" marR="38100" marT="38100" marB="38100" anchor="ctr">
+                    <a:lnL w="12700" cap="flat" cmpd="sng" algn="ctr">
+                      <a:solidFill>
+                        <a:srgbClr val="94A3B8"/>
+                      </a:solidFill>
+                      <a:prstDash val="solid"/>
+                      <a:round/>
+                      <a:headEnd type="none" w="med" len="med"/>
+                      <a:tailEnd type="none" w="med" len="med"/>
+                    </a:lnL>
+                    <a:lnR w="12700" cap="flat" cmpd="sng" algn="ctr">
+                      <a:solidFill>
+                        <a:srgbClr val="94A3B8"/>
+                      </a:solidFill>
+                      <a:prstDash val="solid"/>
+                      <a:round/>
+                      <a:headEnd type="none" w="med" len="med"/>
+                      <a:tailEnd type="none" w="med" len="med"/>
+                    </a:lnR>
+                    <a:lnT w="12700" cap="flat" cmpd="sng" algn="ctr">
+                      <a:solidFill>
+                        <a:srgbClr val="94A3B8"/>
+                      </a:solidFill>
+                      <a:prstDash val="solid"/>
+                      <a:round/>
+                      <a:headEnd type="none" w="med" len="med"/>
+                      <a:tailEnd type="none" w="med" len="med"/>
+                    </a:lnT>
+                    <a:lnB w="12700" cap="flat" cmpd="sng" algn="ctr">
+                      <a:solidFill>
+                        <a:srgbClr val="94A3B8"/>
+                      </a:solidFill>
+                      <a:prstDash val="solid"/>
+                      <a:round/>
+                      <a:headEnd type="none" w="med" len="med"/>
+                      <a:tailEnd type="none" w="med" len="med"/>
+                    </a:lnB>
+                    <a:solidFill>
+                      <a:srgbClr val="FFFFFF"/>
+                    </a:solidFill>
+                  </a:tcPr>
+                </a:tc>
+                <a:tc>
+                  <a:txBody>
+                    <a:bodyPr/>
+                    <a:lstStyle/>
+                    <a:p>
+                      <a:pPr eaLnBrk="0" algn="ctr" indent="0" marL="0">
+                        <a:buNone/>
+                      </a:pPr>
+                      <a:r>
+                        <a:rPr lang="en-US" sz="2600" dirty="0">
+                          <a:solidFill>
+                            <a:srgbClr val="1F2937"/>
+                          </a:solidFill>
+                          <a:latin typeface="맑은 고딕" pitchFamily="34" charset="0"/>
+                          <a:ea typeface="맑은 고딕" pitchFamily="34" charset="-122"/>
+                          <a:cs typeface="맑은 고딕" pitchFamily="34" charset="-120"/>
+                        </a:rPr>
+                        <a:t>6</a:t>
+                      </a:r>
+                      <a:endParaRPr lang="en-US" sz="2600" dirty="0">
+                        <a:latin typeface="맑은 고딕" charset="0"/>
+                        <a:ea typeface="맑은 고딕" charset="0"/>
+                        <a:cs typeface="맑은 고딕" charset="0"/>
+                      </a:endParaRPr>
+                    </a:p>
+                  </a:txBody>
+                  <a:tcPr marL="38100" marR="38100" marT="38100" marB="38100" anchor="ctr">
+                    <a:lnL w="12700" cap="flat" cmpd="sng" algn="ctr">
+                      <a:solidFill>
+                        <a:srgbClr val="94A3B8"/>
+                      </a:solidFill>
+                      <a:prstDash val="solid"/>
+                      <a:round/>
+                      <a:headEnd type="none" w="med" len="med"/>
+                      <a:tailEnd type="none" w="med" len="med"/>
+                    </a:lnL>
+                    <a:lnR w="12700" cap="flat" cmpd="sng" algn="ctr">
+                      <a:solidFill>
+                        <a:srgbClr val="94A3B8"/>
+                      </a:solidFill>
+                      <a:prstDash val="solid"/>
+                      <a:round/>
+                      <a:headEnd type="none" w="med" len="med"/>
+                      <a:tailEnd type="none" w="med" len="med"/>
+                    </a:lnR>
+                    <a:lnT w="12700" cap="flat" cmpd="sng" algn="ctr">
+                      <a:solidFill>
+                        <a:srgbClr val="94A3B8"/>
+                      </a:solidFill>
+                      <a:prstDash val="solid"/>
+                      <a:round/>
+                      <a:headEnd type="none" w="med" len="med"/>
+                      <a:tailEnd type="none" w="med" len="med"/>
+                    </a:lnT>
+                    <a:lnB w="12700" cap="flat" cmpd="sng" algn="ctr">
+                      <a:solidFill>
+                        <a:srgbClr val="94A3B8"/>
+                      </a:solidFill>
+                      <a:prstDash val="solid"/>
+                      <a:round/>
+                      <a:headEnd type="none" w="med" len="med"/>
+                      <a:tailEnd type="none" w="med" len="med"/>
+                    </a:lnB>
+                    <a:solidFill>
+                      <a:srgbClr val="FFFFFF"/>
+                    </a:solidFill>
+                  </a:tcPr>
+                </a:tc>
+                <a:tc>
+                  <a:txBody>
+                    <a:bodyPr/>
+                    <a:lstStyle/>
+                    <a:p>
+                      <a:pPr eaLnBrk="0" algn="ctr" indent="0" marL="0">
+                        <a:buNone/>
+                      </a:pPr>
+                      <a:r>
+                        <a:rPr lang="en-US" sz="2600" dirty="0">
+                          <a:solidFill>
+                            <a:srgbClr val="1F2937"/>
+                          </a:solidFill>
+                          <a:latin typeface="맑은 고딕" pitchFamily="34" charset="0"/>
+                          <a:ea typeface="맑은 고딕" pitchFamily="34" charset="-122"/>
+                          <a:cs typeface="맑은 고딕" pitchFamily="34" charset="-120"/>
+                        </a:rPr>
+                        <a:t>7</a:t>
+                      </a:r>
+                      <a:endParaRPr lang="en-US" sz="2600" dirty="0">
+                        <a:latin typeface="맑은 고딕" charset="0"/>
+                        <a:ea typeface="맑은 고딕" charset="0"/>
+                        <a:cs typeface="맑은 고딕" charset="0"/>
+                      </a:endParaRPr>
+                    </a:p>
+                  </a:txBody>
+                  <a:tcPr marL="38100" marR="38100" marT="38100" marB="38100" anchor="ctr">
+                    <a:lnL w="12700" cap="flat" cmpd="sng" algn="ctr">
+                      <a:solidFill>
+                        <a:srgbClr val="94A3B8"/>
+                      </a:solidFill>
+                      <a:prstDash val="solid"/>
+                      <a:round/>
+                      <a:headEnd type="none" w="med" len="med"/>
+                      <a:tailEnd type="none" w="med" len="med"/>
+                    </a:lnL>
+                    <a:lnR w="12700" cap="flat" cmpd="sng" algn="ctr">
+                      <a:solidFill>
+                        <a:srgbClr val="94A3B8"/>
+                      </a:solidFill>
+                      <a:prstDash val="solid"/>
+                      <a:round/>
+                      <a:headEnd type="none" w="med" len="med"/>
+                      <a:tailEnd type="none" w="med" len="med"/>
+                    </a:lnR>
+                    <a:lnT w="12700" cap="flat" cmpd="sng" algn="ctr">
+                      <a:solidFill>
+                        <a:srgbClr val="94A3B8"/>
+                      </a:solidFill>
+                      <a:prstDash val="solid"/>
+                      <a:round/>
+                      <a:headEnd type="none" w="med" len="med"/>
+                      <a:tailEnd type="none" w="med" len="med"/>
+                    </a:lnT>
+                    <a:lnB w="12700" cap="flat" cmpd="sng" algn="ctr">
+                      <a:solidFill>
+                        <a:srgbClr val="94A3B8"/>
+                      </a:solidFill>
+                      <a:prstDash val="solid"/>
+                      <a:round/>
+                      <a:headEnd type="none" w="med" len="med"/>
+                      <a:tailEnd type="none" w="med" len="med"/>
+                    </a:lnB>
+                    <a:solidFill>
+                      <a:srgbClr val="FFFFFF"/>
+                    </a:solidFill>
+                  </a:tcPr>
+                </a:tc>
+                <a:tc>
+                  <a:txBody>
+                    <a:bodyPr/>
+                    <a:lstStyle/>
+                    <a:p>
+                      <a:pPr eaLnBrk="0" algn="ctr" indent="0" marL="0">
+                        <a:buNone/>
+                      </a:pPr>
+                      <a:r>
+                        <a:rPr lang="en-US" sz="2600" dirty="0">
+                          <a:solidFill>
+                            <a:srgbClr val="1F2937"/>
+                          </a:solidFill>
+                          <a:latin typeface="맑은 고딕" pitchFamily="34" charset="0"/>
+                          <a:ea typeface="맑은 고딕" pitchFamily="34" charset="-122"/>
+                          <a:cs typeface="맑은 고딕" pitchFamily="34" charset="-120"/>
+                        </a:rPr>
+                        <a:t>8</a:t>
+                      </a:r>
+                      <a:endParaRPr lang="en-US" sz="2600" dirty="0">
+                        <a:latin typeface="맑은 고딕" charset="0"/>
+                        <a:ea typeface="맑은 고딕" charset="0"/>
+                        <a:cs typeface="맑은 고딕" charset="0"/>
+                      </a:endParaRPr>
+                    </a:p>
+                  </a:txBody>
+                  <a:tcPr marL="38100" marR="38100" marT="38100" marB="38100" anchor="ctr">
+                    <a:lnL w="12700" cap="flat" cmpd="sng" algn="ctr">
+                      <a:solidFill>
+                        <a:srgbClr val="94A3B8"/>
+                      </a:solidFill>
+                      <a:prstDash val="solid"/>
+                      <a:round/>
+                      <a:headEnd type="none" w="med" len="med"/>
+                      <a:tailEnd type="none" w="med" len="med"/>
+                    </a:lnL>
+                    <a:lnR w="12700" cap="flat" cmpd="sng" algn="ctr">
+                      <a:solidFill>
+                        <a:srgbClr val="94A3B8"/>
+                      </a:solidFill>
+                      <a:prstDash val="solid"/>
+                      <a:round/>
+                      <a:headEnd type="none" w="med" len="med"/>
+                      <a:tailEnd type="none" w="med" len="med"/>
+                    </a:lnR>
+                    <a:lnT w="12700" cap="flat" cmpd="sng" algn="ctr">
+                      <a:solidFill>
+                        <a:srgbClr val="94A3B8"/>
+                      </a:solidFill>
+                      <a:prstDash val="solid"/>
+                      <a:round/>
+                      <a:headEnd type="none" w="med" len="med"/>
+                      <a:tailEnd type="none" w="med" len="med"/>
+                    </a:lnT>
+                    <a:lnB w="12700" cap="flat" cmpd="sng" algn="ctr">
+                      <a:solidFill>
+                        <a:srgbClr val="94A3B8"/>
+                      </a:solidFill>
+                      <a:prstDash val="solid"/>
+                      <a:round/>
+                      <a:headEnd type="none" w="med" len="med"/>
+                      <a:tailEnd type="none" w="med" len="med"/>
+                    </a:lnB>
+                    <a:solidFill>
+                      <a:srgbClr val="FFFFFF"/>
+                    </a:solidFill>
+                  </a:tcPr>
+                </a:tc>
+              </a:tr>
+              <a:tr h="511810">
+                <a:tc>
+                  <a:txBody>
+                    <a:bodyPr/>
+                    <a:lstStyle/>
+                    <a:p>
+                      <a:pPr eaLnBrk="0" algn="ctr" indent="0" marL="0">
+                        <a:buNone/>
+                      </a:pPr>
+                      <a:r>
+                        <a:rPr lang="en-US" sz="2600" b="1" dirty="0">
+                          <a:solidFill>
+                            <a:srgbClr val="1F2937"/>
+                          </a:solidFill>
+                          <a:latin typeface="맑은 고딕" pitchFamily="34" charset="0"/>
+                          <a:ea typeface="맑은 고딕" pitchFamily="34" charset="-122"/>
+                          <a:cs typeface="맑은 고딕" pitchFamily="34" charset="-120"/>
+                        </a:rPr>
+                        <a:t>4</a:t>
+                      </a:r>
+                      <a:endParaRPr lang="en-US" sz="2600" dirty="0">
+                        <a:latin typeface="맑은 고딕" charset="0"/>
+                        <a:ea typeface="맑은 고딕" charset="0"/>
+                        <a:cs typeface="맑은 고딕" charset="0"/>
+                      </a:endParaRPr>
+                    </a:p>
+                  </a:txBody>
+                  <a:tcPr marL="38100" marR="38100" marT="38100" marB="38100" anchor="ctr">
+                    <a:lnL w="12700" cap="flat" cmpd="sng" algn="ctr">
+                      <a:solidFill>
+                        <a:srgbClr val="94A3B8"/>
+                      </a:solidFill>
+                      <a:prstDash val="solid"/>
+                      <a:round/>
+                      <a:headEnd type="none" w="med" len="med"/>
+                      <a:tailEnd type="none" w="med" len="med"/>
+                    </a:lnL>
+                    <a:lnR w="12700" cap="flat" cmpd="sng" algn="ctr">
+                      <a:solidFill>
+                        <a:srgbClr val="94A3B8"/>
+                      </a:solidFill>
+                      <a:prstDash val="solid"/>
+                      <a:round/>
+                      <a:headEnd type="none" w="med" len="med"/>
+                      <a:tailEnd type="none" w="med" len="med"/>
+                    </a:lnR>
+                    <a:lnT w="12700" cap="flat" cmpd="sng" algn="ctr">
+                      <a:solidFill>
+                        <a:srgbClr val="94A3B8"/>
+                      </a:solidFill>
+                      <a:prstDash val="solid"/>
+                      <a:round/>
+                      <a:headEnd type="none" w="med" len="med"/>
+                      <a:tailEnd type="none" w="med" len="med"/>
+                    </a:lnT>
+                    <a:lnB w="12700" cap="flat" cmpd="sng" algn="ctr">
+                      <a:solidFill>
+                        <a:srgbClr val="94A3B8"/>
+                      </a:solidFill>
+                      <a:prstDash val="solid"/>
+                      <a:round/>
+                      <a:headEnd type="none" w="med" len="med"/>
+                      <a:tailEnd type="none" w="med" len="med"/>
+                    </a:lnB>
+                    <a:solidFill>
+                      <a:srgbClr val="EAF3F1"/>
+                    </a:solidFill>
+                  </a:tcPr>
+                </a:tc>
+                <a:tc>
+                  <a:txBody>
+                    <a:bodyPr/>
+                    <a:lstStyle/>
+                    <a:p>
+                      <a:pPr eaLnBrk="0" algn="ctr" indent="0" marL="0">
+                        <a:buNone/>
+                      </a:pPr>
+                      <a:r>
+                        <a:rPr lang="en-US" sz="2600" dirty="0">
+                          <a:solidFill>
+                            <a:srgbClr val="1F2937"/>
+                          </a:solidFill>
+                          <a:latin typeface="맑은 고딕" pitchFamily="34" charset="0"/>
+                          <a:ea typeface="맑은 고딕" pitchFamily="34" charset="-122"/>
+                          <a:cs typeface="맑은 고딕" pitchFamily="34" charset="-120"/>
+                        </a:rPr>
+                        <a:t>5</a:t>
+                      </a:r>
+                      <a:endParaRPr lang="en-US" sz="2600" dirty="0">
+                        <a:latin typeface="맑은 고딕" charset="0"/>
+                        <a:ea typeface="맑은 고딕" charset="0"/>
+                        <a:cs typeface="맑은 고딕" charset="0"/>
+                      </a:endParaRPr>
+                    </a:p>
+                  </a:txBody>
+                  <a:tcPr marL="38100" marR="38100" marT="38100" marB="38100" anchor="ctr">
+                    <a:lnL w="12700" cap="flat" cmpd="sng" algn="ctr">
+                      <a:solidFill>
+                        <a:srgbClr val="94A3B8"/>
+                      </a:solidFill>
+                      <a:prstDash val="solid"/>
+                      <a:round/>
+                      <a:headEnd type="none" w="med" len="med"/>
+                      <a:tailEnd type="none" w="med" len="med"/>
+                    </a:lnL>
+                    <a:lnR w="12700" cap="flat" cmpd="sng" algn="ctr">
+                      <a:solidFill>
+                        <a:srgbClr val="94A3B8"/>
+                      </a:solidFill>
+                      <a:prstDash val="solid"/>
+                      <a:round/>
+                      <a:headEnd type="none" w="med" len="med"/>
+                      <a:tailEnd type="none" w="med" len="med"/>
+                    </a:lnR>
+                    <a:lnT w="12700" cap="flat" cmpd="sng" algn="ctr">
+                      <a:solidFill>
+                        <a:srgbClr val="94A3B8"/>
+                      </a:solidFill>
+                      <a:prstDash val="solid"/>
+                      <a:round/>
+                      <a:headEnd type="none" w="med" len="med"/>
+                      <a:tailEnd type="none" w="med" len="med"/>
+                    </a:lnT>
+                    <a:lnB w="12700" cap="flat" cmpd="sng" algn="ctr">
+                      <a:solidFill>
+                        <a:srgbClr val="94A3B8"/>
+                      </a:solidFill>
+                      <a:prstDash val="solid"/>
+                      <a:round/>
+                      <a:headEnd type="none" w="med" len="med"/>
+                      <a:tailEnd type="none" w="med" len="med"/>
+                    </a:lnB>
+                    <a:solidFill>
+                      <a:srgbClr val="FFFFFF"/>
+                    </a:solidFill>
+                  </a:tcPr>
+                </a:tc>
+                <a:tc>
+                  <a:txBody>
+                    <a:bodyPr/>
+                    <a:lstStyle/>
+                    <a:p>
+                      <a:pPr eaLnBrk="0" algn="ctr" indent="0" marL="0">
+                        <a:buNone/>
+                      </a:pPr>
+                      <a:r>
+                        <a:rPr lang="en-US" sz="2600" dirty="0">
+                          <a:solidFill>
+                            <a:srgbClr val="1F2937"/>
+                          </a:solidFill>
+                          <a:latin typeface="맑은 고딕" pitchFamily="34" charset="0"/>
+                          <a:ea typeface="맑은 고딕" pitchFamily="34" charset="-122"/>
+                          <a:cs typeface="맑은 고딕" pitchFamily="34" charset="-120"/>
+                        </a:rPr>
+                        <a:t>6</a:t>
+                      </a:r>
+                      <a:endParaRPr lang="en-US" sz="2600" dirty="0">
+                        <a:latin typeface="맑은 고딕" charset="0"/>
+                        <a:ea typeface="맑은 고딕" charset="0"/>
+                        <a:cs typeface="맑은 고딕" charset="0"/>
+                      </a:endParaRPr>
+                    </a:p>
+                  </a:txBody>
+                  <a:tcPr marL="38100" marR="38100" marT="38100" marB="38100" anchor="ctr">
+                    <a:lnL w="12700" cap="flat" cmpd="sng" algn="ctr">
+                      <a:solidFill>
+                        <a:srgbClr val="94A3B8"/>
+                      </a:solidFill>
+                      <a:prstDash val="solid"/>
+                      <a:round/>
+                      <a:headEnd type="none" w="med" len="med"/>
+                      <a:tailEnd type="none" w="med" len="med"/>
+                    </a:lnL>
+                    <a:lnR w="12700" cap="flat" cmpd="sng" algn="ctr">
+                      <a:solidFill>
+                        <a:srgbClr val="94A3B8"/>
+                      </a:solidFill>
+                      <a:prstDash val="solid"/>
+                      <a:round/>
+                      <a:headEnd type="none" w="med" len="med"/>
+                      <a:tailEnd type="none" w="med" len="med"/>
+                    </a:lnR>
+                    <a:lnT w="12700" cap="flat" cmpd="sng" algn="ctr">
+                      <a:solidFill>
+                        <a:srgbClr val="94A3B8"/>
+                      </a:solidFill>
+                      <a:prstDash val="solid"/>
+                      <a:round/>
+                      <a:headEnd type="none" w="med" len="med"/>
+                      <a:tailEnd type="none" w="med" len="med"/>
+                    </a:lnT>
+                    <a:lnB w="12700" cap="flat" cmpd="sng" algn="ctr">
+                      <a:solidFill>
+                        <a:srgbClr val="94A3B8"/>
+                      </a:solidFill>
+                      <a:prstDash val="solid"/>
+                      <a:round/>
+                      <a:headEnd type="none" w="med" len="med"/>
+                      <a:tailEnd type="none" w="med" len="med"/>
+                    </a:lnB>
+                    <a:solidFill>
+                      <a:srgbClr val="FFFFFF"/>
+                    </a:solidFill>
+                  </a:tcPr>
+                </a:tc>
+                <a:tc>
+                  <a:txBody>
+                    <a:bodyPr/>
+                    <a:lstStyle/>
+                    <a:p>
+                      <a:pPr eaLnBrk="0" algn="ctr" indent="0" marL="0">
+                        <a:buNone/>
+                      </a:pPr>
+                      <a:r>
+                        <a:rPr lang="en-US" sz="2600" dirty="0">
+                          <a:solidFill>
+                            <a:srgbClr val="1F2937"/>
+                          </a:solidFill>
+                          <a:latin typeface="맑은 고딕" pitchFamily="34" charset="0"/>
+                          <a:ea typeface="맑은 고딕" pitchFamily="34" charset="-122"/>
+                          <a:cs typeface="맑은 고딕" pitchFamily="34" charset="-120"/>
+                        </a:rPr>
+                        <a:t>7</a:t>
+                      </a:r>
+                      <a:endParaRPr lang="en-US" sz="2600" dirty="0">
+                        <a:latin typeface="맑은 고딕" charset="0"/>
+                        <a:ea typeface="맑은 고딕" charset="0"/>
+                        <a:cs typeface="맑은 고딕" charset="0"/>
+                      </a:endParaRPr>
+                    </a:p>
+                  </a:txBody>
+                  <a:tcPr marL="38100" marR="38100" marT="38100" marB="38100" anchor="ctr">
+                    <a:lnL w="12700" cap="flat" cmpd="sng" algn="ctr">
+                      <a:solidFill>
+                        <a:srgbClr val="94A3B8"/>
+                      </a:solidFill>
+                      <a:prstDash val="solid"/>
+                      <a:round/>
+                      <a:headEnd type="none" w="med" len="med"/>
+                      <a:tailEnd type="none" w="med" len="med"/>
+                    </a:lnL>
+                    <a:lnR w="12700" cap="flat" cmpd="sng" algn="ctr">
+                      <a:solidFill>
+                        <a:srgbClr val="94A3B8"/>
+                      </a:solidFill>
+                      <a:prstDash val="solid"/>
+                      <a:round/>
+                      <a:headEnd type="none" w="med" len="med"/>
+                      <a:tailEnd type="none" w="med" len="med"/>
+                    </a:lnR>
+                    <a:lnT w="12700" cap="flat" cmpd="sng" algn="ctr">
+                      <a:solidFill>
+                        <a:srgbClr val="94A3B8"/>
+                      </a:solidFill>
+                      <a:prstDash val="solid"/>
+                      <a:round/>
+                      <a:headEnd type="none" w="med" len="med"/>
+                      <a:tailEnd type="none" w="med" len="med"/>
+                    </a:lnT>
+                    <a:lnB w="12700" cap="flat" cmpd="sng" algn="ctr">
+                      <a:solidFill>
+                        <a:srgbClr val="94A3B8"/>
+                      </a:solidFill>
+                      <a:prstDash val="solid"/>
+                      <a:round/>
+                      <a:headEnd type="none" w="med" len="med"/>
+                      <a:tailEnd type="none" w="med" len="med"/>
+                    </a:lnB>
+                    <a:solidFill>
+                      <a:srgbClr val="FFFFFF"/>
+                    </a:solidFill>
+                  </a:tcPr>
+                </a:tc>
+                <a:tc>
+                  <a:txBody>
+                    <a:bodyPr/>
+                    <a:lstStyle/>
+                    <a:p>
+                      <a:pPr eaLnBrk="0" algn="ctr" indent="0" marL="0">
+                        <a:buNone/>
+                      </a:pPr>
+                      <a:r>
+                        <a:rPr lang="en-US" sz="2600" dirty="0">
+                          <a:solidFill>
+                            <a:srgbClr val="1F2937"/>
+                          </a:solidFill>
+                          <a:latin typeface="맑은 고딕" pitchFamily="34" charset="0"/>
+                          <a:ea typeface="맑은 고딕" pitchFamily="34" charset="-122"/>
+                          <a:cs typeface="맑은 고딕" pitchFamily="34" charset="-120"/>
+                        </a:rPr>
+                        <a:t>8</a:t>
+                      </a:r>
+                      <a:endParaRPr lang="en-US" sz="2600" dirty="0">
+                        <a:latin typeface="맑은 고딕" charset="0"/>
+                        <a:ea typeface="맑은 고딕" charset="0"/>
+                        <a:cs typeface="맑은 고딕" charset="0"/>
+                      </a:endParaRPr>
+                    </a:p>
+                  </a:txBody>
+                  <a:tcPr marL="38100" marR="38100" marT="38100" marB="38100" anchor="ctr">
+                    <a:lnL w="12700" cap="flat" cmpd="sng" algn="ctr">
+                      <a:solidFill>
+                        <a:srgbClr val="94A3B8"/>
+                      </a:solidFill>
+                      <a:prstDash val="solid"/>
+                      <a:round/>
+                      <a:headEnd type="none" w="med" len="med"/>
+                      <a:tailEnd type="none" w="med" len="med"/>
+                    </a:lnL>
+                    <a:lnR w="12700" cap="flat" cmpd="sng" algn="ctr">
+                      <a:solidFill>
+                        <a:srgbClr val="94A3B8"/>
+                      </a:solidFill>
+                      <a:prstDash val="solid"/>
+                      <a:round/>
+                      <a:headEnd type="none" w="med" len="med"/>
+                      <a:tailEnd type="none" w="med" len="med"/>
+                    </a:lnR>
+                    <a:lnT w="12700" cap="flat" cmpd="sng" algn="ctr">
+                      <a:solidFill>
+                        <a:srgbClr val="94A3B8"/>
+                      </a:solidFill>
+                      <a:prstDash val="solid"/>
+                      <a:round/>
+                      <a:headEnd type="none" w="med" len="med"/>
+                      <a:tailEnd type="none" w="med" len="med"/>
+                    </a:lnT>
+                    <a:lnB w="12700" cap="flat" cmpd="sng" algn="ctr">
+                      <a:solidFill>
+                        <a:srgbClr val="94A3B8"/>
+                      </a:solidFill>
+                      <a:prstDash val="solid"/>
+                      <a:round/>
+                      <a:headEnd type="none" w="med" len="med"/>
+                      <a:tailEnd type="none" w="med" len="med"/>
+                    </a:lnB>
+                    <a:solidFill>
+                      <a:srgbClr val="FFFFFF"/>
+                    </a:solidFill>
+                  </a:tcPr>
+                </a:tc>
+                <a:tc>
+                  <a:txBody>
+                    <a:bodyPr/>
+                    <a:lstStyle/>
+                    <a:p>
+                      <a:pPr eaLnBrk="0" algn="ctr" indent="0" marL="0">
+                        <a:buNone/>
+                      </a:pPr>
+                      <a:r>
+                        <a:rPr lang="en-US" sz="2600" dirty="0">
+                          <a:solidFill>
+                            <a:srgbClr val="1F2937"/>
+                          </a:solidFill>
+                          <a:latin typeface="맑은 고딕" pitchFamily="34" charset="0"/>
+                          <a:ea typeface="맑은 고딕" pitchFamily="34" charset="-122"/>
+                          <a:cs typeface="맑은 고딕" pitchFamily="34" charset="-120"/>
+                        </a:rPr>
+                        <a:t>9</a:t>
+                      </a:r>
+                      <a:endParaRPr lang="en-US" sz="2600" dirty="0">
+                        <a:latin typeface="맑은 고딕" charset="0"/>
+                        <a:ea typeface="맑은 고딕" charset="0"/>
+                        <a:cs typeface="맑은 고딕" charset="0"/>
+                      </a:endParaRPr>
+                    </a:p>
+                  </a:txBody>
+                  <a:tcPr marL="38100" marR="38100" marT="38100" marB="38100" anchor="ctr">
+                    <a:lnL w="12700" cap="flat" cmpd="sng" algn="ctr">
+                      <a:solidFill>
+                        <a:srgbClr val="94A3B8"/>
+                      </a:solidFill>
+                      <a:prstDash val="solid"/>
+                      <a:round/>
+                      <a:headEnd type="none" w="med" len="med"/>
+                      <a:tailEnd type="none" w="med" len="med"/>
+                    </a:lnL>
+                    <a:lnR w="12700" cap="flat" cmpd="sng" algn="ctr">
+                      <a:solidFill>
+                        <a:srgbClr val="94A3B8"/>
+                      </a:solidFill>
+                      <a:prstDash val="solid"/>
+                      <a:round/>
+                      <a:headEnd type="none" w="med" len="med"/>
+                      <a:tailEnd type="none" w="med" len="med"/>
+                    </a:lnR>
+                    <a:lnT w="12700" cap="flat" cmpd="sng" algn="ctr">
+                      <a:solidFill>
+                        <a:srgbClr val="94A3B8"/>
+                      </a:solidFill>
+                      <a:prstDash val="solid"/>
+                      <a:round/>
+                      <a:headEnd type="none" w="med" len="med"/>
+                      <a:tailEnd type="none" w="med" len="med"/>
+                    </a:lnT>
+                    <a:lnB w="12700" cap="flat" cmpd="sng" algn="ctr">
+                      <a:solidFill>
+                        <a:srgbClr val="94A3B8"/>
+                      </a:solidFill>
+                      <a:prstDash val="solid"/>
+                      <a:round/>
+                      <a:headEnd type="none" w="med" len="med"/>
+                      <a:tailEnd type="none" w="med" len="med"/>
+                    </a:lnB>
+                    <a:solidFill>
+                      <a:srgbClr val="FFFFFF"/>
+                    </a:solidFill>
+                  </a:tcPr>
+                </a:tc>
+              </a:tr>
+              <a:tr h="511810">
                 <a:tc>
                   <a:txBody>
                     <a:bodyPr/>
